--- a/images/tree.pptx
+++ b/images/tree.pptx
@@ -2,12 +2,13 @@
 <file path=ppt/presentation.xml><?xml version="1.0" encoding="utf-8"?>
 <p:presentation xmlns:a="http://schemas.openxmlformats.org/drawingml/2006/main" xmlns:r="http://schemas.openxmlformats.org/officeDocument/2006/relationships" xmlns:p="http://schemas.openxmlformats.org/presentationml/2006/main" saveSubsetFonts="1">
   <p:sldMasterIdLst>
-    <p:sldMasterId id="2147483660" r:id="rId1"/>
+    <p:sldMasterId id="2147483696" r:id="rId1"/>
   </p:sldMasterIdLst>
   <p:sldIdLst>
     <p:sldId id="256" r:id="rId2"/>
+    <p:sldId id="257" r:id="rId3"/>
   </p:sldIdLst>
-  <p:sldSz cx="9144000" cy="6858000" type="screen4x3"/>
+  <p:sldSz cx="6400800" cy="9144000"/>
   <p:notesSz cx="6858000" cy="9144000"/>
   <p:defaultTextStyle>
     <a:defPPr>
@@ -136,15 +137,15 @@
         </p:nvSpPr>
         <p:spPr>
           <a:xfrm>
-            <a:off x="685800" y="1122363"/>
-            <a:ext cx="7772400" cy="2387600"/>
+            <a:off x="480060" y="1496484"/>
+            <a:ext cx="5440680" cy="3183467"/>
           </a:xfrm>
         </p:spPr>
         <p:txBody>
           <a:bodyPr anchor="b"/>
           <a:lstStyle>
             <a:lvl1pPr algn="ctr">
-              <a:defRPr sz="6000"/>
+              <a:defRPr sz="4200"/>
             </a:lvl1pPr>
           </a:lstStyle>
           <a:p>
@@ -168,8 +169,8 @@
         </p:nvSpPr>
         <p:spPr>
           <a:xfrm>
-            <a:off x="1143000" y="3602038"/>
-            <a:ext cx="6858000" cy="1655762"/>
+            <a:off x="800100" y="4802720"/>
+            <a:ext cx="4800600" cy="2207683"/>
           </a:xfrm>
         </p:spPr>
         <p:txBody>
@@ -177,39 +178,39 @@
           <a:lstStyle>
             <a:lvl1pPr marL="0" indent="0" algn="ctr">
               <a:buNone/>
-              <a:defRPr sz="2400"/>
+              <a:defRPr sz="1680"/>
             </a:lvl1pPr>
-            <a:lvl2pPr marL="457200" indent="0" algn="ctr">
+            <a:lvl2pPr marL="320037" indent="0" algn="ctr">
               <a:buNone/>
-              <a:defRPr sz="2000"/>
+              <a:defRPr sz="1400"/>
             </a:lvl2pPr>
-            <a:lvl3pPr marL="914400" indent="0" algn="ctr">
+            <a:lvl3pPr marL="640074" indent="0" algn="ctr">
               <a:buNone/>
-              <a:defRPr sz="1800"/>
+              <a:defRPr sz="1260"/>
             </a:lvl3pPr>
-            <a:lvl4pPr marL="1371600" indent="0" algn="ctr">
+            <a:lvl4pPr marL="960110" indent="0" algn="ctr">
               <a:buNone/>
-              <a:defRPr sz="1600"/>
+              <a:defRPr sz="1120"/>
             </a:lvl4pPr>
-            <a:lvl5pPr marL="1828800" indent="0" algn="ctr">
+            <a:lvl5pPr marL="1280147" indent="0" algn="ctr">
               <a:buNone/>
-              <a:defRPr sz="1600"/>
+              <a:defRPr sz="1120"/>
             </a:lvl5pPr>
-            <a:lvl6pPr marL="2286000" indent="0" algn="ctr">
+            <a:lvl6pPr marL="1600184" indent="0" algn="ctr">
               <a:buNone/>
-              <a:defRPr sz="1600"/>
+              <a:defRPr sz="1120"/>
             </a:lvl6pPr>
-            <a:lvl7pPr marL="2743200" indent="0" algn="ctr">
+            <a:lvl7pPr marL="1920221" indent="0" algn="ctr">
               <a:buNone/>
-              <a:defRPr sz="1600"/>
+              <a:defRPr sz="1120"/>
             </a:lvl7pPr>
-            <a:lvl8pPr marL="3200400" indent="0" algn="ctr">
+            <a:lvl8pPr marL="2240258" indent="0" algn="ctr">
               <a:buNone/>
-              <a:defRPr sz="1600"/>
+              <a:defRPr sz="1120"/>
             </a:lvl8pPr>
-            <a:lvl9pPr marL="3657600" indent="0" algn="ctr">
+            <a:lvl9pPr marL="2560294" indent="0" algn="ctr">
               <a:buNone/>
-              <a:defRPr sz="1600"/>
+              <a:defRPr sz="1120"/>
             </a:lvl9pPr>
           </a:lstStyle>
           <a:p>
@@ -289,7 +290,7 @@
     </p:spTree>
     <p:extLst>
       <p:ext uri="{BB962C8B-B14F-4D97-AF65-F5344CB8AC3E}">
-        <p14:creationId xmlns:p14="http://schemas.microsoft.com/office/powerpoint/2010/main" val="2213425660"/>
+        <p14:creationId xmlns:p14="http://schemas.microsoft.com/office/powerpoint/2010/main" val="3422241908"/>
       </p:ext>
     </p:extLst>
   </p:cSld>
@@ -459,7 +460,7 @@
     </p:spTree>
     <p:extLst>
       <p:ext uri="{BB962C8B-B14F-4D97-AF65-F5344CB8AC3E}">
-        <p14:creationId xmlns:p14="http://schemas.microsoft.com/office/powerpoint/2010/main" val="708741107"/>
+        <p14:creationId xmlns:p14="http://schemas.microsoft.com/office/powerpoint/2010/main" val="725487058"/>
       </p:ext>
     </p:extLst>
   </p:cSld>
@@ -498,8 +499,8 @@
         </p:nvSpPr>
         <p:spPr>
           <a:xfrm>
-            <a:off x="6543675" y="365125"/>
-            <a:ext cx="1971675" cy="5811838"/>
+            <a:off x="4580577" y="486836"/>
+            <a:ext cx="1380173" cy="7749117"/>
           </a:xfrm>
         </p:spPr>
         <p:txBody>
@@ -526,8 +527,8 @@
         </p:nvSpPr>
         <p:spPr>
           <a:xfrm>
-            <a:off x="628650" y="365125"/>
-            <a:ext cx="5800725" cy="5811838"/>
+            <a:off x="440055" y="486836"/>
+            <a:ext cx="4060508" cy="7749117"/>
           </a:xfrm>
         </p:spPr>
         <p:txBody>
@@ -639,7 +640,7 @@
     </p:spTree>
     <p:extLst>
       <p:ext uri="{BB962C8B-B14F-4D97-AF65-F5344CB8AC3E}">
-        <p14:creationId xmlns:p14="http://schemas.microsoft.com/office/powerpoint/2010/main" val="2329473666"/>
+        <p14:creationId xmlns:p14="http://schemas.microsoft.com/office/powerpoint/2010/main" val="1616101789"/>
       </p:ext>
     </p:extLst>
   </p:cSld>
@@ -809,7 +810,7 @@
     </p:spTree>
     <p:extLst>
       <p:ext uri="{BB962C8B-B14F-4D97-AF65-F5344CB8AC3E}">
-        <p14:creationId xmlns:p14="http://schemas.microsoft.com/office/powerpoint/2010/main" val="2303606593"/>
+        <p14:creationId xmlns:p14="http://schemas.microsoft.com/office/powerpoint/2010/main" val="1845828994"/>
       </p:ext>
     </p:extLst>
   </p:cSld>
@@ -848,15 +849,15 @@
         </p:nvSpPr>
         <p:spPr>
           <a:xfrm>
-            <a:off x="623888" y="1709739"/>
-            <a:ext cx="7886700" cy="2852737"/>
+            <a:off x="436722" y="2279653"/>
+            <a:ext cx="5520690" cy="3803649"/>
           </a:xfrm>
         </p:spPr>
         <p:txBody>
           <a:bodyPr anchor="b"/>
           <a:lstStyle>
             <a:lvl1pPr>
-              <a:defRPr sz="6000"/>
+              <a:defRPr sz="4200"/>
             </a:lvl1pPr>
           </a:lstStyle>
           <a:p>
@@ -880,8 +881,8 @@
         </p:nvSpPr>
         <p:spPr>
           <a:xfrm>
-            <a:off x="623888" y="4589464"/>
-            <a:ext cx="7886700" cy="1500187"/>
+            <a:off x="436722" y="6119288"/>
+            <a:ext cx="5520690" cy="2000249"/>
           </a:xfrm>
         </p:spPr>
         <p:txBody>
@@ -889,15 +890,15 @@
           <a:lstStyle>
             <a:lvl1pPr marL="0" indent="0">
               <a:buNone/>
-              <a:defRPr sz="2400">
+              <a:defRPr sz="1680">
                 <a:solidFill>
                   <a:schemeClr val="tx1"/>
                 </a:solidFill>
               </a:defRPr>
             </a:lvl1pPr>
-            <a:lvl2pPr marL="457200" indent="0">
+            <a:lvl2pPr marL="320037" indent="0">
               <a:buNone/>
-              <a:defRPr sz="2000">
+              <a:defRPr sz="1400">
                 <a:solidFill>
                   <a:schemeClr val="tx1">
                     <a:tint val="75000"/>
@@ -905,9 +906,9 @@
                 </a:solidFill>
               </a:defRPr>
             </a:lvl2pPr>
-            <a:lvl3pPr marL="914400" indent="0">
+            <a:lvl3pPr marL="640074" indent="0">
               <a:buNone/>
-              <a:defRPr sz="1800">
+              <a:defRPr sz="1260">
                 <a:solidFill>
                   <a:schemeClr val="tx1">
                     <a:tint val="75000"/>
@@ -915,9 +916,9 @@
                 </a:solidFill>
               </a:defRPr>
             </a:lvl3pPr>
-            <a:lvl4pPr marL="1371600" indent="0">
+            <a:lvl4pPr marL="960110" indent="0">
               <a:buNone/>
-              <a:defRPr sz="1600">
+              <a:defRPr sz="1120">
                 <a:solidFill>
                   <a:schemeClr val="tx1">
                     <a:tint val="75000"/>
@@ -925,9 +926,9 @@
                 </a:solidFill>
               </a:defRPr>
             </a:lvl4pPr>
-            <a:lvl5pPr marL="1828800" indent="0">
+            <a:lvl5pPr marL="1280147" indent="0">
               <a:buNone/>
-              <a:defRPr sz="1600">
+              <a:defRPr sz="1120">
                 <a:solidFill>
                   <a:schemeClr val="tx1">
                     <a:tint val="75000"/>
@@ -935,9 +936,9 @@
                 </a:solidFill>
               </a:defRPr>
             </a:lvl5pPr>
-            <a:lvl6pPr marL="2286000" indent="0">
+            <a:lvl6pPr marL="1600184" indent="0">
               <a:buNone/>
-              <a:defRPr sz="1600">
+              <a:defRPr sz="1120">
                 <a:solidFill>
                   <a:schemeClr val="tx1">
                     <a:tint val="75000"/>
@@ -945,9 +946,9 @@
                 </a:solidFill>
               </a:defRPr>
             </a:lvl6pPr>
-            <a:lvl7pPr marL="2743200" indent="0">
+            <a:lvl7pPr marL="1920221" indent="0">
               <a:buNone/>
-              <a:defRPr sz="1600">
+              <a:defRPr sz="1120">
                 <a:solidFill>
                   <a:schemeClr val="tx1">
                     <a:tint val="75000"/>
@@ -955,9 +956,9 @@
                 </a:solidFill>
               </a:defRPr>
             </a:lvl7pPr>
-            <a:lvl8pPr marL="3200400" indent="0">
+            <a:lvl8pPr marL="2240258" indent="0">
               <a:buNone/>
-              <a:defRPr sz="1600">
+              <a:defRPr sz="1120">
                 <a:solidFill>
                   <a:schemeClr val="tx1">
                     <a:tint val="75000"/>
@@ -965,9 +966,9 @@
                 </a:solidFill>
               </a:defRPr>
             </a:lvl8pPr>
-            <a:lvl9pPr marL="3657600" indent="0">
+            <a:lvl9pPr marL="2560294" indent="0">
               <a:buNone/>
-              <a:defRPr sz="1600">
+              <a:defRPr sz="1120">
                 <a:solidFill>
                   <a:schemeClr val="tx1">
                     <a:tint val="75000"/>
@@ -1053,7 +1054,7 @@
     </p:spTree>
     <p:extLst>
       <p:ext uri="{BB962C8B-B14F-4D97-AF65-F5344CB8AC3E}">
-        <p14:creationId xmlns:p14="http://schemas.microsoft.com/office/powerpoint/2010/main" val="2139324679"/>
+        <p14:creationId xmlns:p14="http://schemas.microsoft.com/office/powerpoint/2010/main" val="784796977"/>
       </p:ext>
     </p:extLst>
   </p:cSld>
@@ -1115,8 +1116,8 @@
         </p:nvSpPr>
         <p:spPr>
           <a:xfrm>
-            <a:off x="628650" y="1825625"/>
-            <a:ext cx="3886200" cy="4351338"/>
+            <a:off x="440055" y="2434167"/>
+            <a:ext cx="2720340" cy="5801784"/>
           </a:xfrm>
         </p:spPr>
         <p:txBody>
@@ -1172,8 +1173,8 @@
         </p:nvSpPr>
         <p:spPr>
           <a:xfrm>
-            <a:off x="4629150" y="1825625"/>
-            <a:ext cx="3886200" cy="4351338"/>
+            <a:off x="3240405" y="2434167"/>
+            <a:ext cx="2720340" cy="5801784"/>
           </a:xfrm>
         </p:spPr>
         <p:txBody>
@@ -1285,7 +1286,7 @@
     </p:spTree>
     <p:extLst>
       <p:ext uri="{BB962C8B-B14F-4D97-AF65-F5344CB8AC3E}">
-        <p14:creationId xmlns:p14="http://schemas.microsoft.com/office/powerpoint/2010/main" val="657020861"/>
+        <p14:creationId xmlns:p14="http://schemas.microsoft.com/office/powerpoint/2010/main" val="3076790366"/>
       </p:ext>
     </p:extLst>
   </p:cSld>
@@ -1324,8 +1325,8 @@
         </p:nvSpPr>
         <p:spPr>
           <a:xfrm>
-            <a:off x="629841" y="365126"/>
-            <a:ext cx="7886700" cy="1325563"/>
+            <a:off x="440889" y="486838"/>
+            <a:ext cx="5520690" cy="1767417"/>
           </a:xfrm>
         </p:spPr>
         <p:txBody>
@@ -1352,8 +1353,8 @@
         </p:nvSpPr>
         <p:spPr>
           <a:xfrm>
-            <a:off x="629842" y="1681163"/>
-            <a:ext cx="3868340" cy="823912"/>
+            <a:off x="440889" y="2241551"/>
+            <a:ext cx="2707838" cy="1098549"/>
           </a:xfrm>
         </p:spPr>
         <p:txBody>
@@ -1361,39 +1362,39 @@
           <a:lstStyle>
             <a:lvl1pPr marL="0" indent="0">
               <a:buNone/>
-              <a:defRPr sz="2400" b="1"/>
+              <a:defRPr sz="1680" b="1"/>
             </a:lvl1pPr>
-            <a:lvl2pPr marL="457200" indent="0">
+            <a:lvl2pPr marL="320037" indent="0">
               <a:buNone/>
-              <a:defRPr sz="2000" b="1"/>
+              <a:defRPr sz="1400" b="1"/>
             </a:lvl2pPr>
-            <a:lvl3pPr marL="914400" indent="0">
+            <a:lvl3pPr marL="640074" indent="0">
               <a:buNone/>
-              <a:defRPr sz="1800" b="1"/>
+              <a:defRPr sz="1260" b="1"/>
             </a:lvl3pPr>
-            <a:lvl4pPr marL="1371600" indent="0">
+            <a:lvl4pPr marL="960110" indent="0">
               <a:buNone/>
-              <a:defRPr sz="1600" b="1"/>
+              <a:defRPr sz="1120" b="1"/>
             </a:lvl4pPr>
-            <a:lvl5pPr marL="1828800" indent="0">
+            <a:lvl5pPr marL="1280147" indent="0">
               <a:buNone/>
-              <a:defRPr sz="1600" b="1"/>
+              <a:defRPr sz="1120" b="1"/>
             </a:lvl5pPr>
-            <a:lvl6pPr marL="2286000" indent="0">
+            <a:lvl6pPr marL="1600184" indent="0">
               <a:buNone/>
-              <a:defRPr sz="1600" b="1"/>
+              <a:defRPr sz="1120" b="1"/>
             </a:lvl6pPr>
-            <a:lvl7pPr marL="2743200" indent="0">
+            <a:lvl7pPr marL="1920221" indent="0">
               <a:buNone/>
-              <a:defRPr sz="1600" b="1"/>
+              <a:defRPr sz="1120" b="1"/>
             </a:lvl7pPr>
-            <a:lvl8pPr marL="3200400" indent="0">
+            <a:lvl8pPr marL="2240258" indent="0">
               <a:buNone/>
-              <a:defRPr sz="1600" b="1"/>
+              <a:defRPr sz="1120" b="1"/>
             </a:lvl8pPr>
-            <a:lvl9pPr marL="3657600" indent="0">
+            <a:lvl9pPr marL="2560294" indent="0">
               <a:buNone/>
-              <a:defRPr sz="1600" b="1"/>
+              <a:defRPr sz="1120" b="1"/>
             </a:lvl9pPr>
           </a:lstStyle>
           <a:p>
@@ -1417,8 +1418,8 @@
         </p:nvSpPr>
         <p:spPr>
           <a:xfrm>
-            <a:off x="629842" y="2505075"/>
-            <a:ext cx="3868340" cy="3684588"/>
+            <a:off x="440889" y="3340100"/>
+            <a:ext cx="2707838" cy="4912784"/>
           </a:xfrm>
         </p:spPr>
         <p:txBody>
@@ -1474,8 +1475,8 @@
         </p:nvSpPr>
         <p:spPr>
           <a:xfrm>
-            <a:off x="4629150" y="1681163"/>
-            <a:ext cx="3887391" cy="823912"/>
+            <a:off x="3240405" y="2241551"/>
+            <a:ext cx="2721174" cy="1098549"/>
           </a:xfrm>
         </p:spPr>
         <p:txBody>
@@ -1483,39 +1484,39 @@
           <a:lstStyle>
             <a:lvl1pPr marL="0" indent="0">
               <a:buNone/>
-              <a:defRPr sz="2400" b="1"/>
+              <a:defRPr sz="1680" b="1"/>
             </a:lvl1pPr>
-            <a:lvl2pPr marL="457200" indent="0">
+            <a:lvl2pPr marL="320037" indent="0">
               <a:buNone/>
-              <a:defRPr sz="2000" b="1"/>
+              <a:defRPr sz="1400" b="1"/>
             </a:lvl2pPr>
-            <a:lvl3pPr marL="914400" indent="0">
+            <a:lvl3pPr marL="640074" indent="0">
               <a:buNone/>
-              <a:defRPr sz="1800" b="1"/>
+              <a:defRPr sz="1260" b="1"/>
             </a:lvl3pPr>
-            <a:lvl4pPr marL="1371600" indent="0">
+            <a:lvl4pPr marL="960110" indent="0">
               <a:buNone/>
-              <a:defRPr sz="1600" b="1"/>
+              <a:defRPr sz="1120" b="1"/>
             </a:lvl4pPr>
-            <a:lvl5pPr marL="1828800" indent="0">
+            <a:lvl5pPr marL="1280147" indent="0">
               <a:buNone/>
-              <a:defRPr sz="1600" b="1"/>
+              <a:defRPr sz="1120" b="1"/>
             </a:lvl5pPr>
-            <a:lvl6pPr marL="2286000" indent="0">
+            <a:lvl6pPr marL="1600184" indent="0">
               <a:buNone/>
-              <a:defRPr sz="1600" b="1"/>
+              <a:defRPr sz="1120" b="1"/>
             </a:lvl6pPr>
-            <a:lvl7pPr marL="2743200" indent="0">
+            <a:lvl7pPr marL="1920221" indent="0">
               <a:buNone/>
-              <a:defRPr sz="1600" b="1"/>
+              <a:defRPr sz="1120" b="1"/>
             </a:lvl7pPr>
-            <a:lvl8pPr marL="3200400" indent="0">
+            <a:lvl8pPr marL="2240258" indent="0">
               <a:buNone/>
-              <a:defRPr sz="1600" b="1"/>
+              <a:defRPr sz="1120" b="1"/>
             </a:lvl8pPr>
-            <a:lvl9pPr marL="3657600" indent="0">
+            <a:lvl9pPr marL="2560294" indent="0">
               <a:buNone/>
-              <a:defRPr sz="1600" b="1"/>
+              <a:defRPr sz="1120" b="1"/>
             </a:lvl9pPr>
           </a:lstStyle>
           <a:p>
@@ -1539,8 +1540,8 @@
         </p:nvSpPr>
         <p:spPr>
           <a:xfrm>
-            <a:off x="4629150" y="2505075"/>
-            <a:ext cx="3887391" cy="3684588"/>
+            <a:off x="3240405" y="3340100"/>
+            <a:ext cx="2721174" cy="4912784"/>
           </a:xfrm>
         </p:spPr>
         <p:txBody>
@@ -1652,7 +1653,7 @@
     </p:spTree>
     <p:extLst>
       <p:ext uri="{BB962C8B-B14F-4D97-AF65-F5344CB8AC3E}">
-        <p14:creationId xmlns:p14="http://schemas.microsoft.com/office/powerpoint/2010/main" val="3052550455"/>
+        <p14:creationId xmlns:p14="http://schemas.microsoft.com/office/powerpoint/2010/main" val="2121299007"/>
       </p:ext>
     </p:extLst>
   </p:cSld>
@@ -1770,7 +1771,7 @@
     </p:spTree>
     <p:extLst>
       <p:ext uri="{BB962C8B-B14F-4D97-AF65-F5344CB8AC3E}">
-        <p14:creationId xmlns:p14="http://schemas.microsoft.com/office/powerpoint/2010/main" val="1890918773"/>
+        <p14:creationId xmlns:p14="http://schemas.microsoft.com/office/powerpoint/2010/main" val="839233292"/>
       </p:ext>
     </p:extLst>
   </p:cSld>
@@ -1865,7 +1866,7 @@
     </p:spTree>
     <p:extLst>
       <p:ext uri="{BB962C8B-B14F-4D97-AF65-F5344CB8AC3E}">
-        <p14:creationId xmlns:p14="http://schemas.microsoft.com/office/powerpoint/2010/main" val="2618066402"/>
+        <p14:creationId xmlns:p14="http://schemas.microsoft.com/office/powerpoint/2010/main" val="1712057976"/>
       </p:ext>
     </p:extLst>
   </p:cSld>
@@ -1904,15 +1905,15 @@
         </p:nvSpPr>
         <p:spPr>
           <a:xfrm>
-            <a:off x="629841" y="457200"/>
-            <a:ext cx="2949178" cy="1600200"/>
+            <a:off x="440893" y="609600"/>
+            <a:ext cx="2064425" cy="2133600"/>
           </a:xfrm>
         </p:spPr>
         <p:txBody>
           <a:bodyPr anchor="b"/>
           <a:lstStyle>
             <a:lvl1pPr>
-              <a:defRPr sz="3200"/>
+              <a:defRPr sz="2240"/>
             </a:lvl1pPr>
           </a:lstStyle>
           <a:p>
@@ -1936,39 +1937,39 @@
         </p:nvSpPr>
         <p:spPr>
           <a:xfrm>
-            <a:off x="3887391" y="987426"/>
-            <a:ext cx="4629150" cy="4873625"/>
+            <a:off x="2721178" y="1316571"/>
+            <a:ext cx="3240405" cy="6498167"/>
           </a:xfrm>
         </p:spPr>
         <p:txBody>
           <a:bodyPr/>
           <a:lstStyle>
             <a:lvl1pPr>
-              <a:defRPr sz="3200"/>
+              <a:defRPr sz="2240"/>
             </a:lvl1pPr>
             <a:lvl2pPr>
-              <a:defRPr sz="2800"/>
+              <a:defRPr sz="1960"/>
             </a:lvl2pPr>
             <a:lvl3pPr>
-              <a:defRPr sz="2400"/>
+              <a:defRPr sz="1680"/>
             </a:lvl3pPr>
             <a:lvl4pPr>
-              <a:defRPr sz="2000"/>
+              <a:defRPr sz="1400"/>
             </a:lvl4pPr>
             <a:lvl5pPr>
-              <a:defRPr sz="2000"/>
+              <a:defRPr sz="1400"/>
             </a:lvl5pPr>
             <a:lvl6pPr>
-              <a:defRPr sz="2000"/>
+              <a:defRPr sz="1400"/>
             </a:lvl6pPr>
             <a:lvl7pPr>
-              <a:defRPr sz="2000"/>
+              <a:defRPr sz="1400"/>
             </a:lvl7pPr>
             <a:lvl8pPr>
-              <a:defRPr sz="2000"/>
+              <a:defRPr sz="1400"/>
             </a:lvl8pPr>
             <a:lvl9pPr>
-              <a:defRPr sz="2000"/>
+              <a:defRPr sz="1400"/>
             </a:lvl9pPr>
           </a:lstStyle>
           <a:p>
@@ -2021,8 +2022,8 @@
         </p:nvSpPr>
         <p:spPr>
           <a:xfrm>
-            <a:off x="629841" y="2057400"/>
-            <a:ext cx="2949178" cy="3811588"/>
+            <a:off x="440893" y="2743203"/>
+            <a:ext cx="2064425" cy="5082117"/>
           </a:xfrm>
         </p:spPr>
         <p:txBody>
@@ -2030,39 +2031,39 @@
           <a:lstStyle>
             <a:lvl1pPr marL="0" indent="0">
               <a:buNone/>
-              <a:defRPr sz="1600"/>
+              <a:defRPr sz="1120"/>
             </a:lvl1pPr>
-            <a:lvl2pPr marL="457200" indent="0">
+            <a:lvl2pPr marL="320037" indent="0">
               <a:buNone/>
-              <a:defRPr sz="1400"/>
+              <a:defRPr sz="980"/>
             </a:lvl2pPr>
-            <a:lvl3pPr marL="914400" indent="0">
+            <a:lvl3pPr marL="640074" indent="0">
               <a:buNone/>
-              <a:defRPr sz="1200"/>
+              <a:defRPr sz="840"/>
             </a:lvl3pPr>
-            <a:lvl4pPr marL="1371600" indent="0">
+            <a:lvl4pPr marL="960110" indent="0">
               <a:buNone/>
-              <a:defRPr sz="1000"/>
+              <a:defRPr sz="700"/>
             </a:lvl4pPr>
-            <a:lvl5pPr marL="1828800" indent="0">
+            <a:lvl5pPr marL="1280147" indent="0">
               <a:buNone/>
-              <a:defRPr sz="1000"/>
+              <a:defRPr sz="700"/>
             </a:lvl5pPr>
-            <a:lvl6pPr marL="2286000" indent="0">
+            <a:lvl6pPr marL="1600184" indent="0">
               <a:buNone/>
-              <a:defRPr sz="1000"/>
+              <a:defRPr sz="700"/>
             </a:lvl6pPr>
-            <a:lvl7pPr marL="2743200" indent="0">
+            <a:lvl7pPr marL="1920221" indent="0">
               <a:buNone/>
-              <a:defRPr sz="1000"/>
+              <a:defRPr sz="700"/>
             </a:lvl7pPr>
-            <a:lvl8pPr marL="3200400" indent="0">
+            <a:lvl8pPr marL="2240258" indent="0">
               <a:buNone/>
-              <a:defRPr sz="1000"/>
+              <a:defRPr sz="700"/>
             </a:lvl8pPr>
-            <a:lvl9pPr marL="3657600" indent="0">
+            <a:lvl9pPr marL="2560294" indent="0">
               <a:buNone/>
-              <a:defRPr sz="1000"/>
+              <a:defRPr sz="700"/>
             </a:lvl9pPr>
           </a:lstStyle>
           <a:p>
@@ -2142,7 +2143,7 @@
     </p:spTree>
     <p:extLst>
       <p:ext uri="{BB962C8B-B14F-4D97-AF65-F5344CB8AC3E}">
-        <p14:creationId xmlns:p14="http://schemas.microsoft.com/office/powerpoint/2010/main" val="540661967"/>
+        <p14:creationId xmlns:p14="http://schemas.microsoft.com/office/powerpoint/2010/main" val="4234340585"/>
       </p:ext>
     </p:extLst>
   </p:cSld>
@@ -2181,15 +2182,15 @@
         </p:nvSpPr>
         <p:spPr>
           <a:xfrm>
-            <a:off x="629841" y="457200"/>
-            <a:ext cx="2949178" cy="1600200"/>
+            <a:off x="440893" y="609600"/>
+            <a:ext cx="2064425" cy="2133600"/>
           </a:xfrm>
         </p:spPr>
         <p:txBody>
           <a:bodyPr anchor="b"/>
           <a:lstStyle>
             <a:lvl1pPr>
-              <a:defRPr sz="3200"/>
+              <a:defRPr sz="2240"/>
             </a:lvl1pPr>
           </a:lstStyle>
           <a:p>
@@ -2213,8 +2214,8 @@
         </p:nvSpPr>
         <p:spPr>
           <a:xfrm>
-            <a:off x="3887391" y="987426"/>
-            <a:ext cx="4629150" cy="4873625"/>
+            <a:off x="2721178" y="1316571"/>
+            <a:ext cx="3240405" cy="6498167"/>
           </a:xfrm>
         </p:spPr>
         <p:txBody>
@@ -2222,39 +2223,39 @@
           <a:lstStyle>
             <a:lvl1pPr marL="0" indent="0">
               <a:buNone/>
-              <a:defRPr sz="3200"/>
+              <a:defRPr sz="2240"/>
             </a:lvl1pPr>
-            <a:lvl2pPr marL="457200" indent="0">
+            <a:lvl2pPr marL="320037" indent="0">
               <a:buNone/>
-              <a:defRPr sz="2800"/>
+              <a:defRPr sz="1960"/>
             </a:lvl2pPr>
-            <a:lvl3pPr marL="914400" indent="0">
+            <a:lvl3pPr marL="640074" indent="0">
               <a:buNone/>
-              <a:defRPr sz="2400"/>
+              <a:defRPr sz="1680"/>
             </a:lvl3pPr>
-            <a:lvl4pPr marL="1371600" indent="0">
+            <a:lvl4pPr marL="960110" indent="0">
               <a:buNone/>
-              <a:defRPr sz="2000"/>
+              <a:defRPr sz="1400"/>
             </a:lvl4pPr>
-            <a:lvl5pPr marL="1828800" indent="0">
+            <a:lvl5pPr marL="1280147" indent="0">
               <a:buNone/>
-              <a:defRPr sz="2000"/>
+              <a:defRPr sz="1400"/>
             </a:lvl5pPr>
-            <a:lvl6pPr marL="2286000" indent="0">
+            <a:lvl6pPr marL="1600184" indent="0">
               <a:buNone/>
-              <a:defRPr sz="2000"/>
+              <a:defRPr sz="1400"/>
             </a:lvl6pPr>
-            <a:lvl7pPr marL="2743200" indent="0">
+            <a:lvl7pPr marL="1920221" indent="0">
               <a:buNone/>
-              <a:defRPr sz="2000"/>
+              <a:defRPr sz="1400"/>
             </a:lvl7pPr>
-            <a:lvl8pPr marL="3200400" indent="0">
+            <a:lvl8pPr marL="2240258" indent="0">
               <a:buNone/>
-              <a:defRPr sz="2000"/>
+              <a:defRPr sz="1400"/>
             </a:lvl8pPr>
-            <a:lvl9pPr marL="3657600" indent="0">
+            <a:lvl9pPr marL="2560294" indent="0">
               <a:buNone/>
-              <a:defRPr sz="2000"/>
+              <a:defRPr sz="1400"/>
             </a:lvl9pPr>
           </a:lstStyle>
           <a:p>
@@ -2278,8 +2279,8 @@
         </p:nvSpPr>
         <p:spPr>
           <a:xfrm>
-            <a:off x="629841" y="2057400"/>
-            <a:ext cx="2949178" cy="3811588"/>
+            <a:off x="440893" y="2743203"/>
+            <a:ext cx="2064425" cy="5082117"/>
           </a:xfrm>
         </p:spPr>
         <p:txBody>
@@ -2287,39 +2288,39 @@
           <a:lstStyle>
             <a:lvl1pPr marL="0" indent="0">
               <a:buNone/>
-              <a:defRPr sz="1600"/>
+              <a:defRPr sz="1120"/>
             </a:lvl1pPr>
-            <a:lvl2pPr marL="457200" indent="0">
+            <a:lvl2pPr marL="320037" indent="0">
               <a:buNone/>
-              <a:defRPr sz="1400"/>
+              <a:defRPr sz="980"/>
             </a:lvl2pPr>
-            <a:lvl3pPr marL="914400" indent="0">
+            <a:lvl3pPr marL="640074" indent="0">
               <a:buNone/>
-              <a:defRPr sz="1200"/>
+              <a:defRPr sz="840"/>
             </a:lvl3pPr>
-            <a:lvl4pPr marL="1371600" indent="0">
+            <a:lvl4pPr marL="960110" indent="0">
               <a:buNone/>
-              <a:defRPr sz="1000"/>
+              <a:defRPr sz="700"/>
             </a:lvl4pPr>
-            <a:lvl5pPr marL="1828800" indent="0">
+            <a:lvl5pPr marL="1280147" indent="0">
               <a:buNone/>
-              <a:defRPr sz="1000"/>
+              <a:defRPr sz="700"/>
             </a:lvl5pPr>
-            <a:lvl6pPr marL="2286000" indent="0">
+            <a:lvl6pPr marL="1600184" indent="0">
               <a:buNone/>
-              <a:defRPr sz="1000"/>
+              <a:defRPr sz="700"/>
             </a:lvl6pPr>
-            <a:lvl7pPr marL="2743200" indent="0">
+            <a:lvl7pPr marL="1920221" indent="0">
               <a:buNone/>
-              <a:defRPr sz="1000"/>
+              <a:defRPr sz="700"/>
             </a:lvl7pPr>
-            <a:lvl8pPr marL="3200400" indent="0">
+            <a:lvl8pPr marL="2240258" indent="0">
               <a:buNone/>
-              <a:defRPr sz="1000"/>
+              <a:defRPr sz="700"/>
             </a:lvl8pPr>
-            <a:lvl9pPr marL="3657600" indent="0">
+            <a:lvl9pPr marL="2560294" indent="0">
               <a:buNone/>
-              <a:defRPr sz="1000"/>
+              <a:defRPr sz="700"/>
             </a:lvl9pPr>
           </a:lstStyle>
           <a:p>
@@ -2399,7 +2400,7 @@
     </p:spTree>
     <p:extLst>
       <p:ext uri="{BB962C8B-B14F-4D97-AF65-F5344CB8AC3E}">
-        <p14:creationId xmlns:p14="http://schemas.microsoft.com/office/powerpoint/2010/main" val="3943592389"/>
+        <p14:creationId xmlns:p14="http://schemas.microsoft.com/office/powerpoint/2010/main" val="1523969546"/>
       </p:ext>
     </p:extLst>
   </p:cSld>
@@ -2443,8 +2444,8 @@
         </p:nvSpPr>
         <p:spPr>
           <a:xfrm>
-            <a:off x="628650" y="365126"/>
-            <a:ext cx="7886700" cy="1325563"/>
+            <a:off x="440055" y="486838"/>
+            <a:ext cx="5520690" cy="1767417"/>
           </a:xfrm>
           <a:prstGeom prst="rect">
             <a:avLst/>
@@ -2476,8 +2477,8 @@
         </p:nvSpPr>
         <p:spPr>
           <a:xfrm>
-            <a:off x="628650" y="1825625"/>
-            <a:ext cx="7886700" cy="4351338"/>
+            <a:off x="440055" y="2434167"/>
+            <a:ext cx="5520690" cy="5801784"/>
           </a:xfrm>
           <a:prstGeom prst="rect">
             <a:avLst/>
@@ -2538,8 +2539,8 @@
         </p:nvSpPr>
         <p:spPr>
           <a:xfrm>
-            <a:off x="628650" y="6356351"/>
-            <a:ext cx="2057400" cy="365125"/>
+            <a:off x="440055" y="8475138"/>
+            <a:ext cx="1440180" cy="486833"/>
           </a:xfrm>
           <a:prstGeom prst="rect">
             <a:avLst/>
@@ -2549,7 +2550,7 @@
           <a:bodyPr vert="horz" lIns="91440" tIns="45720" rIns="91440" bIns="45720" rtlCol="0" anchor="ctr"/>
           <a:lstStyle>
             <a:lvl1pPr algn="l">
-              <a:defRPr sz="1200">
+              <a:defRPr sz="840">
                 <a:solidFill>
                   <a:schemeClr val="tx1">
                     <a:tint val="75000"/>
@@ -2579,8 +2580,8 @@
         </p:nvSpPr>
         <p:spPr>
           <a:xfrm>
-            <a:off x="3028950" y="6356351"/>
-            <a:ext cx="3086100" cy="365125"/>
+            <a:off x="2120265" y="8475138"/>
+            <a:ext cx="2160270" cy="486833"/>
           </a:xfrm>
           <a:prstGeom prst="rect">
             <a:avLst/>
@@ -2590,7 +2591,7 @@
           <a:bodyPr vert="horz" lIns="91440" tIns="45720" rIns="91440" bIns="45720" rtlCol="0" anchor="ctr"/>
           <a:lstStyle>
             <a:lvl1pPr algn="ctr">
-              <a:defRPr sz="1200">
+              <a:defRPr sz="840">
                 <a:solidFill>
                   <a:schemeClr val="tx1">
                     <a:tint val="75000"/>
@@ -2616,8 +2617,8 @@
         </p:nvSpPr>
         <p:spPr>
           <a:xfrm>
-            <a:off x="6457950" y="6356351"/>
-            <a:ext cx="2057400" cy="365125"/>
+            <a:off x="4520565" y="8475138"/>
+            <a:ext cx="1440180" cy="486833"/>
           </a:xfrm>
           <a:prstGeom prst="rect">
             <a:avLst/>
@@ -2627,7 +2628,7 @@
           <a:bodyPr vert="horz" lIns="91440" tIns="45720" rIns="91440" bIns="45720" rtlCol="0" anchor="ctr"/>
           <a:lstStyle>
             <a:lvl1pPr algn="r">
-              <a:defRPr sz="1200">
+              <a:defRPr sz="840">
                 <a:solidFill>
                   <a:schemeClr val="tx1">
                     <a:tint val="75000"/>
@@ -2648,27 +2649,27 @@
     </p:spTree>
     <p:extLst>
       <p:ext uri="{BB962C8B-B14F-4D97-AF65-F5344CB8AC3E}">
-        <p14:creationId xmlns:p14="http://schemas.microsoft.com/office/powerpoint/2010/main" val="3163430047"/>
+        <p14:creationId xmlns:p14="http://schemas.microsoft.com/office/powerpoint/2010/main" val="467740096"/>
       </p:ext>
     </p:extLst>
   </p:cSld>
   <p:clrMap bg1="lt1" tx1="dk1" bg2="lt2" tx2="dk2" accent1="accent1" accent2="accent2" accent3="accent3" accent4="accent4" accent5="accent5" accent6="accent6" hlink="hlink" folHlink="folHlink"/>
   <p:sldLayoutIdLst>
-    <p:sldLayoutId id="2147483661" r:id="rId1"/>
-    <p:sldLayoutId id="2147483662" r:id="rId2"/>
-    <p:sldLayoutId id="2147483663" r:id="rId3"/>
-    <p:sldLayoutId id="2147483664" r:id="rId4"/>
-    <p:sldLayoutId id="2147483665" r:id="rId5"/>
-    <p:sldLayoutId id="2147483666" r:id="rId6"/>
-    <p:sldLayoutId id="2147483667" r:id="rId7"/>
-    <p:sldLayoutId id="2147483668" r:id="rId8"/>
-    <p:sldLayoutId id="2147483669" r:id="rId9"/>
-    <p:sldLayoutId id="2147483670" r:id="rId10"/>
-    <p:sldLayoutId id="2147483671" r:id="rId11"/>
+    <p:sldLayoutId id="2147483697" r:id="rId1"/>
+    <p:sldLayoutId id="2147483698" r:id="rId2"/>
+    <p:sldLayoutId id="2147483699" r:id="rId3"/>
+    <p:sldLayoutId id="2147483700" r:id="rId4"/>
+    <p:sldLayoutId id="2147483701" r:id="rId5"/>
+    <p:sldLayoutId id="2147483702" r:id="rId6"/>
+    <p:sldLayoutId id="2147483703" r:id="rId7"/>
+    <p:sldLayoutId id="2147483704" r:id="rId8"/>
+    <p:sldLayoutId id="2147483705" r:id="rId9"/>
+    <p:sldLayoutId id="2147483706" r:id="rId10"/>
+    <p:sldLayoutId id="2147483707" r:id="rId11"/>
   </p:sldLayoutIdLst>
   <p:txStyles>
     <p:titleStyle>
-      <a:lvl1pPr algn="l" defTabSz="914400" rtl="0" eaLnBrk="1" latinLnBrk="0" hangingPunct="1">
+      <a:lvl1pPr algn="l" defTabSz="640074" rtl="0" eaLnBrk="1" latinLnBrk="0" hangingPunct="1">
         <a:lnSpc>
           <a:spcPct val="90000"/>
         </a:lnSpc>
@@ -2676,7 +2677,7 @@
           <a:spcPct val="0"/>
         </a:spcBef>
         <a:buNone/>
-        <a:defRPr sz="4400" kern="1200">
+        <a:defRPr sz="3080" kern="1200">
           <a:solidFill>
             <a:schemeClr val="tx1"/>
           </a:solidFill>
@@ -2687,16 +2688,16 @@
       </a:lvl1pPr>
     </p:titleStyle>
     <p:bodyStyle>
-      <a:lvl1pPr marL="228600" indent="-228600" algn="l" defTabSz="914400" rtl="0" eaLnBrk="1" latinLnBrk="0" hangingPunct="1">
+      <a:lvl1pPr marL="160018" indent="-160018" algn="l" defTabSz="640074" rtl="0" eaLnBrk="1" latinLnBrk="0" hangingPunct="1">
         <a:lnSpc>
           <a:spcPct val="90000"/>
         </a:lnSpc>
         <a:spcBef>
-          <a:spcPts val="1000"/>
+          <a:spcPts val="700"/>
         </a:spcBef>
         <a:buFont typeface="Arial" panose="020B0604020202020204" pitchFamily="34" charset="0"/>
         <a:buChar char="•"/>
-        <a:defRPr sz="2800" kern="1200">
+        <a:defRPr sz="1960" kern="1200">
           <a:solidFill>
             <a:schemeClr val="tx1"/>
           </a:solidFill>
@@ -2705,16 +2706,16 @@
           <a:cs typeface="+mn-cs"/>
         </a:defRPr>
       </a:lvl1pPr>
-      <a:lvl2pPr marL="685800" indent="-228600" algn="l" defTabSz="914400" rtl="0" eaLnBrk="1" latinLnBrk="0" hangingPunct="1">
+      <a:lvl2pPr marL="480055" indent="-160018" algn="l" defTabSz="640074" rtl="0" eaLnBrk="1" latinLnBrk="0" hangingPunct="1">
         <a:lnSpc>
           <a:spcPct val="90000"/>
         </a:lnSpc>
         <a:spcBef>
-          <a:spcPts val="500"/>
+          <a:spcPts val="350"/>
         </a:spcBef>
         <a:buFont typeface="Arial" panose="020B0604020202020204" pitchFamily="34" charset="0"/>
         <a:buChar char="•"/>
-        <a:defRPr sz="2400" kern="1200">
+        <a:defRPr sz="1680" kern="1200">
           <a:solidFill>
             <a:schemeClr val="tx1"/>
           </a:solidFill>
@@ -2723,16 +2724,16 @@
           <a:cs typeface="+mn-cs"/>
         </a:defRPr>
       </a:lvl2pPr>
-      <a:lvl3pPr marL="1143000" indent="-228600" algn="l" defTabSz="914400" rtl="0" eaLnBrk="1" latinLnBrk="0" hangingPunct="1">
+      <a:lvl3pPr marL="800092" indent="-160018" algn="l" defTabSz="640074" rtl="0" eaLnBrk="1" latinLnBrk="0" hangingPunct="1">
         <a:lnSpc>
           <a:spcPct val="90000"/>
         </a:lnSpc>
         <a:spcBef>
-          <a:spcPts val="500"/>
+          <a:spcPts val="350"/>
         </a:spcBef>
         <a:buFont typeface="Arial" panose="020B0604020202020204" pitchFamily="34" charset="0"/>
         <a:buChar char="•"/>
-        <a:defRPr sz="2000" kern="1200">
+        <a:defRPr sz="1400" kern="1200">
           <a:solidFill>
             <a:schemeClr val="tx1"/>
           </a:solidFill>
@@ -2741,16 +2742,16 @@
           <a:cs typeface="+mn-cs"/>
         </a:defRPr>
       </a:lvl3pPr>
-      <a:lvl4pPr marL="1600200" indent="-228600" algn="l" defTabSz="914400" rtl="0" eaLnBrk="1" latinLnBrk="0" hangingPunct="1">
+      <a:lvl4pPr marL="1120129" indent="-160018" algn="l" defTabSz="640074" rtl="0" eaLnBrk="1" latinLnBrk="0" hangingPunct="1">
         <a:lnSpc>
           <a:spcPct val="90000"/>
         </a:lnSpc>
         <a:spcBef>
-          <a:spcPts val="500"/>
+          <a:spcPts val="350"/>
         </a:spcBef>
         <a:buFont typeface="Arial" panose="020B0604020202020204" pitchFamily="34" charset="0"/>
         <a:buChar char="•"/>
-        <a:defRPr sz="1800" kern="1200">
+        <a:defRPr sz="1260" kern="1200">
           <a:solidFill>
             <a:schemeClr val="tx1"/>
           </a:solidFill>
@@ -2759,16 +2760,16 @@
           <a:cs typeface="+mn-cs"/>
         </a:defRPr>
       </a:lvl4pPr>
-      <a:lvl5pPr marL="2057400" indent="-228600" algn="l" defTabSz="914400" rtl="0" eaLnBrk="1" latinLnBrk="0" hangingPunct="1">
+      <a:lvl5pPr marL="1440166" indent="-160018" algn="l" defTabSz="640074" rtl="0" eaLnBrk="1" latinLnBrk="0" hangingPunct="1">
         <a:lnSpc>
           <a:spcPct val="90000"/>
         </a:lnSpc>
         <a:spcBef>
-          <a:spcPts val="500"/>
+          <a:spcPts val="350"/>
         </a:spcBef>
         <a:buFont typeface="Arial" panose="020B0604020202020204" pitchFamily="34" charset="0"/>
         <a:buChar char="•"/>
-        <a:defRPr sz="1800" kern="1200">
+        <a:defRPr sz="1260" kern="1200">
           <a:solidFill>
             <a:schemeClr val="tx1"/>
           </a:solidFill>
@@ -2777,16 +2778,16 @@
           <a:cs typeface="+mn-cs"/>
         </a:defRPr>
       </a:lvl5pPr>
-      <a:lvl6pPr marL="2514600" indent="-228600" algn="l" defTabSz="914400" rtl="0" eaLnBrk="1" latinLnBrk="0" hangingPunct="1">
+      <a:lvl6pPr marL="1760202" indent="-160018" algn="l" defTabSz="640074" rtl="0" eaLnBrk="1" latinLnBrk="0" hangingPunct="1">
         <a:lnSpc>
           <a:spcPct val="90000"/>
         </a:lnSpc>
         <a:spcBef>
-          <a:spcPts val="500"/>
+          <a:spcPts val="350"/>
         </a:spcBef>
         <a:buFont typeface="Arial" panose="020B0604020202020204" pitchFamily="34" charset="0"/>
         <a:buChar char="•"/>
-        <a:defRPr sz="1800" kern="1200">
+        <a:defRPr sz="1260" kern="1200">
           <a:solidFill>
             <a:schemeClr val="tx1"/>
           </a:solidFill>
@@ -2795,16 +2796,16 @@
           <a:cs typeface="+mn-cs"/>
         </a:defRPr>
       </a:lvl6pPr>
-      <a:lvl7pPr marL="2971800" indent="-228600" algn="l" defTabSz="914400" rtl="0" eaLnBrk="1" latinLnBrk="0" hangingPunct="1">
+      <a:lvl7pPr marL="2080239" indent="-160018" algn="l" defTabSz="640074" rtl="0" eaLnBrk="1" latinLnBrk="0" hangingPunct="1">
         <a:lnSpc>
           <a:spcPct val="90000"/>
         </a:lnSpc>
         <a:spcBef>
-          <a:spcPts val="500"/>
+          <a:spcPts val="350"/>
         </a:spcBef>
         <a:buFont typeface="Arial" panose="020B0604020202020204" pitchFamily="34" charset="0"/>
         <a:buChar char="•"/>
-        <a:defRPr sz="1800" kern="1200">
+        <a:defRPr sz="1260" kern="1200">
           <a:solidFill>
             <a:schemeClr val="tx1"/>
           </a:solidFill>
@@ -2813,16 +2814,16 @@
           <a:cs typeface="+mn-cs"/>
         </a:defRPr>
       </a:lvl7pPr>
-      <a:lvl8pPr marL="3429000" indent="-228600" algn="l" defTabSz="914400" rtl="0" eaLnBrk="1" latinLnBrk="0" hangingPunct="1">
+      <a:lvl8pPr marL="2400276" indent="-160018" algn="l" defTabSz="640074" rtl="0" eaLnBrk="1" latinLnBrk="0" hangingPunct="1">
         <a:lnSpc>
           <a:spcPct val="90000"/>
         </a:lnSpc>
         <a:spcBef>
-          <a:spcPts val="500"/>
+          <a:spcPts val="350"/>
         </a:spcBef>
         <a:buFont typeface="Arial" panose="020B0604020202020204" pitchFamily="34" charset="0"/>
         <a:buChar char="•"/>
-        <a:defRPr sz="1800" kern="1200">
+        <a:defRPr sz="1260" kern="1200">
           <a:solidFill>
             <a:schemeClr val="tx1"/>
           </a:solidFill>
@@ -2831,16 +2832,16 @@
           <a:cs typeface="+mn-cs"/>
         </a:defRPr>
       </a:lvl8pPr>
-      <a:lvl9pPr marL="3886200" indent="-228600" algn="l" defTabSz="914400" rtl="0" eaLnBrk="1" latinLnBrk="0" hangingPunct="1">
+      <a:lvl9pPr marL="2720313" indent="-160018" algn="l" defTabSz="640074" rtl="0" eaLnBrk="1" latinLnBrk="0" hangingPunct="1">
         <a:lnSpc>
           <a:spcPct val="90000"/>
         </a:lnSpc>
         <a:spcBef>
-          <a:spcPts val="500"/>
+          <a:spcPts val="350"/>
         </a:spcBef>
         <a:buFont typeface="Arial" panose="020B0604020202020204" pitchFamily="34" charset="0"/>
         <a:buChar char="•"/>
-        <a:defRPr sz="1800" kern="1200">
+        <a:defRPr sz="1260" kern="1200">
           <a:solidFill>
             <a:schemeClr val="tx1"/>
           </a:solidFill>
@@ -2854,8 +2855,8 @@
       <a:defPPr>
         <a:defRPr lang="en-US"/>
       </a:defPPr>
-      <a:lvl1pPr marL="0" algn="l" defTabSz="914400" rtl="0" eaLnBrk="1" latinLnBrk="0" hangingPunct="1">
-        <a:defRPr sz="1800" kern="1200">
+      <a:lvl1pPr marL="0" algn="l" defTabSz="640074" rtl="0" eaLnBrk="1" latinLnBrk="0" hangingPunct="1">
+        <a:defRPr sz="1260" kern="1200">
           <a:solidFill>
             <a:schemeClr val="tx1"/>
           </a:solidFill>
@@ -2864,8 +2865,8 @@
           <a:cs typeface="+mn-cs"/>
         </a:defRPr>
       </a:lvl1pPr>
-      <a:lvl2pPr marL="457200" algn="l" defTabSz="914400" rtl="0" eaLnBrk="1" latinLnBrk="0" hangingPunct="1">
-        <a:defRPr sz="1800" kern="1200">
+      <a:lvl2pPr marL="320037" algn="l" defTabSz="640074" rtl="0" eaLnBrk="1" latinLnBrk="0" hangingPunct="1">
+        <a:defRPr sz="1260" kern="1200">
           <a:solidFill>
             <a:schemeClr val="tx1"/>
           </a:solidFill>
@@ -2874,8 +2875,8 @@
           <a:cs typeface="+mn-cs"/>
         </a:defRPr>
       </a:lvl2pPr>
-      <a:lvl3pPr marL="914400" algn="l" defTabSz="914400" rtl="0" eaLnBrk="1" latinLnBrk="0" hangingPunct="1">
-        <a:defRPr sz="1800" kern="1200">
+      <a:lvl3pPr marL="640074" algn="l" defTabSz="640074" rtl="0" eaLnBrk="1" latinLnBrk="0" hangingPunct="1">
+        <a:defRPr sz="1260" kern="1200">
           <a:solidFill>
             <a:schemeClr val="tx1"/>
           </a:solidFill>
@@ -2884,8 +2885,8 @@
           <a:cs typeface="+mn-cs"/>
         </a:defRPr>
       </a:lvl3pPr>
-      <a:lvl4pPr marL="1371600" algn="l" defTabSz="914400" rtl="0" eaLnBrk="1" latinLnBrk="0" hangingPunct="1">
-        <a:defRPr sz="1800" kern="1200">
+      <a:lvl4pPr marL="960110" algn="l" defTabSz="640074" rtl="0" eaLnBrk="1" latinLnBrk="0" hangingPunct="1">
+        <a:defRPr sz="1260" kern="1200">
           <a:solidFill>
             <a:schemeClr val="tx1"/>
           </a:solidFill>
@@ -2894,8 +2895,8 @@
           <a:cs typeface="+mn-cs"/>
         </a:defRPr>
       </a:lvl4pPr>
-      <a:lvl5pPr marL="1828800" algn="l" defTabSz="914400" rtl="0" eaLnBrk="1" latinLnBrk="0" hangingPunct="1">
-        <a:defRPr sz="1800" kern="1200">
+      <a:lvl5pPr marL="1280147" algn="l" defTabSz="640074" rtl="0" eaLnBrk="1" latinLnBrk="0" hangingPunct="1">
+        <a:defRPr sz="1260" kern="1200">
           <a:solidFill>
             <a:schemeClr val="tx1"/>
           </a:solidFill>
@@ -2904,8 +2905,8 @@
           <a:cs typeface="+mn-cs"/>
         </a:defRPr>
       </a:lvl5pPr>
-      <a:lvl6pPr marL="2286000" algn="l" defTabSz="914400" rtl="0" eaLnBrk="1" latinLnBrk="0" hangingPunct="1">
-        <a:defRPr sz="1800" kern="1200">
+      <a:lvl6pPr marL="1600184" algn="l" defTabSz="640074" rtl="0" eaLnBrk="1" latinLnBrk="0" hangingPunct="1">
+        <a:defRPr sz="1260" kern="1200">
           <a:solidFill>
             <a:schemeClr val="tx1"/>
           </a:solidFill>
@@ -2914,8 +2915,8 @@
           <a:cs typeface="+mn-cs"/>
         </a:defRPr>
       </a:lvl6pPr>
-      <a:lvl7pPr marL="2743200" algn="l" defTabSz="914400" rtl="0" eaLnBrk="1" latinLnBrk="0" hangingPunct="1">
-        <a:defRPr sz="1800" kern="1200">
+      <a:lvl7pPr marL="1920221" algn="l" defTabSz="640074" rtl="0" eaLnBrk="1" latinLnBrk="0" hangingPunct="1">
+        <a:defRPr sz="1260" kern="1200">
           <a:solidFill>
             <a:schemeClr val="tx1"/>
           </a:solidFill>
@@ -2924,8 +2925,8 @@
           <a:cs typeface="+mn-cs"/>
         </a:defRPr>
       </a:lvl7pPr>
-      <a:lvl8pPr marL="3200400" algn="l" defTabSz="914400" rtl="0" eaLnBrk="1" latinLnBrk="0" hangingPunct="1">
-        <a:defRPr sz="1800" kern="1200">
+      <a:lvl8pPr marL="2240258" algn="l" defTabSz="640074" rtl="0" eaLnBrk="1" latinLnBrk="0" hangingPunct="1">
+        <a:defRPr sz="1260" kern="1200">
           <a:solidFill>
             <a:schemeClr val="tx1"/>
           </a:solidFill>
@@ -2934,8 +2935,8 @@
           <a:cs typeface="+mn-cs"/>
         </a:defRPr>
       </a:lvl8pPr>
-      <a:lvl9pPr marL="3657600" algn="l" defTabSz="914400" rtl="0" eaLnBrk="1" latinLnBrk="0" hangingPunct="1">
-        <a:defRPr sz="1800" kern="1200">
+      <a:lvl9pPr marL="2560294" algn="l" defTabSz="640074" rtl="0" eaLnBrk="1" latinLnBrk="0" hangingPunct="1">
+        <a:defRPr sz="1260" kern="1200">
           <a:solidFill>
             <a:schemeClr val="tx1"/>
           </a:solidFill>
@@ -2982,8 +2983,8 @@
             </p:nvSpPr>
             <p:spPr>
               <a:xfrm>
-                <a:off x="4109251" y="514904"/>
-                <a:ext cx="914400" cy="852256"/>
+                <a:off x="2853339" y="2386435"/>
+                <a:ext cx="685800" cy="639191"/>
               </a:xfrm>
               <a:prstGeom prst="ellipse">
                 <a:avLst/>
@@ -3016,7 +3017,12 @@
               </a:fontRef>
             </p:style>
             <p:txBody>
-              <a:bodyPr lIns="182880" tIns="0" rIns="0" bIns="91440" rtlCol="0" anchor="ctr"/>
+              <a:bodyPr rot="0" spcFirstLastPara="0" vertOverflow="overflow" horzOverflow="overflow" vert="horz" wrap="square" lIns="137160" tIns="0" rIns="0" bIns="68580" numCol="1" spcCol="0" rtlCol="0" fromWordArt="0" anchor="ctr" anchorCtr="0" forceAA="0" compatLnSpc="1">
+                <a:prstTxWarp prst="textNoShape">
+                  <a:avLst/>
+                </a:prstTxWarp>
+                <a:noAutofit/>
+              </a:bodyPr>
               <a:lstStyle/>
               <a:p>
                 <a:pPr algn="ctr"/>
@@ -3029,7 +3035,7 @@
                       <m:sSub>
                         <m:sSubPr>
                           <m:ctrlPr>
-                            <a:rPr lang="en-US" sz="3200" b="0" i="1" smtClean="0">
+                            <a:rPr lang="en-US" sz="2400" i="1">
                               <a:ln>
                                 <a:solidFill>
                                   <a:schemeClr val="tx1"/>
@@ -3044,7 +3050,7 @@
                         </m:sSubPr>
                         <m:e>
                           <m:r>
-                            <a:rPr lang="en-US" sz="3200" b="0" i="1" smtClean="0">
+                            <a:rPr lang="en-US" sz="2400" i="1">
                               <a:ln>
                                 <a:solidFill>
                                   <a:schemeClr val="tx1"/>
@@ -3060,7 +3066,7 @@
                         </m:e>
                         <m:sub>
                           <m:r>
-                            <a:rPr lang="en-US" sz="3200" b="0" i="1" smtClean="0">
+                            <a:rPr lang="en-US" sz="2400" i="1">
                               <a:ln>
                                 <a:solidFill>
                                   <a:schemeClr val="tx1"/>
@@ -3078,7 +3084,7 @@
                     </m:oMath>
                   </m:oMathPara>
                 </a14:m>
-                <a:endParaRPr lang="en-US" sz="3200" b="0" dirty="0">
+                <a:endParaRPr lang="en-US" sz="2400" dirty="0">
                   <a:ln>
                     <a:solidFill>
                       <a:schemeClr val="tx1"/>
@@ -3109,8 +3115,8 @@
             </p:nvSpPr>
             <p:spPr>
               <a:xfrm>
-                <a:off x="4109251" y="514904"/>
-                <a:ext cx="914400" cy="852256"/>
+                <a:off x="2853339" y="2386435"/>
+                <a:ext cx="685800" cy="639191"/>
               </a:xfrm>
               <a:prstGeom prst="ellipse">
                 <a:avLst/>
@@ -3158,8 +3164,8 @@
             </p:nvSpPr>
             <p:spPr>
               <a:xfrm>
-                <a:off x="4109251" y="2167633"/>
-                <a:ext cx="914400" cy="852256"/>
+                <a:off x="2853339" y="3625982"/>
+                <a:ext cx="685800" cy="639191"/>
               </a:xfrm>
               <a:prstGeom prst="ellipse">
                 <a:avLst/>
@@ -3192,7 +3198,12 @@
               </a:fontRef>
             </p:style>
             <p:txBody>
-              <a:bodyPr lIns="182880" tIns="0" rIns="0" bIns="91440" rtlCol="0" anchor="ctr"/>
+              <a:bodyPr rot="0" spcFirstLastPara="0" vertOverflow="overflow" horzOverflow="overflow" vert="horz" wrap="square" lIns="137160" tIns="0" rIns="0" bIns="68580" numCol="1" spcCol="0" rtlCol="0" fromWordArt="0" anchor="ctr" anchorCtr="0" forceAA="0" compatLnSpc="1">
+                <a:prstTxWarp prst="textNoShape">
+                  <a:avLst/>
+                </a:prstTxWarp>
+                <a:noAutofit/>
+              </a:bodyPr>
               <a:lstStyle/>
               <a:p>
                 <a:pPr algn="ctr"/>
@@ -3205,7 +3216,7 @@
                       <m:sSub>
                         <m:sSubPr>
                           <m:ctrlPr>
-                            <a:rPr lang="en-US" sz="3200" b="0" i="1" smtClean="0">
+                            <a:rPr lang="en-US" sz="2400" i="1">
                               <a:ln>
                                 <a:solidFill>
                                   <a:schemeClr val="tx1"/>
@@ -3220,7 +3231,7 @@
                         </m:sSubPr>
                         <m:e>
                           <m:r>
-                            <a:rPr lang="en-US" sz="3200" b="0" i="1" smtClean="0">
+                            <a:rPr lang="en-US" sz="2400" i="1">
                               <a:ln>
                                 <a:solidFill>
                                   <a:schemeClr val="tx1"/>
@@ -3236,7 +3247,7 @@
                         </m:e>
                         <m:sub>
                           <m:r>
-                            <a:rPr lang="en-US" sz="3200" b="0" i="1" smtClean="0">
+                            <a:rPr lang="en-US" sz="2400" i="1">
                               <a:ln>
                                 <a:solidFill>
                                   <a:schemeClr val="tx1"/>
@@ -3254,7 +3265,7 @@
                     </m:oMath>
                   </m:oMathPara>
                 </a14:m>
-                <a:endParaRPr lang="en-US" sz="3200" b="0" dirty="0">
+                <a:endParaRPr lang="en-US" sz="2400" dirty="0">
                   <a:ln>
                     <a:solidFill>
                       <a:schemeClr val="tx1"/>
@@ -3285,8 +3296,8 @@
             </p:nvSpPr>
             <p:spPr>
               <a:xfrm>
-                <a:off x="4109251" y="2167633"/>
-                <a:ext cx="914400" cy="852256"/>
+                <a:off x="2853339" y="3625982"/>
+                <a:ext cx="685800" cy="639191"/>
               </a:xfrm>
               <a:prstGeom prst="ellipse">
                 <a:avLst/>
@@ -3334,8 +3345,8 @@
             </p:nvSpPr>
             <p:spPr>
               <a:xfrm>
-                <a:off x="4109251" y="3890647"/>
-                <a:ext cx="914400" cy="852256"/>
+                <a:off x="2853339" y="4918242"/>
+                <a:ext cx="685800" cy="639191"/>
               </a:xfrm>
               <a:prstGeom prst="ellipse">
                 <a:avLst/>
@@ -3368,7 +3379,12 @@
               </a:fontRef>
             </p:style>
             <p:txBody>
-              <a:bodyPr lIns="182880" tIns="0" rIns="0" bIns="91440" rtlCol="0" anchor="ctr"/>
+              <a:bodyPr rot="0" spcFirstLastPara="0" vertOverflow="overflow" horzOverflow="overflow" vert="horz" wrap="square" lIns="137160" tIns="0" rIns="0" bIns="68580" numCol="1" spcCol="0" rtlCol="0" fromWordArt="0" anchor="ctr" anchorCtr="0" forceAA="0" compatLnSpc="1">
+                <a:prstTxWarp prst="textNoShape">
+                  <a:avLst/>
+                </a:prstTxWarp>
+                <a:noAutofit/>
+              </a:bodyPr>
               <a:lstStyle/>
               <a:p>
                 <a:pPr algn="ctr"/>
@@ -3381,7 +3397,7 @@
                       <m:sSub>
                         <m:sSubPr>
                           <m:ctrlPr>
-                            <a:rPr lang="en-US" sz="3200" b="0" i="1" smtClean="0">
+                            <a:rPr lang="en-US" sz="2400" i="1">
                               <a:ln>
                                 <a:solidFill>
                                   <a:schemeClr val="tx1"/>
@@ -3396,7 +3412,7 @@
                         </m:sSubPr>
                         <m:e>
                           <m:r>
-                            <a:rPr lang="en-US" sz="3200" b="0" i="1" smtClean="0">
+                            <a:rPr lang="en-US" sz="2400" i="1">
                               <a:ln>
                                 <a:solidFill>
                                   <a:schemeClr val="tx1"/>
@@ -3412,7 +3428,7 @@
                         </m:e>
                         <m:sub>
                           <m:r>
-                            <a:rPr lang="en-US" sz="3200" b="0" i="1" smtClean="0">
+                            <a:rPr lang="en-US" sz="2400" i="1">
                               <a:ln>
                                 <a:solidFill>
                                   <a:schemeClr val="tx1"/>
@@ -3430,7 +3446,7 @@
                     </m:oMath>
                   </m:oMathPara>
                 </a14:m>
-                <a:endParaRPr lang="en-US" sz="3200" b="0" dirty="0">
+                <a:endParaRPr lang="en-US" sz="2400" dirty="0">
                   <a:ln>
                     <a:solidFill>
                       <a:schemeClr val="tx1"/>
@@ -3461,8 +3477,8 @@
             </p:nvSpPr>
             <p:spPr>
               <a:xfrm>
-                <a:off x="4109251" y="3890647"/>
-                <a:ext cx="914400" cy="852256"/>
+                <a:off x="2853339" y="4918242"/>
+                <a:ext cx="685800" cy="639191"/>
               </a:xfrm>
               <a:prstGeom prst="ellipse">
                 <a:avLst/>
@@ -3510,8 +3526,8 @@
             </p:nvSpPr>
             <p:spPr>
               <a:xfrm>
-                <a:off x="2433960" y="5436837"/>
-                <a:ext cx="914400" cy="852256"/>
+                <a:off x="1596870" y="6077885"/>
+                <a:ext cx="685800" cy="639191"/>
               </a:xfrm>
               <a:prstGeom prst="ellipse">
                 <a:avLst/>
@@ -3544,7 +3560,12 @@
               </a:fontRef>
             </p:style>
             <p:txBody>
-              <a:bodyPr lIns="182880" tIns="0" rIns="0" bIns="91440" rtlCol="0" anchor="ctr"/>
+              <a:bodyPr rot="0" spcFirstLastPara="0" vertOverflow="overflow" horzOverflow="overflow" vert="horz" wrap="square" lIns="137160" tIns="0" rIns="0" bIns="68580" numCol="1" spcCol="0" rtlCol="0" fromWordArt="0" anchor="ctr" anchorCtr="0" forceAA="0" compatLnSpc="1">
+                <a:prstTxWarp prst="textNoShape">
+                  <a:avLst/>
+                </a:prstTxWarp>
+                <a:noAutofit/>
+              </a:bodyPr>
               <a:lstStyle/>
               <a:p>
                 <a:pPr algn="ctr"/>
@@ -3557,7 +3578,7 @@
                       <m:sSub>
                         <m:sSubPr>
                           <m:ctrlPr>
-                            <a:rPr lang="en-US" sz="3200" b="0" i="1" smtClean="0">
+                            <a:rPr lang="en-US" sz="2400" i="1">
                               <a:ln>
                                 <a:solidFill>
                                   <a:schemeClr val="tx1"/>
@@ -3572,7 +3593,7 @@
                         </m:sSubPr>
                         <m:e>
                           <m:r>
-                            <a:rPr lang="en-US" sz="3200" b="0" i="1" smtClean="0">
+                            <a:rPr lang="en-US" sz="2400" i="1">
                               <a:ln>
                                 <a:solidFill>
                                   <a:schemeClr val="tx1"/>
@@ -3588,7 +3609,7 @@
                         </m:e>
                         <m:sub>
                           <m:r>
-                            <a:rPr lang="en-US" sz="3200" b="0" i="1" smtClean="0">
+                            <a:rPr lang="en-US" sz="2400" i="1">
                               <a:ln>
                                 <a:solidFill>
                                   <a:schemeClr val="tx1"/>
@@ -3606,7 +3627,7 @@
                     </m:oMath>
                   </m:oMathPara>
                 </a14:m>
-                <a:endParaRPr lang="en-US" sz="3200" b="0" dirty="0">
+                <a:endParaRPr lang="en-US" sz="2400" dirty="0">
                   <a:ln>
                     <a:solidFill>
                       <a:schemeClr val="tx1"/>
@@ -3637,8 +3658,8 @@
             </p:nvSpPr>
             <p:spPr>
               <a:xfrm>
-                <a:off x="2433960" y="5436837"/>
-                <a:ext cx="914400" cy="852256"/>
+                <a:off x="1596870" y="6077885"/>
+                <a:ext cx="685800" cy="639191"/>
               </a:xfrm>
               <a:prstGeom prst="ellipse">
                 <a:avLst/>
@@ -3686,8 +3707,8 @@
             </p:nvSpPr>
             <p:spPr>
               <a:xfrm>
-                <a:off x="5795641" y="5436837"/>
-                <a:ext cx="914400" cy="852256"/>
+                <a:off x="4118131" y="6077885"/>
+                <a:ext cx="685800" cy="639191"/>
               </a:xfrm>
               <a:prstGeom prst="ellipse">
                 <a:avLst/>
@@ -3721,7 +3742,12 @@
               </a:fontRef>
             </p:style>
             <p:txBody>
-              <a:bodyPr lIns="182880" tIns="0" rIns="0" bIns="91440" rtlCol="0" anchor="ctr"/>
+              <a:bodyPr rot="0" spcFirstLastPara="0" vertOverflow="overflow" horzOverflow="overflow" vert="horz" wrap="square" lIns="137160" tIns="0" rIns="0" bIns="68580" numCol="1" spcCol="0" rtlCol="0" fromWordArt="0" anchor="ctr" anchorCtr="0" forceAA="0" compatLnSpc="1">
+                <a:prstTxWarp prst="textNoShape">
+                  <a:avLst/>
+                </a:prstTxWarp>
+                <a:noAutofit/>
+              </a:bodyPr>
               <a:lstStyle/>
               <a:p>
                 <a:pPr algn="ctr"/>
@@ -3734,7 +3760,7 @@
                       <m:sSub>
                         <m:sSubPr>
                           <m:ctrlPr>
-                            <a:rPr lang="en-US" sz="3200" b="0" i="1" smtClean="0">
+                            <a:rPr lang="en-US" sz="2400" i="1">
                               <a:ln>
                                 <a:solidFill>
                                   <a:schemeClr val="tx1"/>
@@ -3749,7 +3775,7 @@
                         </m:sSubPr>
                         <m:e>
                           <m:r>
-                            <a:rPr lang="en-US" sz="3200" b="0" i="1" smtClean="0">
+                            <a:rPr lang="en-US" sz="2400" i="1">
                               <a:ln>
                                 <a:solidFill>
                                   <a:schemeClr val="tx1"/>
@@ -3765,7 +3791,7 @@
                         </m:e>
                         <m:sub>
                           <m:r>
-                            <a:rPr lang="en-US" sz="3200" b="0" i="1" smtClean="0">
+                            <a:rPr lang="en-US" sz="2400" i="1">
                               <a:ln>
                                 <a:solidFill>
                                   <a:schemeClr val="tx1"/>
@@ -3783,7 +3809,7 @@
                     </m:oMath>
                   </m:oMathPara>
                 </a14:m>
-                <a:endParaRPr lang="en-US" sz="3200" b="0" dirty="0">
+                <a:endParaRPr lang="en-US" sz="2400" dirty="0">
                   <a:ln>
                     <a:solidFill>
                       <a:schemeClr val="tx1"/>
@@ -3814,8 +3840,8 @@
             </p:nvSpPr>
             <p:spPr>
               <a:xfrm>
-                <a:off x="5795641" y="5436837"/>
-                <a:ext cx="914400" cy="852256"/>
+                <a:off x="4118131" y="6077885"/>
+                <a:ext cx="685800" cy="639191"/>
               </a:xfrm>
               <a:prstGeom prst="ellipse">
                 <a:avLst/>
@@ -3865,8 +3891,8 @@
         </p:nvCxnSpPr>
         <p:spPr>
           <a:xfrm>
-            <a:off x="4566451" y="1367160"/>
-            <a:ext cx="0" cy="800473"/>
+            <a:off x="3196239" y="3025624"/>
+            <a:ext cx="0" cy="600356"/>
           </a:xfrm>
           <a:prstGeom prst="straightConnector1">
             <a:avLst/>
@@ -3911,8 +3937,8 @@
         </p:nvCxnSpPr>
         <p:spPr>
           <a:xfrm>
-            <a:off x="4566451" y="3019889"/>
-            <a:ext cx="0" cy="870758"/>
+            <a:off x="3196239" y="4265173"/>
+            <a:ext cx="0" cy="653069"/>
           </a:xfrm>
           <a:prstGeom prst="straightConnector1">
             <a:avLst/>
@@ -3957,8 +3983,8 @@
         </p:nvCxnSpPr>
         <p:spPr>
           <a:xfrm flipH="1">
-            <a:off x="3214449" y="4618093"/>
-            <a:ext cx="1028713" cy="943554"/>
+            <a:off x="2182240" y="5463820"/>
+            <a:ext cx="771536" cy="707666"/>
           </a:xfrm>
           <a:prstGeom prst="straightConnector1">
             <a:avLst/>
@@ -4003,8 +4029,8 @@
         </p:nvCxnSpPr>
         <p:spPr>
           <a:xfrm>
-            <a:off x="4889740" y="4618093"/>
-            <a:ext cx="1039812" cy="943554"/>
+            <a:off x="3438714" y="5463820"/>
+            <a:ext cx="779859" cy="707666"/>
           </a:xfrm>
           <a:prstGeom prst="straightConnector1">
             <a:avLst/>
@@ -4048,8 +4074,8 @@
             </p:nvSpPr>
             <p:spPr>
               <a:xfrm>
-                <a:off x="951197" y="4571310"/>
-                <a:ext cx="2930013" cy="584775"/>
+                <a:off x="484799" y="5428740"/>
+                <a:ext cx="2197510" cy="461665"/>
               </a:xfrm>
               <a:prstGeom prst="rect">
                 <a:avLst/>
@@ -4069,19 +4095,19 @@
                     </m:oMathParaPr>
                     <m:oMath xmlns:m="http://schemas.openxmlformats.org/officeDocument/2006/math">
                       <m:r>
-                        <a:rPr lang="en-US" sz="3200" b="0" i="1" smtClean="0">
+                        <a:rPr lang="en-US" sz="2400" i="1">
                           <a:latin typeface="Cambria Math" panose="02040503050406030204" pitchFamily="18" charset="0"/>
                         </a:rPr>
                         <m:t>0≤</m:t>
                       </m:r>
                       <m:r>
-                        <a:rPr lang="en-US" sz="3200" b="0" i="1" smtClean="0">
+                        <a:rPr lang="en-US" sz="2400" i="1">
                           <a:latin typeface="Cambria Math" panose="02040503050406030204" pitchFamily="18" charset="0"/>
                         </a:rPr>
                         <m:t>𝑛</m:t>
                       </m:r>
                       <m:r>
-                        <a:rPr lang="en-US" sz="3200" b="0" i="1" smtClean="0">
+                        <a:rPr lang="en-US" sz="2400" i="1">
                           <a:latin typeface="Cambria Math" panose="02040503050406030204" pitchFamily="18" charset="0"/>
                         </a:rPr>
                         <m:t>&lt;10</m:t>
@@ -4089,7 +4115,7 @@
                     </m:oMath>
                   </m:oMathPara>
                 </a14:m>
-                <a:endParaRPr lang="en-US" sz="3200" dirty="0"/>
+                <a:endParaRPr lang="en-US" sz="2400" dirty="0"/>
               </a:p>
             </p:txBody>
           </p:sp>
@@ -4111,8 +4137,8 @@
             </p:nvSpPr>
             <p:spPr>
               <a:xfrm>
-                <a:off x="951197" y="4571310"/>
-                <a:ext cx="2930013" cy="584775"/>
+                <a:off x="484799" y="5428740"/>
+                <a:ext cx="2197510" cy="461665"/>
               </a:xfrm>
               <a:prstGeom prst="rect">
                 <a:avLst/>
@@ -4155,8 +4181,8 @@
             </p:nvSpPr>
             <p:spPr>
               <a:xfrm>
-                <a:off x="5409646" y="4567792"/>
-                <a:ext cx="3534982" cy="584775"/>
+                <a:off x="3828640" y="5426102"/>
+                <a:ext cx="2651237" cy="461665"/>
               </a:xfrm>
               <a:prstGeom prst="rect">
                 <a:avLst/>
@@ -4176,25 +4202,25 @@
                     </m:oMathParaPr>
                     <m:oMath xmlns:m="http://schemas.openxmlformats.org/officeDocument/2006/math">
                       <m:r>
-                        <a:rPr lang="en-US" sz="3200" i="1" smtClean="0">
+                        <a:rPr lang="en-US" sz="2400" i="1">
                           <a:latin typeface="Cambria Math" panose="02040503050406030204" pitchFamily="18" charset="0"/>
                         </a:rPr>
                         <m:t>𝑛</m:t>
                       </m:r>
                       <m:r>
-                        <a:rPr lang="en-US" sz="3200" b="0" i="1" smtClean="0">
+                        <a:rPr lang="en-US" sz="2400" i="1">
                           <a:latin typeface="Cambria Math" panose="02040503050406030204" pitchFamily="18" charset="0"/>
                         </a:rPr>
                         <m:t>&lt;0∨</m:t>
                       </m:r>
                       <m:r>
-                        <a:rPr lang="en-US" sz="3200" b="0" i="1" smtClean="0">
+                        <a:rPr lang="en-US" sz="2400" i="1">
                           <a:latin typeface="Cambria Math" panose="02040503050406030204" pitchFamily="18" charset="0"/>
                         </a:rPr>
                         <m:t>𝑛</m:t>
                       </m:r>
                       <m:r>
-                        <a:rPr lang="en-US" sz="3200" b="0" i="1" smtClean="0">
+                        <a:rPr lang="en-US" sz="2400" i="1">
                           <a:latin typeface="Cambria Math" panose="02040503050406030204" pitchFamily="18" charset="0"/>
                         </a:rPr>
                         <m:t>≥10</m:t>
@@ -4202,7 +4228,7 @@
                     </m:oMath>
                   </m:oMathPara>
                 </a14:m>
-                <a:endParaRPr lang="en-US" sz="3200" dirty="0"/>
+                <a:endParaRPr lang="en-US" sz="2400" dirty="0"/>
               </a:p>
             </p:txBody>
           </p:sp>
@@ -4224,8 +4250,8 @@
             </p:nvSpPr>
             <p:spPr>
               <a:xfrm>
-                <a:off x="5409646" y="4567792"/>
-                <a:ext cx="3534982" cy="584775"/>
+                <a:off x="3828640" y="5426102"/>
+                <a:ext cx="2651237" cy="461665"/>
               </a:xfrm>
               <a:prstGeom prst="rect">
                 <a:avLst/>
@@ -4256,6 +4282,3658 @@
     <p:extLst>
       <p:ext uri="{BB962C8B-B14F-4D97-AF65-F5344CB8AC3E}">
         <p14:creationId xmlns:p14="http://schemas.microsoft.com/office/powerpoint/2010/main" val="1900686359"/>
+      </p:ext>
+    </p:extLst>
+  </p:cSld>
+  <p:clrMapOvr>
+    <a:masterClrMapping/>
+  </p:clrMapOvr>
+</p:sld>
+</file>
+
+<file path=ppt/slides/slide2.xml><?xml version="1.0" encoding="utf-8"?>
+<p:sld xmlns:a="http://schemas.openxmlformats.org/drawingml/2006/main" xmlns:r="http://schemas.openxmlformats.org/officeDocument/2006/relationships" xmlns:p="http://schemas.openxmlformats.org/presentationml/2006/main">
+  <p:cSld>
+    <p:spTree>
+      <p:nvGrpSpPr>
+        <p:cNvPr id="1" name=""/>
+        <p:cNvGrpSpPr/>
+        <p:nvPr/>
+      </p:nvGrpSpPr>
+      <p:grpSpPr>
+        <a:xfrm>
+          <a:off x="0" y="0"/>
+          <a:ext cx="0" cy="0"/>
+          <a:chOff x="0" y="0"/>
+          <a:chExt cx="0" cy="0"/>
+        </a:xfrm>
+      </p:grpSpPr>
+      <mc:AlternateContent xmlns:mc="http://schemas.openxmlformats.org/markup-compatibility/2006">
+        <mc:Choice xmlns:a14="http://schemas.microsoft.com/office/drawing/2010/main" Requires="a14">
+          <p:sp>
+            <p:nvSpPr>
+              <p:cNvPr id="4" name="Oval 3">
+                <a:extLst>
+                  <a:ext uri="{FF2B5EF4-FFF2-40B4-BE49-F238E27FC236}">
+                    <a16:creationId xmlns:a16="http://schemas.microsoft.com/office/drawing/2014/main" id="{633C0A0A-547E-4438-BDC2-B37C677C5FF1}"/>
+                  </a:ext>
+                </a:extLst>
+              </p:cNvPr>
+              <p:cNvSpPr/>
+              <p:nvPr/>
+            </p:nvSpPr>
+            <p:spPr>
+              <a:xfrm>
+                <a:off x="3887912" y="1674513"/>
+                <a:ext cx="587311" cy="545287"/>
+              </a:xfrm>
+              <a:prstGeom prst="ellipse">
+                <a:avLst/>
+              </a:prstGeom>
+              <a:solidFill>
+                <a:srgbClr val="EDE311">
+                  <a:alpha val="29804"/>
+                </a:srgbClr>
+              </a:solidFill>
+              <a:ln w="28575">
+                <a:solidFill>
+                  <a:schemeClr val="tx1"/>
+                </a:solidFill>
+              </a:ln>
+            </p:spPr>
+            <p:style>
+              <a:lnRef idx="2">
+                <a:schemeClr val="accent1">
+                  <a:shade val="50000"/>
+                </a:schemeClr>
+              </a:lnRef>
+              <a:fillRef idx="1">
+                <a:schemeClr val="accent1"/>
+              </a:fillRef>
+              <a:effectRef idx="0">
+                <a:schemeClr val="accent1"/>
+              </a:effectRef>
+              <a:fontRef idx="minor">
+                <a:schemeClr val="lt1"/>
+              </a:fontRef>
+            </p:style>
+            <p:txBody>
+              <a:bodyPr rot="0" spcFirstLastPara="0" vertOverflow="overflow" horzOverflow="overflow" vert="horz" wrap="square" lIns="137160" tIns="0" rIns="0" bIns="68580" numCol="1" spcCol="0" rtlCol="0" fromWordArt="0" anchor="ctr" anchorCtr="0" forceAA="0" compatLnSpc="1">
+                <a:prstTxWarp prst="textNoShape">
+                  <a:avLst/>
+                </a:prstTxWarp>
+                <a:noAutofit/>
+              </a:bodyPr>
+              <a:lstStyle/>
+              <a:p>
+                <a:pPr algn="ctr"/>
+                <a14:m>
+                  <m:oMathPara xmlns:m="http://schemas.openxmlformats.org/officeDocument/2006/math">
+                    <m:oMathParaPr>
+                      <m:jc m:val="centerGroup"/>
+                    </m:oMathParaPr>
+                    <m:oMath xmlns:m="http://schemas.openxmlformats.org/officeDocument/2006/math">
+                      <m:sSub>
+                        <m:sSubPr>
+                          <m:ctrlPr>
+                            <a:rPr lang="en-US" sz="2400" i="1">
+                              <a:ln>
+                                <a:solidFill>
+                                  <a:schemeClr val="tx1"/>
+                                </a:solidFill>
+                              </a:ln>
+                              <a:solidFill>
+                                <a:schemeClr val="tx1"/>
+                              </a:solidFill>
+                              <a:latin typeface="Cambria Math" panose="02040503050406030204" pitchFamily="18" charset="0"/>
+                            </a:rPr>
+                          </m:ctrlPr>
+                        </m:sSubPr>
+                        <m:e>
+                          <m:r>
+                            <a:rPr lang="en-US" sz="2400" i="1">
+                              <a:ln>
+                                <a:solidFill>
+                                  <a:schemeClr val="tx1"/>
+                                </a:solidFill>
+                              </a:ln>
+                              <a:solidFill>
+                                <a:schemeClr val="tx1"/>
+                              </a:solidFill>
+                              <a:latin typeface="Cambria Math" panose="02040503050406030204" pitchFamily="18" charset="0"/>
+                            </a:rPr>
+                            <m:t>𝑠</m:t>
+                          </m:r>
+                        </m:e>
+                        <m:sub>
+                          <m:r>
+                            <a:rPr lang="en-US" sz="2400" i="1">
+                              <a:ln>
+                                <a:solidFill>
+                                  <a:schemeClr val="tx1"/>
+                                </a:solidFill>
+                              </a:ln>
+                              <a:solidFill>
+                                <a:schemeClr val="tx1"/>
+                              </a:solidFill>
+                              <a:latin typeface="Cambria Math" panose="02040503050406030204" pitchFamily="18" charset="0"/>
+                            </a:rPr>
+                            <m:t>0</m:t>
+                          </m:r>
+                        </m:sub>
+                      </m:sSub>
+                    </m:oMath>
+                  </m:oMathPara>
+                </a14:m>
+                <a:endParaRPr lang="en-US" sz="2400" dirty="0">
+                  <a:ln>
+                    <a:solidFill>
+                      <a:schemeClr val="tx1"/>
+                    </a:solidFill>
+                  </a:ln>
+                  <a:solidFill>
+                    <a:schemeClr val="tx1"/>
+                  </a:solidFill>
+                </a:endParaRPr>
+              </a:p>
+            </p:txBody>
+          </p:sp>
+        </mc:Choice>
+        <mc:Fallback>
+          <p:sp>
+            <p:nvSpPr>
+              <p:cNvPr id="4" name="Oval 3">
+                <a:extLst>
+                  <a:ext uri="{FF2B5EF4-FFF2-40B4-BE49-F238E27FC236}">
+                    <a16:creationId xmlns:a16="http://schemas.microsoft.com/office/drawing/2014/main" id="{633C0A0A-547E-4438-BDC2-B37C677C5FF1}"/>
+                  </a:ext>
+                </a:extLst>
+              </p:cNvPr>
+              <p:cNvSpPr>
+                <a:spLocks noRot="1" noChangeAspect="1" noMove="1" noResize="1" noEditPoints="1" noAdjustHandles="1" noChangeArrowheads="1" noChangeShapeType="1" noTextEdit="1"/>
+              </p:cNvSpPr>
+              <p:nvPr/>
+            </p:nvSpPr>
+            <p:spPr>
+              <a:xfrm>
+                <a:off x="3887912" y="1674513"/>
+                <a:ext cx="587311" cy="545287"/>
+              </a:xfrm>
+              <a:prstGeom prst="ellipse">
+                <a:avLst/>
+              </a:prstGeom>
+              <a:blipFill>
+                <a:blip r:embed="rId2"/>
+                <a:stretch>
+                  <a:fillRect/>
+                </a:stretch>
+              </a:blipFill>
+              <a:ln w="28575">
+                <a:solidFill>
+                  <a:schemeClr val="tx1"/>
+                </a:solidFill>
+              </a:ln>
+            </p:spPr>
+            <p:txBody>
+              <a:bodyPr/>
+              <a:lstStyle/>
+              <a:p>
+                <a:r>
+                  <a:rPr lang="en-US">
+                    <a:noFill/>
+                  </a:rPr>
+                  <a:t> </a:t>
+                </a:r>
+              </a:p>
+            </p:txBody>
+          </p:sp>
+        </mc:Fallback>
+      </mc:AlternateContent>
+      <p:cxnSp>
+        <p:nvCxnSpPr>
+          <p:cNvPr id="20" name="Straight Arrow Connector 19">
+            <a:extLst>
+              <a:ext uri="{FF2B5EF4-FFF2-40B4-BE49-F238E27FC236}">
+                <a16:creationId xmlns:a16="http://schemas.microsoft.com/office/drawing/2014/main" id="{B312BBBB-B258-4147-8F8B-5AB40C3D3A46}"/>
+              </a:ext>
+            </a:extLst>
+          </p:cNvPr>
+          <p:cNvCxnSpPr>
+            <a:cxnSpLocks/>
+            <a:stCxn id="4" idx="4"/>
+            <a:endCxn id="21" idx="0"/>
+          </p:cNvCxnSpPr>
+          <p:nvPr/>
+        </p:nvCxnSpPr>
+        <p:spPr>
+          <a:xfrm>
+            <a:off x="4181564" y="2219800"/>
+            <a:ext cx="0" cy="453113"/>
+          </a:xfrm>
+          <a:prstGeom prst="straightConnector1">
+            <a:avLst/>
+          </a:prstGeom>
+          <a:ln w="28575">
+            <a:solidFill>
+              <a:schemeClr val="tx1"/>
+            </a:solidFill>
+            <a:tailEnd type="arrow" w="lg" len="lg"/>
+          </a:ln>
+        </p:spPr>
+        <p:style>
+          <a:lnRef idx="1">
+            <a:schemeClr val="accent1"/>
+          </a:lnRef>
+          <a:fillRef idx="0">
+            <a:schemeClr val="accent1"/>
+          </a:fillRef>
+          <a:effectRef idx="0">
+            <a:schemeClr val="accent1"/>
+          </a:effectRef>
+          <a:fontRef idx="minor">
+            <a:schemeClr val="tx1"/>
+          </a:fontRef>
+        </p:style>
+      </p:cxnSp>
+      <mc:AlternateContent xmlns:mc="http://schemas.openxmlformats.org/markup-compatibility/2006">
+        <mc:Choice xmlns:a14="http://schemas.microsoft.com/office/drawing/2010/main" Requires="a14">
+          <p:sp>
+            <p:nvSpPr>
+              <p:cNvPr id="21" name="Oval 20">
+                <a:extLst>
+                  <a:ext uri="{FF2B5EF4-FFF2-40B4-BE49-F238E27FC236}">
+                    <a16:creationId xmlns:a16="http://schemas.microsoft.com/office/drawing/2014/main" id="{A16CD3F4-3181-47FC-9FA5-875A88176453}"/>
+                  </a:ext>
+                </a:extLst>
+              </p:cNvPr>
+              <p:cNvSpPr/>
+              <p:nvPr/>
+            </p:nvSpPr>
+            <p:spPr>
+              <a:xfrm>
+                <a:off x="3887912" y="2672913"/>
+                <a:ext cx="587311" cy="545287"/>
+              </a:xfrm>
+              <a:prstGeom prst="ellipse">
+                <a:avLst/>
+              </a:prstGeom>
+              <a:solidFill>
+                <a:srgbClr val="EDE311">
+                  <a:alpha val="29804"/>
+                </a:srgbClr>
+              </a:solidFill>
+              <a:ln w="28575">
+                <a:solidFill>
+                  <a:schemeClr val="tx1"/>
+                </a:solidFill>
+              </a:ln>
+            </p:spPr>
+            <p:style>
+              <a:lnRef idx="2">
+                <a:schemeClr val="accent1">
+                  <a:shade val="50000"/>
+                </a:schemeClr>
+              </a:lnRef>
+              <a:fillRef idx="1">
+                <a:schemeClr val="accent1"/>
+              </a:fillRef>
+              <a:effectRef idx="0">
+                <a:schemeClr val="accent1"/>
+              </a:effectRef>
+              <a:fontRef idx="minor">
+                <a:schemeClr val="lt1"/>
+              </a:fontRef>
+            </p:style>
+            <p:txBody>
+              <a:bodyPr rot="0" spcFirstLastPara="0" vertOverflow="overflow" horzOverflow="overflow" vert="horz" wrap="square" lIns="137160" tIns="0" rIns="0" bIns="68580" numCol="1" spcCol="0" rtlCol="0" fromWordArt="0" anchor="ctr" anchorCtr="0" forceAA="0" compatLnSpc="1">
+                <a:prstTxWarp prst="textNoShape">
+                  <a:avLst/>
+                </a:prstTxWarp>
+                <a:noAutofit/>
+              </a:bodyPr>
+              <a:lstStyle/>
+              <a:p>
+                <a:pPr algn="ctr"/>
+                <a14:m>
+                  <m:oMathPara xmlns:m="http://schemas.openxmlformats.org/officeDocument/2006/math">
+                    <m:oMathParaPr>
+                      <m:jc m:val="centerGroup"/>
+                    </m:oMathParaPr>
+                    <m:oMath xmlns:m="http://schemas.openxmlformats.org/officeDocument/2006/math">
+                      <m:sSub>
+                        <m:sSubPr>
+                          <m:ctrlPr>
+                            <a:rPr lang="en-US" sz="2400" i="1">
+                              <a:ln>
+                                <a:solidFill>
+                                  <a:schemeClr val="tx1"/>
+                                </a:solidFill>
+                              </a:ln>
+                              <a:solidFill>
+                                <a:schemeClr val="tx1"/>
+                              </a:solidFill>
+                              <a:latin typeface="Cambria Math" panose="02040503050406030204" pitchFamily="18" charset="0"/>
+                            </a:rPr>
+                          </m:ctrlPr>
+                        </m:sSubPr>
+                        <m:e>
+                          <m:r>
+                            <a:rPr lang="en-US" sz="2400" i="1">
+                              <a:ln>
+                                <a:solidFill>
+                                  <a:schemeClr val="tx1"/>
+                                </a:solidFill>
+                              </a:ln>
+                              <a:solidFill>
+                                <a:schemeClr val="tx1"/>
+                              </a:solidFill>
+                              <a:latin typeface="Cambria Math" panose="02040503050406030204" pitchFamily="18" charset="0"/>
+                            </a:rPr>
+                            <m:t>𝑠</m:t>
+                          </m:r>
+                        </m:e>
+                        <m:sub>
+                          <m:r>
+                            <a:rPr lang="en-US" sz="2400" i="1">
+                              <a:ln>
+                                <a:solidFill>
+                                  <a:schemeClr val="tx1"/>
+                                </a:solidFill>
+                              </a:ln>
+                              <a:solidFill>
+                                <a:schemeClr val="tx1"/>
+                              </a:solidFill>
+                              <a:latin typeface="Cambria Math" panose="02040503050406030204" pitchFamily="18" charset="0"/>
+                            </a:rPr>
+                            <m:t>1</m:t>
+                          </m:r>
+                        </m:sub>
+                      </m:sSub>
+                    </m:oMath>
+                  </m:oMathPara>
+                </a14:m>
+                <a:endParaRPr lang="en-US" sz="2400" dirty="0">
+                  <a:ln>
+                    <a:solidFill>
+                      <a:schemeClr val="tx1"/>
+                    </a:solidFill>
+                  </a:ln>
+                  <a:solidFill>
+                    <a:schemeClr val="tx1"/>
+                  </a:solidFill>
+                </a:endParaRPr>
+              </a:p>
+            </p:txBody>
+          </p:sp>
+        </mc:Choice>
+        <mc:Fallback>
+          <p:sp>
+            <p:nvSpPr>
+              <p:cNvPr id="21" name="Oval 20">
+                <a:extLst>
+                  <a:ext uri="{FF2B5EF4-FFF2-40B4-BE49-F238E27FC236}">
+                    <a16:creationId xmlns:a16="http://schemas.microsoft.com/office/drawing/2014/main" id="{A16CD3F4-3181-47FC-9FA5-875A88176453}"/>
+                  </a:ext>
+                </a:extLst>
+              </p:cNvPr>
+              <p:cNvSpPr>
+                <a:spLocks noRot="1" noChangeAspect="1" noMove="1" noResize="1" noEditPoints="1" noAdjustHandles="1" noChangeArrowheads="1" noChangeShapeType="1" noTextEdit="1"/>
+              </p:cNvSpPr>
+              <p:nvPr/>
+            </p:nvSpPr>
+            <p:spPr>
+              <a:xfrm>
+                <a:off x="3887912" y="2672913"/>
+                <a:ext cx="587311" cy="545287"/>
+              </a:xfrm>
+              <a:prstGeom prst="ellipse">
+                <a:avLst/>
+              </a:prstGeom>
+              <a:blipFill>
+                <a:blip r:embed="rId3"/>
+                <a:stretch>
+                  <a:fillRect/>
+                </a:stretch>
+              </a:blipFill>
+              <a:ln w="28575">
+                <a:solidFill>
+                  <a:schemeClr val="tx1"/>
+                </a:solidFill>
+              </a:ln>
+            </p:spPr>
+            <p:txBody>
+              <a:bodyPr/>
+              <a:lstStyle/>
+              <a:p>
+                <a:r>
+                  <a:rPr lang="en-US">
+                    <a:noFill/>
+                  </a:rPr>
+                  <a:t> </a:t>
+                </a:r>
+              </a:p>
+            </p:txBody>
+          </p:sp>
+        </mc:Fallback>
+      </mc:AlternateContent>
+      <mc:AlternateContent xmlns:mc="http://schemas.openxmlformats.org/markup-compatibility/2006">
+        <mc:Choice xmlns:a14="http://schemas.microsoft.com/office/drawing/2010/main" Requires="a14">
+          <p:sp>
+            <p:nvSpPr>
+              <p:cNvPr id="24" name="Oval 23">
+                <a:extLst>
+                  <a:ext uri="{FF2B5EF4-FFF2-40B4-BE49-F238E27FC236}">
+                    <a16:creationId xmlns:a16="http://schemas.microsoft.com/office/drawing/2014/main" id="{F9DB4C9F-9B40-4C68-AE2F-097B3A0087D6}"/>
+                  </a:ext>
+                </a:extLst>
+              </p:cNvPr>
+              <p:cNvSpPr/>
+              <p:nvPr/>
+            </p:nvSpPr>
+            <p:spPr>
+              <a:xfrm>
+                <a:off x="3887912" y="3671313"/>
+                <a:ext cx="587311" cy="545287"/>
+              </a:xfrm>
+              <a:prstGeom prst="ellipse">
+                <a:avLst/>
+              </a:prstGeom>
+              <a:solidFill>
+                <a:srgbClr val="EDE311">
+                  <a:alpha val="29804"/>
+                </a:srgbClr>
+              </a:solidFill>
+              <a:ln w="28575">
+                <a:solidFill>
+                  <a:schemeClr val="tx1"/>
+                </a:solidFill>
+              </a:ln>
+            </p:spPr>
+            <p:style>
+              <a:lnRef idx="2">
+                <a:schemeClr val="accent1">
+                  <a:shade val="50000"/>
+                </a:schemeClr>
+              </a:lnRef>
+              <a:fillRef idx="1">
+                <a:schemeClr val="accent1"/>
+              </a:fillRef>
+              <a:effectRef idx="0">
+                <a:schemeClr val="accent1"/>
+              </a:effectRef>
+              <a:fontRef idx="minor">
+                <a:schemeClr val="lt1"/>
+              </a:fontRef>
+            </p:style>
+            <p:txBody>
+              <a:bodyPr rot="0" spcFirstLastPara="0" vertOverflow="overflow" horzOverflow="overflow" vert="horz" wrap="square" lIns="137160" tIns="0" rIns="0" bIns="68580" numCol="1" spcCol="0" rtlCol="0" fromWordArt="0" anchor="ctr" anchorCtr="0" forceAA="0" compatLnSpc="1">
+                <a:prstTxWarp prst="textNoShape">
+                  <a:avLst/>
+                </a:prstTxWarp>
+                <a:noAutofit/>
+              </a:bodyPr>
+              <a:lstStyle/>
+              <a:p>
+                <a:pPr algn="ctr"/>
+                <a14:m>
+                  <m:oMathPara xmlns:m="http://schemas.openxmlformats.org/officeDocument/2006/math">
+                    <m:oMathParaPr>
+                      <m:jc m:val="centerGroup"/>
+                    </m:oMathParaPr>
+                    <m:oMath xmlns:m="http://schemas.openxmlformats.org/officeDocument/2006/math">
+                      <m:sSub>
+                        <m:sSubPr>
+                          <m:ctrlPr>
+                            <a:rPr lang="en-US" sz="2400" i="1">
+                              <a:ln>
+                                <a:solidFill>
+                                  <a:schemeClr val="tx1"/>
+                                </a:solidFill>
+                              </a:ln>
+                              <a:solidFill>
+                                <a:schemeClr val="tx1"/>
+                              </a:solidFill>
+                              <a:latin typeface="Cambria Math" panose="02040503050406030204" pitchFamily="18" charset="0"/>
+                            </a:rPr>
+                          </m:ctrlPr>
+                        </m:sSubPr>
+                        <m:e>
+                          <m:r>
+                            <a:rPr lang="en-US" sz="2400" i="1">
+                              <a:ln>
+                                <a:solidFill>
+                                  <a:schemeClr val="tx1"/>
+                                </a:solidFill>
+                              </a:ln>
+                              <a:solidFill>
+                                <a:schemeClr val="tx1"/>
+                              </a:solidFill>
+                              <a:latin typeface="Cambria Math" panose="02040503050406030204" pitchFamily="18" charset="0"/>
+                            </a:rPr>
+                            <m:t>𝑠</m:t>
+                          </m:r>
+                        </m:e>
+                        <m:sub>
+                          <m:r>
+                            <a:rPr lang="en-US" sz="2400" i="1">
+                              <a:ln>
+                                <a:solidFill>
+                                  <a:schemeClr val="tx1"/>
+                                </a:solidFill>
+                              </a:ln>
+                              <a:solidFill>
+                                <a:schemeClr val="tx1"/>
+                              </a:solidFill>
+                              <a:latin typeface="Cambria Math" panose="02040503050406030204" pitchFamily="18" charset="0"/>
+                            </a:rPr>
+                            <m:t>2</m:t>
+                          </m:r>
+                        </m:sub>
+                      </m:sSub>
+                    </m:oMath>
+                  </m:oMathPara>
+                </a14:m>
+                <a:endParaRPr lang="en-US" sz="2400" dirty="0">
+                  <a:ln>
+                    <a:solidFill>
+                      <a:schemeClr val="tx1"/>
+                    </a:solidFill>
+                  </a:ln>
+                  <a:solidFill>
+                    <a:schemeClr val="tx1"/>
+                  </a:solidFill>
+                </a:endParaRPr>
+              </a:p>
+            </p:txBody>
+          </p:sp>
+        </mc:Choice>
+        <mc:Fallback>
+          <p:sp>
+            <p:nvSpPr>
+              <p:cNvPr id="24" name="Oval 23">
+                <a:extLst>
+                  <a:ext uri="{FF2B5EF4-FFF2-40B4-BE49-F238E27FC236}">
+                    <a16:creationId xmlns:a16="http://schemas.microsoft.com/office/drawing/2014/main" id="{F9DB4C9F-9B40-4C68-AE2F-097B3A0087D6}"/>
+                  </a:ext>
+                </a:extLst>
+              </p:cNvPr>
+              <p:cNvSpPr>
+                <a:spLocks noRot="1" noChangeAspect="1" noMove="1" noResize="1" noEditPoints="1" noAdjustHandles="1" noChangeArrowheads="1" noChangeShapeType="1" noTextEdit="1"/>
+              </p:cNvSpPr>
+              <p:nvPr/>
+            </p:nvSpPr>
+            <p:spPr>
+              <a:xfrm>
+                <a:off x="3887912" y="3671313"/>
+                <a:ext cx="587311" cy="545287"/>
+              </a:xfrm>
+              <a:prstGeom prst="ellipse">
+                <a:avLst/>
+              </a:prstGeom>
+              <a:blipFill>
+                <a:blip r:embed="rId4"/>
+                <a:stretch>
+                  <a:fillRect/>
+                </a:stretch>
+              </a:blipFill>
+              <a:ln w="28575">
+                <a:solidFill>
+                  <a:schemeClr val="tx1"/>
+                </a:solidFill>
+              </a:ln>
+            </p:spPr>
+            <p:txBody>
+              <a:bodyPr/>
+              <a:lstStyle/>
+              <a:p>
+                <a:r>
+                  <a:rPr lang="en-US">
+                    <a:noFill/>
+                  </a:rPr>
+                  <a:t> </a:t>
+                </a:r>
+              </a:p>
+            </p:txBody>
+          </p:sp>
+        </mc:Fallback>
+      </mc:AlternateContent>
+      <mc:AlternateContent xmlns:mc="http://schemas.openxmlformats.org/markup-compatibility/2006">
+        <mc:Choice xmlns:a14="http://schemas.microsoft.com/office/drawing/2010/main" Requires="a14">
+          <p:sp>
+            <p:nvSpPr>
+              <p:cNvPr id="25" name="Oval 24">
+                <a:extLst>
+                  <a:ext uri="{FF2B5EF4-FFF2-40B4-BE49-F238E27FC236}">
+                    <a16:creationId xmlns:a16="http://schemas.microsoft.com/office/drawing/2014/main" id="{F9B57DAC-7B82-4620-87BF-66128F9E449F}"/>
+                  </a:ext>
+                </a:extLst>
+              </p:cNvPr>
+              <p:cNvSpPr/>
+              <p:nvPr/>
+            </p:nvSpPr>
+            <p:spPr>
+              <a:xfrm>
+                <a:off x="3887912" y="4669713"/>
+                <a:ext cx="587311" cy="545287"/>
+              </a:xfrm>
+              <a:prstGeom prst="ellipse">
+                <a:avLst/>
+              </a:prstGeom>
+              <a:solidFill>
+                <a:srgbClr val="EDE311">
+                  <a:alpha val="29804"/>
+                </a:srgbClr>
+              </a:solidFill>
+              <a:ln w="28575">
+                <a:solidFill>
+                  <a:schemeClr val="tx1"/>
+                </a:solidFill>
+              </a:ln>
+            </p:spPr>
+            <p:style>
+              <a:lnRef idx="2">
+                <a:schemeClr val="accent1">
+                  <a:shade val="50000"/>
+                </a:schemeClr>
+              </a:lnRef>
+              <a:fillRef idx="1">
+                <a:schemeClr val="accent1"/>
+              </a:fillRef>
+              <a:effectRef idx="0">
+                <a:schemeClr val="accent1"/>
+              </a:effectRef>
+              <a:fontRef idx="minor">
+                <a:schemeClr val="lt1"/>
+              </a:fontRef>
+            </p:style>
+            <p:txBody>
+              <a:bodyPr rot="0" spcFirstLastPara="0" vertOverflow="overflow" horzOverflow="overflow" vert="horz" wrap="square" lIns="137160" tIns="0" rIns="0" bIns="68580" numCol="1" spcCol="0" rtlCol="0" fromWordArt="0" anchor="ctr" anchorCtr="0" forceAA="0" compatLnSpc="1">
+                <a:prstTxWarp prst="textNoShape">
+                  <a:avLst/>
+                </a:prstTxWarp>
+                <a:noAutofit/>
+              </a:bodyPr>
+              <a:lstStyle/>
+              <a:p>
+                <a:pPr algn="ctr"/>
+                <a14:m>
+                  <m:oMathPara xmlns:m="http://schemas.openxmlformats.org/officeDocument/2006/math">
+                    <m:oMathParaPr>
+                      <m:jc m:val="centerGroup"/>
+                    </m:oMathParaPr>
+                    <m:oMath xmlns:m="http://schemas.openxmlformats.org/officeDocument/2006/math">
+                      <m:sSub>
+                        <m:sSubPr>
+                          <m:ctrlPr>
+                            <a:rPr lang="en-US" sz="2400" i="1">
+                              <a:ln>
+                                <a:solidFill>
+                                  <a:schemeClr val="tx1"/>
+                                </a:solidFill>
+                              </a:ln>
+                              <a:solidFill>
+                                <a:schemeClr val="tx1"/>
+                              </a:solidFill>
+                              <a:latin typeface="Cambria Math" panose="02040503050406030204" pitchFamily="18" charset="0"/>
+                            </a:rPr>
+                          </m:ctrlPr>
+                        </m:sSubPr>
+                        <m:e>
+                          <m:r>
+                            <a:rPr lang="en-US" sz="2400" i="1">
+                              <a:ln>
+                                <a:solidFill>
+                                  <a:schemeClr val="tx1"/>
+                                </a:solidFill>
+                              </a:ln>
+                              <a:solidFill>
+                                <a:schemeClr val="tx1"/>
+                              </a:solidFill>
+                              <a:latin typeface="Cambria Math" panose="02040503050406030204" pitchFamily="18" charset="0"/>
+                            </a:rPr>
+                            <m:t>𝑠</m:t>
+                          </m:r>
+                        </m:e>
+                        <m:sub>
+                          <m:r>
+                            <a:rPr lang="en-US" sz="2400" i="1">
+                              <a:ln>
+                                <a:solidFill>
+                                  <a:schemeClr val="tx1"/>
+                                </a:solidFill>
+                              </a:ln>
+                              <a:solidFill>
+                                <a:schemeClr val="tx1"/>
+                              </a:solidFill>
+                              <a:latin typeface="Cambria Math" panose="02040503050406030204" pitchFamily="18" charset="0"/>
+                            </a:rPr>
+                            <m:t>3</m:t>
+                          </m:r>
+                        </m:sub>
+                      </m:sSub>
+                    </m:oMath>
+                  </m:oMathPara>
+                </a14:m>
+                <a:endParaRPr lang="en-US" sz="2400" dirty="0">
+                  <a:ln>
+                    <a:solidFill>
+                      <a:schemeClr val="tx1"/>
+                    </a:solidFill>
+                  </a:ln>
+                  <a:solidFill>
+                    <a:schemeClr val="tx1"/>
+                  </a:solidFill>
+                </a:endParaRPr>
+              </a:p>
+            </p:txBody>
+          </p:sp>
+        </mc:Choice>
+        <mc:Fallback>
+          <p:sp>
+            <p:nvSpPr>
+              <p:cNvPr id="25" name="Oval 24">
+                <a:extLst>
+                  <a:ext uri="{FF2B5EF4-FFF2-40B4-BE49-F238E27FC236}">
+                    <a16:creationId xmlns:a16="http://schemas.microsoft.com/office/drawing/2014/main" id="{F9B57DAC-7B82-4620-87BF-66128F9E449F}"/>
+                  </a:ext>
+                </a:extLst>
+              </p:cNvPr>
+              <p:cNvSpPr>
+                <a:spLocks noRot="1" noChangeAspect="1" noMove="1" noResize="1" noEditPoints="1" noAdjustHandles="1" noChangeArrowheads="1" noChangeShapeType="1" noTextEdit="1"/>
+              </p:cNvSpPr>
+              <p:nvPr/>
+            </p:nvSpPr>
+            <p:spPr>
+              <a:xfrm>
+                <a:off x="3887912" y="4669713"/>
+                <a:ext cx="587311" cy="545287"/>
+              </a:xfrm>
+              <a:prstGeom prst="ellipse">
+                <a:avLst/>
+              </a:prstGeom>
+              <a:blipFill>
+                <a:blip r:embed="rId5"/>
+                <a:stretch>
+                  <a:fillRect/>
+                </a:stretch>
+              </a:blipFill>
+              <a:ln w="28575">
+                <a:solidFill>
+                  <a:schemeClr val="tx1"/>
+                </a:solidFill>
+              </a:ln>
+            </p:spPr>
+            <p:txBody>
+              <a:bodyPr/>
+              <a:lstStyle/>
+              <a:p>
+                <a:r>
+                  <a:rPr lang="en-US">
+                    <a:noFill/>
+                  </a:rPr>
+                  <a:t> </a:t>
+                </a:r>
+              </a:p>
+            </p:txBody>
+          </p:sp>
+        </mc:Fallback>
+      </mc:AlternateContent>
+      <mc:AlternateContent xmlns:mc="http://schemas.openxmlformats.org/markup-compatibility/2006">
+        <mc:Choice xmlns:a14="http://schemas.microsoft.com/office/drawing/2010/main" Requires="a14">
+          <p:sp>
+            <p:nvSpPr>
+              <p:cNvPr id="28" name="Oval 27">
+                <a:extLst>
+                  <a:ext uri="{FF2B5EF4-FFF2-40B4-BE49-F238E27FC236}">
+                    <a16:creationId xmlns:a16="http://schemas.microsoft.com/office/drawing/2014/main" id="{C43361D2-5FE7-4E2D-8E56-2271B55DEAC9}"/>
+                  </a:ext>
+                </a:extLst>
+              </p:cNvPr>
+              <p:cNvSpPr/>
+              <p:nvPr/>
+            </p:nvSpPr>
+            <p:spPr>
+              <a:xfrm>
+                <a:off x="5043490" y="5668113"/>
+                <a:ext cx="587311" cy="545287"/>
+              </a:xfrm>
+              <a:prstGeom prst="ellipse">
+                <a:avLst/>
+              </a:prstGeom>
+              <a:solidFill>
+                <a:srgbClr val="EDE311">
+                  <a:alpha val="29804"/>
+                </a:srgbClr>
+              </a:solidFill>
+              <a:ln w="28575">
+                <a:solidFill>
+                  <a:schemeClr val="tx1"/>
+                </a:solidFill>
+              </a:ln>
+            </p:spPr>
+            <p:style>
+              <a:lnRef idx="2">
+                <a:schemeClr val="accent1">
+                  <a:shade val="50000"/>
+                </a:schemeClr>
+              </a:lnRef>
+              <a:fillRef idx="1">
+                <a:schemeClr val="accent1"/>
+              </a:fillRef>
+              <a:effectRef idx="0">
+                <a:schemeClr val="accent1"/>
+              </a:effectRef>
+              <a:fontRef idx="minor">
+                <a:schemeClr val="lt1"/>
+              </a:fontRef>
+            </p:style>
+            <p:txBody>
+              <a:bodyPr rot="0" spcFirstLastPara="0" vertOverflow="overflow" horzOverflow="overflow" vert="horz" wrap="square" lIns="137160" tIns="0" rIns="0" bIns="68580" numCol="1" spcCol="0" rtlCol="0" fromWordArt="0" anchor="ctr" anchorCtr="0" forceAA="0" compatLnSpc="1">
+                <a:prstTxWarp prst="textNoShape">
+                  <a:avLst/>
+                </a:prstTxWarp>
+                <a:noAutofit/>
+              </a:bodyPr>
+              <a:lstStyle/>
+              <a:p>
+                <a:pPr algn="ctr"/>
+                <a14:m>
+                  <m:oMathPara xmlns:m="http://schemas.openxmlformats.org/officeDocument/2006/math">
+                    <m:oMathParaPr>
+                      <m:jc m:val="centerGroup"/>
+                    </m:oMathParaPr>
+                    <m:oMath xmlns:m="http://schemas.openxmlformats.org/officeDocument/2006/math">
+                      <m:sSub>
+                        <m:sSubPr>
+                          <m:ctrlPr>
+                            <a:rPr lang="en-US" sz="2400" i="1">
+                              <a:ln>
+                                <a:solidFill>
+                                  <a:schemeClr val="tx1"/>
+                                </a:solidFill>
+                              </a:ln>
+                              <a:solidFill>
+                                <a:schemeClr val="tx1"/>
+                              </a:solidFill>
+                              <a:latin typeface="Cambria Math" panose="02040503050406030204" pitchFamily="18" charset="0"/>
+                            </a:rPr>
+                          </m:ctrlPr>
+                        </m:sSubPr>
+                        <m:e>
+                          <m:r>
+                            <a:rPr lang="en-US" sz="2400" i="1">
+                              <a:ln>
+                                <a:solidFill>
+                                  <a:schemeClr val="tx1"/>
+                                </a:solidFill>
+                              </a:ln>
+                              <a:solidFill>
+                                <a:schemeClr val="tx1"/>
+                              </a:solidFill>
+                              <a:latin typeface="Cambria Math" panose="02040503050406030204" pitchFamily="18" charset="0"/>
+                            </a:rPr>
+                            <m:t>𝑠</m:t>
+                          </m:r>
+                        </m:e>
+                        <m:sub>
+                          <m:r>
+                            <a:rPr lang="en-US" sz="2400" i="1">
+                              <a:ln>
+                                <a:solidFill>
+                                  <a:schemeClr val="tx1"/>
+                                </a:solidFill>
+                              </a:ln>
+                              <a:solidFill>
+                                <a:schemeClr val="tx1"/>
+                              </a:solidFill>
+                              <a:latin typeface="Cambria Math" panose="02040503050406030204" pitchFamily="18" charset="0"/>
+                            </a:rPr>
+                            <m:t>5</m:t>
+                          </m:r>
+                        </m:sub>
+                      </m:sSub>
+                    </m:oMath>
+                  </m:oMathPara>
+                </a14:m>
+                <a:endParaRPr lang="en-US" sz="2400" dirty="0">
+                  <a:ln>
+                    <a:solidFill>
+                      <a:schemeClr val="tx1"/>
+                    </a:solidFill>
+                  </a:ln>
+                  <a:solidFill>
+                    <a:schemeClr val="tx1"/>
+                  </a:solidFill>
+                </a:endParaRPr>
+              </a:p>
+            </p:txBody>
+          </p:sp>
+        </mc:Choice>
+        <mc:Fallback>
+          <p:sp>
+            <p:nvSpPr>
+              <p:cNvPr id="28" name="Oval 27">
+                <a:extLst>
+                  <a:ext uri="{FF2B5EF4-FFF2-40B4-BE49-F238E27FC236}">
+                    <a16:creationId xmlns:a16="http://schemas.microsoft.com/office/drawing/2014/main" id="{C43361D2-5FE7-4E2D-8E56-2271B55DEAC9}"/>
+                  </a:ext>
+                </a:extLst>
+              </p:cNvPr>
+              <p:cNvSpPr>
+                <a:spLocks noRot="1" noChangeAspect="1" noMove="1" noResize="1" noEditPoints="1" noAdjustHandles="1" noChangeArrowheads="1" noChangeShapeType="1" noTextEdit="1"/>
+              </p:cNvSpPr>
+              <p:nvPr/>
+            </p:nvSpPr>
+            <p:spPr>
+              <a:xfrm>
+                <a:off x="5043490" y="5668113"/>
+                <a:ext cx="587311" cy="545287"/>
+              </a:xfrm>
+              <a:prstGeom prst="ellipse">
+                <a:avLst/>
+              </a:prstGeom>
+              <a:blipFill>
+                <a:blip r:embed="rId6"/>
+                <a:stretch>
+                  <a:fillRect/>
+                </a:stretch>
+              </a:blipFill>
+              <a:ln w="28575">
+                <a:solidFill>
+                  <a:schemeClr val="tx1"/>
+                </a:solidFill>
+              </a:ln>
+            </p:spPr>
+            <p:txBody>
+              <a:bodyPr/>
+              <a:lstStyle/>
+              <a:p>
+                <a:r>
+                  <a:rPr lang="en-US">
+                    <a:noFill/>
+                  </a:rPr>
+                  <a:t> </a:t>
+                </a:r>
+              </a:p>
+            </p:txBody>
+          </p:sp>
+        </mc:Fallback>
+      </mc:AlternateContent>
+      <mc:AlternateContent xmlns:mc="http://schemas.openxmlformats.org/markup-compatibility/2006">
+        <mc:Choice xmlns:a14="http://schemas.microsoft.com/office/drawing/2010/main" Requires="a14">
+          <p:sp>
+            <p:nvSpPr>
+              <p:cNvPr id="31" name="Oval 30">
+                <a:extLst>
+                  <a:ext uri="{FF2B5EF4-FFF2-40B4-BE49-F238E27FC236}">
+                    <a16:creationId xmlns:a16="http://schemas.microsoft.com/office/drawing/2014/main" id="{4858F10E-180B-478C-89A6-339FEAB3B06C}"/>
+                  </a:ext>
+                </a:extLst>
+              </p:cNvPr>
+              <p:cNvSpPr/>
+              <p:nvPr/>
+            </p:nvSpPr>
+            <p:spPr>
+              <a:xfrm>
+                <a:off x="5043490" y="6666513"/>
+                <a:ext cx="587311" cy="545287"/>
+              </a:xfrm>
+              <a:prstGeom prst="ellipse">
+                <a:avLst/>
+              </a:prstGeom>
+              <a:solidFill>
+                <a:srgbClr val="EDE311">
+                  <a:alpha val="29804"/>
+                </a:srgbClr>
+              </a:solidFill>
+              <a:ln w="28575">
+                <a:solidFill>
+                  <a:schemeClr val="tx1"/>
+                </a:solidFill>
+              </a:ln>
+            </p:spPr>
+            <p:style>
+              <a:lnRef idx="2">
+                <a:schemeClr val="accent1">
+                  <a:shade val="50000"/>
+                </a:schemeClr>
+              </a:lnRef>
+              <a:fillRef idx="1">
+                <a:schemeClr val="accent1"/>
+              </a:fillRef>
+              <a:effectRef idx="0">
+                <a:schemeClr val="accent1"/>
+              </a:effectRef>
+              <a:fontRef idx="minor">
+                <a:schemeClr val="lt1"/>
+              </a:fontRef>
+            </p:style>
+            <p:txBody>
+              <a:bodyPr rot="0" spcFirstLastPara="0" vertOverflow="overflow" horzOverflow="overflow" vert="horz" wrap="square" lIns="137160" tIns="0" rIns="0" bIns="68580" numCol="1" spcCol="0" rtlCol="0" fromWordArt="0" anchor="ctr" anchorCtr="0" forceAA="0" compatLnSpc="1">
+                <a:prstTxWarp prst="textNoShape">
+                  <a:avLst/>
+                </a:prstTxWarp>
+                <a:noAutofit/>
+              </a:bodyPr>
+              <a:lstStyle/>
+              <a:p>
+                <a:pPr algn="ctr"/>
+                <a14:m>
+                  <m:oMathPara xmlns:m="http://schemas.openxmlformats.org/officeDocument/2006/math">
+                    <m:oMathParaPr>
+                      <m:jc m:val="centerGroup"/>
+                    </m:oMathParaPr>
+                    <m:oMath xmlns:m="http://schemas.openxmlformats.org/officeDocument/2006/math">
+                      <m:sSub>
+                        <m:sSubPr>
+                          <m:ctrlPr>
+                            <a:rPr lang="en-US" sz="2400" i="1">
+                              <a:ln>
+                                <a:solidFill>
+                                  <a:schemeClr val="tx1"/>
+                                </a:solidFill>
+                              </a:ln>
+                              <a:solidFill>
+                                <a:schemeClr val="tx1"/>
+                              </a:solidFill>
+                              <a:latin typeface="Cambria Math" panose="02040503050406030204" pitchFamily="18" charset="0"/>
+                            </a:rPr>
+                          </m:ctrlPr>
+                        </m:sSubPr>
+                        <m:e>
+                          <m:r>
+                            <a:rPr lang="en-US" sz="2400" i="1">
+                              <a:ln>
+                                <a:solidFill>
+                                  <a:schemeClr val="tx1"/>
+                                </a:solidFill>
+                              </a:ln>
+                              <a:solidFill>
+                                <a:schemeClr val="tx1"/>
+                              </a:solidFill>
+                              <a:latin typeface="Cambria Math" panose="02040503050406030204" pitchFamily="18" charset="0"/>
+                            </a:rPr>
+                            <m:t>𝑠</m:t>
+                          </m:r>
+                        </m:e>
+                        <m:sub>
+                          <m:r>
+                            <a:rPr lang="en-US" sz="2400" i="1">
+                              <a:ln>
+                                <a:solidFill>
+                                  <a:schemeClr val="tx1"/>
+                                </a:solidFill>
+                              </a:ln>
+                              <a:solidFill>
+                                <a:schemeClr val="tx1"/>
+                              </a:solidFill>
+                              <a:latin typeface="Cambria Math" panose="02040503050406030204" pitchFamily="18" charset="0"/>
+                            </a:rPr>
+                            <m:t>6</m:t>
+                          </m:r>
+                        </m:sub>
+                      </m:sSub>
+                    </m:oMath>
+                  </m:oMathPara>
+                </a14:m>
+                <a:endParaRPr lang="en-US" sz="2400" dirty="0">
+                  <a:ln>
+                    <a:solidFill>
+                      <a:schemeClr val="tx1"/>
+                    </a:solidFill>
+                  </a:ln>
+                  <a:solidFill>
+                    <a:schemeClr val="tx1"/>
+                  </a:solidFill>
+                </a:endParaRPr>
+              </a:p>
+            </p:txBody>
+          </p:sp>
+        </mc:Choice>
+        <mc:Fallback>
+          <p:sp>
+            <p:nvSpPr>
+              <p:cNvPr id="31" name="Oval 30">
+                <a:extLst>
+                  <a:ext uri="{FF2B5EF4-FFF2-40B4-BE49-F238E27FC236}">
+                    <a16:creationId xmlns:a16="http://schemas.microsoft.com/office/drawing/2014/main" id="{4858F10E-180B-478C-89A6-339FEAB3B06C}"/>
+                  </a:ext>
+                </a:extLst>
+              </p:cNvPr>
+              <p:cNvSpPr>
+                <a:spLocks noRot="1" noChangeAspect="1" noMove="1" noResize="1" noEditPoints="1" noAdjustHandles="1" noChangeArrowheads="1" noChangeShapeType="1" noTextEdit="1"/>
+              </p:cNvSpPr>
+              <p:nvPr/>
+            </p:nvSpPr>
+            <p:spPr>
+              <a:xfrm>
+                <a:off x="5043490" y="6666513"/>
+                <a:ext cx="587311" cy="545287"/>
+              </a:xfrm>
+              <a:prstGeom prst="ellipse">
+                <a:avLst/>
+              </a:prstGeom>
+              <a:blipFill>
+                <a:blip r:embed="rId7"/>
+                <a:stretch>
+                  <a:fillRect/>
+                </a:stretch>
+              </a:blipFill>
+              <a:ln w="28575">
+                <a:solidFill>
+                  <a:schemeClr val="tx1"/>
+                </a:solidFill>
+              </a:ln>
+            </p:spPr>
+            <p:txBody>
+              <a:bodyPr/>
+              <a:lstStyle/>
+              <a:p>
+                <a:r>
+                  <a:rPr lang="en-US">
+                    <a:noFill/>
+                  </a:rPr>
+                  <a:t> </a:t>
+                </a:r>
+              </a:p>
+            </p:txBody>
+          </p:sp>
+        </mc:Fallback>
+      </mc:AlternateContent>
+      <mc:AlternateContent xmlns:mc="http://schemas.openxmlformats.org/markup-compatibility/2006">
+        <mc:Choice xmlns:a14="http://schemas.microsoft.com/office/drawing/2010/main" Requires="a14">
+          <p:sp>
+            <p:nvSpPr>
+              <p:cNvPr id="33" name="Oval 32">
+                <a:extLst>
+                  <a:ext uri="{FF2B5EF4-FFF2-40B4-BE49-F238E27FC236}">
+                    <a16:creationId xmlns:a16="http://schemas.microsoft.com/office/drawing/2014/main" id="{1E38ABC2-1EBA-4705-B45B-67D6A13E7551}"/>
+                  </a:ext>
+                </a:extLst>
+              </p:cNvPr>
+              <p:cNvSpPr/>
+              <p:nvPr/>
+            </p:nvSpPr>
+            <p:spPr>
+              <a:xfrm>
+                <a:off x="5043490" y="7664913"/>
+                <a:ext cx="587311" cy="545287"/>
+              </a:xfrm>
+              <a:prstGeom prst="ellipse">
+                <a:avLst/>
+              </a:prstGeom>
+              <a:solidFill>
+                <a:srgbClr val="EDE311">
+                  <a:alpha val="29804"/>
+                </a:srgbClr>
+              </a:solidFill>
+              <a:ln w="28575">
+                <a:solidFill>
+                  <a:schemeClr val="tx1"/>
+                </a:solidFill>
+              </a:ln>
+            </p:spPr>
+            <p:style>
+              <a:lnRef idx="2">
+                <a:schemeClr val="accent1">
+                  <a:shade val="50000"/>
+                </a:schemeClr>
+              </a:lnRef>
+              <a:fillRef idx="1">
+                <a:schemeClr val="accent1"/>
+              </a:fillRef>
+              <a:effectRef idx="0">
+                <a:schemeClr val="accent1"/>
+              </a:effectRef>
+              <a:fontRef idx="minor">
+                <a:schemeClr val="lt1"/>
+              </a:fontRef>
+            </p:style>
+            <p:txBody>
+              <a:bodyPr rot="0" spcFirstLastPara="0" vertOverflow="overflow" horzOverflow="overflow" vert="horz" wrap="square" lIns="137160" tIns="0" rIns="0" bIns="68580" numCol="1" spcCol="0" rtlCol="0" fromWordArt="0" anchor="ctr" anchorCtr="0" forceAA="0" compatLnSpc="1">
+                <a:prstTxWarp prst="textNoShape">
+                  <a:avLst/>
+                </a:prstTxWarp>
+                <a:noAutofit/>
+              </a:bodyPr>
+              <a:lstStyle/>
+              <a:p>
+                <a:pPr algn="ctr"/>
+                <a14:m>
+                  <m:oMathPara xmlns:m="http://schemas.openxmlformats.org/officeDocument/2006/math">
+                    <m:oMathParaPr>
+                      <m:jc m:val="centerGroup"/>
+                    </m:oMathParaPr>
+                    <m:oMath xmlns:m="http://schemas.openxmlformats.org/officeDocument/2006/math">
+                      <m:sSub>
+                        <m:sSubPr>
+                          <m:ctrlPr>
+                            <a:rPr lang="en-US" sz="2400" i="1">
+                              <a:ln>
+                                <a:solidFill>
+                                  <a:schemeClr val="tx1"/>
+                                </a:solidFill>
+                              </a:ln>
+                              <a:solidFill>
+                                <a:schemeClr val="tx1"/>
+                              </a:solidFill>
+                              <a:latin typeface="Cambria Math" panose="02040503050406030204" pitchFamily="18" charset="0"/>
+                            </a:rPr>
+                          </m:ctrlPr>
+                        </m:sSubPr>
+                        <m:e>
+                          <m:r>
+                            <a:rPr lang="en-US" sz="2400" i="1">
+                              <a:ln>
+                                <a:solidFill>
+                                  <a:schemeClr val="tx1"/>
+                                </a:solidFill>
+                              </a:ln>
+                              <a:solidFill>
+                                <a:schemeClr val="tx1"/>
+                              </a:solidFill>
+                              <a:latin typeface="Cambria Math" panose="02040503050406030204" pitchFamily="18" charset="0"/>
+                            </a:rPr>
+                            <m:t>𝑠</m:t>
+                          </m:r>
+                        </m:e>
+                        <m:sub>
+                          <m:r>
+                            <a:rPr lang="en-US" sz="2400" i="1">
+                              <a:ln>
+                                <a:solidFill>
+                                  <a:schemeClr val="tx1"/>
+                                </a:solidFill>
+                              </a:ln>
+                              <a:solidFill>
+                                <a:schemeClr val="tx1"/>
+                              </a:solidFill>
+                              <a:latin typeface="Cambria Math" panose="02040503050406030204" pitchFamily="18" charset="0"/>
+                            </a:rPr>
+                            <m:t>7</m:t>
+                          </m:r>
+                        </m:sub>
+                      </m:sSub>
+                    </m:oMath>
+                  </m:oMathPara>
+                </a14:m>
+                <a:endParaRPr lang="en-US" sz="2400" dirty="0">
+                  <a:ln>
+                    <a:solidFill>
+                      <a:schemeClr val="tx1"/>
+                    </a:solidFill>
+                  </a:ln>
+                  <a:solidFill>
+                    <a:schemeClr val="tx1"/>
+                  </a:solidFill>
+                </a:endParaRPr>
+              </a:p>
+            </p:txBody>
+          </p:sp>
+        </mc:Choice>
+        <mc:Fallback>
+          <p:sp>
+            <p:nvSpPr>
+              <p:cNvPr id="33" name="Oval 32">
+                <a:extLst>
+                  <a:ext uri="{FF2B5EF4-FFF2-40B4-BE49-F238E27FC236}">
+                    <a16:creationId xmlns:a16="http://schemas.microsoft.com/office/drawing/2014/main" id="{1E38ABC2-1EBA-4705-B45B-67D6A13E7551}"/>
+                  </a:ext>
+                </a:extLst>
+              </p:cNvPr>
+              <p:cNvSpPr>
+                <a:spLocks noRot="1" noChangeAspect="1" noMove="1" noResize="1" noEditPoints="1" noAdjustHandles="1" noChangeArrowheads="1" noChangeShapeType="1" noTextEdit="1"/>
+              </p:cNvSpPr>
+              <p:nvPr/>
+            </p:nvSpPr>
+            <p:spPr>
+              <a:xfrm>
+                <a:off x="5043490" y="7664913"/>
+                <a:ext cx="587311" cy="545287"/>
+              </a:xfrm>
+              <a:prstGeom prst="ellipse">
+                <a:avLst/>
+              </a:prstGeom>
+              <a:blipFill>
+                <a:blip r:embed="rId8"/>
+                <a:stretch>
+                  <a:fillRect/>
+                </a:stretch>
+              </a:blipFill>
+              <a:ln w="28575">
+                <a:solidFill>
+                  <a:schemeClr val="tx1"/>
+                </a:solidFill>
+              </a:ln>
+            </p:spPr>
+            <p:txBody>
+              <a:bodyPr/>
+              <a:lstStyle/>
+              <a:p>
+                <a:r>
+                  <a:rPr lang="en-US">
+                    <a:noFill/>
+                  </a:rPr>
+                  <a:t> </a:t>
+                </a:r>
+              </a:p>
+            </p:txBody>
+          </p:sp>
+        </mc:Fallback>
+      </mc:AlternateContent>
+      <mc:AlternateContent xmlns:mc="http://schemas.openxmlformats.org/markup-compatibility/2006">
+        <mc:Choice xmlns:a14="http://schemas.microsoft.com/office/drawing/2010/main" Requires="a14">
+          <p:sp>
+            <p:nvSpPr>
+              <p:cNvPr id="37" name="Oval 36">
+                <a:extLst>
+                  <a:ext uri="{FF2B5EF4-FFF2-40B4-BE49-F238E27FC236}">
+                    <a16:creationId xmlns:a16="http://schemas.microsoft.com/office/drawing/2014/main" id="{652E3D04-5BD2-4AEB-A108-244069A46327}"/>
+                  </a:ext>
+                </a:extLst>
+              </p:cNvPr>
+              <p:cNvSpPr/>
+              <p:nvPr/>
+            </p:nvSpPr>
+            <p:spPr>
+              <a:xfrm>
+                <a:off x="5043490" y="4669713"/>
+                <a:ext cx="587311" cy="545287"/>
+              </a:xfrm>
+              <a:prstGeom prst="ellipse">
+                <a:avLst/>
+              </a:prstGeom>
+              <a:solidFill>
+                <a:srgbClr val="EDE311">
+                  <a:alpha val="29804"/>
+                </a:srgbClr>
+              </a:solidFill>
+              <a:ln w="28575">
+                <a:solidFill>
+                  <a:schemeClr val="tx1"/>
+                </a:solidFill>
+              </a:ln>
+            </p:spPr>
+            <p:style>
+              <a:lnRef idx="2">
+                <a:schemeClr val="accent1">
+                  <a:shade val="50000"/>
+                </a:schemeClr>
+              </a:lnRef>
+              <a:fillRef idx="1">
+                <a:schemeClr val="accent1"/>
+              </a:fillRef>
+              <a:effectRef idx="0">
+                <a:schemeClr val="accent1"/>
+              </a:effectRef>
+              <a:fontRef idx="minor">
+                <a:schemeClr val="lt1"/>
+              </a:fontRef>
+            </p:style>
+            <p:txBody>
+              <a:bodyPr rot="0" spcFirstLastPara="0" vertOverflow="overflow" horzOverflow="overflow" vert="horz" wrap="square" lIns="137160" tIns="0" rIns="0" bIns="68580" numCol="1" spcCol="0" rtlCol="0" fromWordArt="0" anchor="ctr" anchorCtr="0" forceAA="0" compatLnSpc="1">
+                <a:prstTxWarp prst="textNoShape">
+                  <a:avLst/>
+                </a:prstTxWarp>
+                <a:noAutofit/>
+              </a:bodyPr>
+              <a:lstStyle/>
+              <a:p>
+                <a:pPr algn="ctr"/>
+                <a14:m>
+                  <m:oMathPara xmlns:m="http://schemas.openxmlformats.org/officeDocument/2006/math">
+                    <m:oMathParaPr>
+                      <m:jc m:val="centerGroup"/>
+                    </m:oMathParaPr>
+                    <m:oMath xmlns:m="http://schemas.openxmlformats.org/officeDocument/2006/math">
+                      <m:sSub>
+                        <m:sSubPr>
+                          <m:ctrlPr>
+                            <a:rPr lang="en-US" sz="2400" i="1">
+                              <a:ln>
+                                <a:solidFill>
+                                  <a:schemeClr val="tx1"/>
+                                </a:solidFill>
+                              </a:ln>
+                              <a:solidFill>
+                                <a:schemeClr val="tx1"/>
+                              </a:solidFill>
+                              <a:latin typeface="Cambria Math" panose="02040503050406030204" pitchFamily="18" charset="0"/>
+                            </a:rPr>
+                          </m:ctrlPr>
+                        </m:sSubPr>
+                        <m:e>
+                          <m:r>
+                            <a:rPr lang="en-US" sz="2400" i="1">
+                              <a:ln>
+                                <a:solidFill>
+                                  <a:schemeClr val="tx1"/>
+                                </a:solidFill>
+                              </a:ln>
+                              <a:solidFill>
+                                <a:schemeClr val="tx1"/>
+                              </a:solidFill>
+                              <a:latin typeface="Cambria Math" panose="02040503050406030204" pitchFamily="18" charset="0"/>
+                            </a:rPr>
+                            <m:t>𝑠</m:t>
+                          </m:r>
+                        </m:e>
+                        <m:sub>
+                          <m:r>
+                            <a:rPr lang="en-US" sz="2400" i="1">
+                              <a:ln>
+                                <a:solidFill>
+                                  <a:schemeClr val="tx1"/>
+                                </a:solidFill>
+                              </a:ln>
+                              <a:solidFill>
+                                <a:schemeClr val="tx1"/>
+                              </a:solidFill>
+                              <a:latin typeface="Cambria Math" panose="02040503050406030204" pitchFamily="18" charset="0"/>
+                            </a:rPr>
+                            <m:t>4</m:t>
+                          </m:r>
+                        </m:sub>
+                      </m:sSub>
+                    </m:oMath>
+                  </m:oMathPara>
+                </a14:m>
+                <a:endParaRPr lang="en-US" sz="2400" dirty="0">
+                  <a:ln>
+                    <a:solidFill>
+                      <a:schemeClr val="tx1"/>
+                    </a:solidFill>
+                  </a:ln>
+                  <a:solidFill>
+                    <a:schemeClr val="tx1"/>
+                  </a:solidFill>
+                </a:endParaRPr>
+              </a:p>
+            </p:txBody>
+          </p:sp>
+        </mc:Choice>
+        <mc:Fallback>
+          <p:sp>
+            <p:nvSpPr>
+              <p:cNvPr id="37" name="Oval 36">
+                <a:extLst>
+                  <a:ext uri="{FF2B5EF4-FFF2-40B4-BE49-F238E27FC236}">
+                    <a16:creationId xmlns:a16="http://schemas.microsoft.com/office/drawing/2014/main" id="{652E3D04-5BD2-4AEB-A108-244069A46327}"/>
+                  </a:ext>
+                </a:extLst>
+              </p:cNvPr>
+              <p:cNvSpPr>
+                <a:spLocks noRot="1" noChangeAspect="1" noMove="1" noResize="1" noEditPoints="1" noAdjustHandles="1" noChangeArrowheads="1" noChangeShapeType="1" noTextEdit="1"/>
+              </p:cNvSpPr>
+              <p:nvPr/>
+            </p:nvSpPr>
+            <p:spPr>
+              <a:xfrm>
+                <a:off x="5043490" y="4669713"/>
+                <a:ext cx="587311" cy="545287"/>
+              </a:xfrm>
+              <a:prstGeom prst="ellipse">
+                <a:avLst/>
+              </a:prstGeom>
+              <a:blipFill>
+                <a:blip r:embed="rId9"/>
+                <a:stretch>
+                  <a:fillRect/>
+                </a:stretch>
+              </a:blipFill>
+              <a:ln w="28575">
+                <a:solidFill>
+                  <a:schemeClr val="tx1"/>
+                </a:solidFill>
+              </a:ln>
+            </p:spPr>
+            <p:txBody>
+              <a:bodyPr/>
+              <a:lstStyle/>
+              <a:p>
+                <a:r>
+                  <a:rPr lang="en-US">
+                    <a:noFill/>
+                  </a:rPr>
+                  <a:t> </a:t>
+                </a:r>
+              </a:p>
+            </p:txBody>
+          </p:sp>
+        </mc:Fallback>
+      </mc:AlternateContent>
+      <mc:AlternateContent xmlns:mc="http://schemas.openxmlformats.org/markup-compatibility/2006">
+        <mc:Choice xmlns:a14="http://schemas.microsoft.com/office/drawing/2010/main" Requires="a14">
+          <p:sp>
+            <p:nvSpPr>
+              <p:cNvPr id="40" name="Oval 39">
+                <a:extLst>
+                  <a:ext uri="{FF2B5EF4-FFF2-40B4-BE49-F238E27FC236}">
+                    <a16:creationId xmlns:a16="http://schemas.microsoft.com/office/drawing/2014/main" id="{98CE3E03-2F2E-47B9-802C-6A24CD79F5CD}"/>
+                  </a:ext>
+                </a:extLst>
+              </p:cNvPr>
+              <p:cNvSpPr/>
+              <p:nvPr/>
+            </p:nvSpPr>
+            <p:spPr>
+              <a:xfrm>
+                <a:off x="817563" y="2672913"/>
+                <a:ext cx="587311" cy="545287"/>
+              </a:xfrm>
+              <a:prstGeom prst="ellipse">
+                <a:avLst/>
+              </a:prstGeom>
+              <a:solidFill>
+                <a:srgbClr val="0070C0">
+                  <a:alpha val="20000"/>
+                </a:srgbClr>
+              </a:solidFill>
+              <a:ln w="28575">
+                <a:solidFill>
+                  <a:schemeClr val="tx1"/>
+                </a:solidFill>
+              </a:ln>
+            </p:spPr>
+            <p:style>
+              <a:lnRef idx="2">
+                <a:schemeClr val="accent1">
+                  <a:shade val="50000"/>
+                </a:schemeClr>
+              </a:lnRef>
+              <a:fillRef idx="1">
+                <a:schemeClr val="accent1"/>
+              </a:fillRef>
+              <a:effectRef idx="0">
+                <a:schemeClr val="accent1"/>
+              </a:effectRef>
+              <a:fontRef idx="minor">
+                <a:schemeClr val="lt1"/>
+              </a:fontRef>
+            </p:style>
+            <p:txBody>
+              <a:bodyPr rot="0" spcFirstLastPara="0" vertOverflow="overflow" horzOverflow="overflow" vert="horz" wrap="square" lIns="137160" tIns="0" rIns="0" bIns="68580" numCol="1" spcCol="0" rtlCol="0" fromWordArt="0" anchor="ctr" anchorCtr="0" forceAA="0" compatLnSpc="1">
+                <a:prstTxWarp prst="textNoShape">
+                  <a:avLst/>
+                </a:prstTxWarp>
+                <a:noAutofit/>
+              </a:bodyPr>
+              <a:lstStyle/>
+              <a:p>
+                <a:pPr algn="ctr"/>
+                <a14:m>
+                  <m:oMathPara xmlns:m="http://schemas.openxmlformats.org/officeDocument/2006/math">
+                    <m:oMathParaPr>
+                      <m:jc m:val="centerGroup"/>
+                    </m:oMathParaPr>
+                    <m:oMath xmlns:m="http://schemas.openxmlformats.org/officeDocument/2006/math">
+                      <m:sSub>
+                        <m:sSubPr>
+                          <m:ctrlPr>
+                            <a:rPr lang="en-US" sz="2400" i="1" smtClean="0">
+                              <a:ln>
+                                <a:solidFill>
+                                  <a:schemeClr val="tx1"/>
+                                </a:solidFill>
+                              </a:ln>
+                              <a:solidFill>
+                                <a:schemeClr val="tx1"/>
+                              </a:solidFill>
+                              <a:latin typeface="Cambria Math" panose="02040503050406030204" pitchFamily="18" charset="0"/>
+                            </a:rPr>
+                          </m:ctrlPr>
+                        </m:sSubPr>
+                        <m:e>
+                          <m:acc>
+                            <m:accPr>
+                              <m:chr m:val="̅"/>
+                              <m:ctrlPr>
+                                <a:rPr lang="en-US" sz="2400" i="1">
+                                  <a:ln>
+                                    <a:solidFill>
+                                      <a:schemeClr val="tx1"/>
+                                    </a:solidFill>
+                                  </a:ln>
+                                  <a:solidFill>
+                                    <a:schemeClr val="tx1"/>
+                                  </a:solidFill>
+                                  <a:latin typeface="Cambria Math" panose="02040503050406030204" pitchFamily="18" charset="0"/>
+                                </a:rPr>
+                              </m:ctrlPr>
+                            </m:accPr>
+                            <m:e>
+                              <m:r>
+                                <a:rPr lang="en-US" sz="2400" i="1">
+                                  <a:ln>
+                                    <a:solidFill>
+                                      <a:schemeClr val="tx1"/>
+                                    </a:solidFill>
+                                  </a:ln>
+                                  <a:solidFill>
+                                    <a:schemeClr val="tx1"/>
+                                  </a:solidFill>
+                                  <a:latin typeface="Cambria Math" panose="02040503050406030204" pitchFamily="18" charset="0"/>
+                                </a:rPr>
+                                <m:t>𝑠</m:t>
+                              </m:r>
+                            </m:e>
+                          </m:acc>
+                        </m:e>
+                        <m:sub>
+                          <m:r>
+                            <a:rPr lang="en-US" sz="2400" i="1">
+                              <a:ln>
+                                <a:solidFill>
+                                  <a:schemeClr val="tx1"/>
+                                </a:solidFill>
+                              </a:ln>
+                              <a:solidFill>
+                                <a:schemeClr val="tx1"/>
+                              </a:solidFill>
+                              <a:latin typeface="Cambria Math" panose="02040503050406030204" pitchFamily="18" charset="0"/>
+                            </a:rPr>
+                            <m:t>1</m:t>
+                          </m:r>
+                        </m:sub>
+                      </m:sSub>
+                    </m:oMath>
+                  </m:oMathPara>
+                </a14:m>
+                <a:endParaRPr lang="en-US" sz="2400" i="1" dirty="0">
+                  <a:ln>
+                    <a:solidFill>
+                      <a:schemeClr val="tx1"/>
+                    </a:solidFill>
+                  </a:ln>
+                  <a:solidFill>
+                    <a:schemeClr val="tx1"/>
+                  </a:solidFill>
+                </a:endParaRPr>
+              </a:p>
+            </p:txBody>
+          </p:sp>
+        </mc:Choice>
+        <mc:Fallback>
+          <p:sp>
+            <p:nvSpPr>
+              <p:cNvPr id="40" name="Oval 39">
+                <a:extLst>
+                  <a:ext uri="{FF2B5EF4-FFF2-40B4-BE49-F238E27FC236}">
+                    <a16:creationId xmlns:a16="http://schemas.microsoft.com/office/drawing/2014/main" id="{98CE3E03-2F2E-47B9-802C-6A24CD79F5CD}"/>
+                  </a:ext>
+                </a:extLst>
+              </p:cNvPr>
+              <p:cNvSpPr>
+                <a:spLocks noRot="1" noChangeAspect="1" noMove="1" noResize="1" noEditPoints="1" noAdjustHandles="1" noChangeArrowheads="1" noChangeShapeType="1" noTextEdit="1"/>
+              </p:cNvSpPr>
+              <p:nvPr/>
+            </p:nvSpPr>
+            <p:spPr>
+              <a:xfrm>
+                <a:off x="817563" y="2672913"/>
+                <a:ext cx="587311" cy="545287"/>
+              </a:xfrm>
+              <a:prstGeom prst="ellipse">
+                <a:avLst/>
+              </a:prstGeom>
+              <a:blipFill>
+                <a:blip r:embed="rId10"/>
+                <a:stretch>
+                  <a:fillRect/>
+                </a:stretch>
+              </a:blipFill>
+              <a:ln w="28575">
+                <a:solidFill>
+                  <a:schemeClr val="tx1"/>
+                </a:solidFill>
+              </a:ln>
+            </p:spPr>
+            <p:txBody>
+              <a:bodyPr/>
+              <a:lstStyle/>
+              <a:p>
+                <a:r>
+                  <a:rPr lang="en-US">
+                    <a:noFill/>
+                  </a:rPr>
+                  <a:t> </a:t>
+                </a:r>
+              </a:p>
+            </p:txBody>
+          </p:sp>
+        </mc:Fallback>
+      </mc:AlternateContent>
+      <mc:AlternateContent xmlns:mc="http://schemas.openxmlformats.org/markup-compatibility/2006">
+        <mc:Choice xmlns:a14="http://schemas.microsoft.com/office/drawing/2010/main" Requires="a14">
+          <p:sp>
+            <p:nvSpPr>
+              <p:cNvPr id="41" name="Oval 40">
+                <a:extLst>
+                  <a:ext uri="{FF2B5EF4-FFF2-40B4-BE49-F238E27FC236}">
+                    <a16:creationId xmlns:a16="http://schemas.microsoft.com/office/drawing/2014/main" id="{401A4F67-2B92-4677-8FF1-2A2BE82C59B8}"/>
+                  </a:ext>
+                </a:extLst>
+              </p:cNvPr>
+              <p:cNvSpPr/>
+              <p:nvPr/>
+            </p:nvSpPr>
+            <p:spPr>
+              <a:xfrm>
+                <a:off x="817563" y="3668407"/>
+                <a:ext cx="587311" cy="545287"/>
+              </a:xfrm>
+              <a:prstGeom prst="ellipse">
+                <a:avLst/>
+              </a:prstGeom>
+              <a:solidFill>
+                <a:srgbClr val="0070C0">
+                  <a:alpha val="20000"/>
+                </a:srgbClr>
+              </a:solidFill>
+              <a:ln w="28575">
+                <a:solidFill>
+                  <a:schemeClr val="tx1"/>
+                </a:solidFill>
+              </a:ln>
+            </p:spPr>
+            <p:style>
+              <a:lnRef idx="2">
+                <a:schemeClr val="accent1">
+                  <a:shade val="50000"/>
+                </a:schemeClr>
+              </a:lnRef>
+              <a:fillRef idx="1">
+                <a:schemeClr val="accent1"/>
+              </a:fillRef>
+              <a:effectRef idx="0">
+                <a:schemeClr val="accent1"/>
+              </a:effectRef>
+              <a:fontRef idx="minor">
+                <a:schemeClr val="lt1"/>
+              </a:fontRef>
+            </p:style>
+            <p:txBody>
+              <a:bodyPr rot="0" spcFirstLastPara="0" vertOverflow="overflow" horzOverflow="overflow" vert="horz" wrap="square" lIns="137160" tIns="0" rIns="0" bIns="68580" numCol="1" spcCol="0" rtlCol="0" fromWordArt="0" anchor="ctr" anchorCtr="0" forceAA="0" compatLnSpc="1">
+                <a:prstTxWarp prst="textNoShape">
+                  <a:avLst/>
+                </a:prstTxWarp>
+                <a:noAutofit/>
+              </a:bodyPr>
+              <a:lstStyle/>
+              <a:p>
+                <a:pPr algn="ctr"/>
+                <a14:m>
+                  <m:oMathPara xmlns:m="http://schemas.openxmlformats.org/officeDocument/2006/math">
+                    <m:oMathParaPr>
+                      <m:jc m:val="centerGroup"/>
+                    </m:oMathParaPr>
+                    <m:oMath xmlns:m="http://schemas.openxmlformats.org/officeDocument/2006/math">
+                      <m:sSub>
+                        <m:sSubPr>
+                          <m:ctrlPr>
+                            <a:rPr lang="en-US" sz="2400" i="1">
+                              <a:ln>
+                                <a:solidFill>
+                                  <a:schemeClr val="tx1"/>
+                                </a:solidFill>
+                              </a:ln>
+                              <a:solidFill>
+                                <a:schemeClr val="tx1"/>
+                              </a:solidFill>
+                              <a:latin typeface="Cambria Math" panose="02040503050406030204" pitchFamily="18" charset="0"/>
+                            </a:rPr>
+                          </m:ctrlPr>
+                        </m:sSubPr>
+                        <m:e>
+                          <m:acc>
+                            <m:accPr>
+                              <m:chr m:val="̅"/>
+                              <m:ctrlPr>
+                                <a:rPr lang="en-US" sz="2400" i="1">
+                                  <a:ln>
+                                    <a:solidFill>
+                                      <a:schemeClr val="tx1"/>
+                                    </a:solidFill>
+                                  </a:ln>
+                                  <a:solidFill>
+                                    <a:schemeClr val="tx1"/>
+                                  </a:solidFill>
+                                  <a:latin typeface="Cambria Math" panose="02040503050406030204" pitchFamily="18" charset="0"/>
+                                </a:rPr>
+                              </m:ctrlPr>
+                            </m:accPr>
+                            <m:e>
+                              <m:r>
+                                <a:rPr lang="en-US" sz="2400" i="1">
+                                  <a:ln>
+                                    <a:solidFill>
+                                      <a:schemeClr val="tx1"/>
+                                    </a:solidFill>
+                                  </a:ln>
+                                  <a:solidFill>
+                                    <a:schemeClr val="tx1"/>
+                                  </a:solidFill>
+                                  <a:latin typeface="Cambria Math" panose="02040503050406030204" pitchFamily="18" charset="0"/>
+                                </a:rPr>
+                                <m:t>𝑠</m:t>
+                              </m:r>
+                            </m:e>
+                          </m:acc>
+                        </m:e>
+                        <m:sub>
+                          <m:r>
+                            <a:rPr lang="en-US" sz="2400" i="1">
+                              <a:ln>
+                                <a:solidFill>
+                                  <a:schemeClr val="tx1"/>
+                                </a:solidFill>
+                              </a:ln>
+                              <a:solidFill>
+                                <a:schemeClr val="tx1"/>
+                              </a:solidFill>
+                              <a:latin typeface="Cambria Math" panose="02040503050406030204" pitchFamily="18" charset="0"/>
+                            </a:rPr>
+                            <m:t>2</m:t>
+                          </m:r>
+                        </m:sub>
+                      </m:sSub>
+                    </m:oMath>
+                  </m:oMathPara>
+                </a14:m>
+                <a:endParaRPr lang="en-US" sz="2400" dirty="0">
+                  <a:ln>
+                    <a:solidFill>
+                      <a:schemeClr val="tx1"/>
+                    </a:solidFill>
+                  </a:ln>
+                  <a:solidFill>
+                    <a:schemeClr val="tx1"/>
+                  </a:solidFill>
+                </a:endParaRPr>
+              </a:p>
+            </p:txBody>
+          </p:sp>
+        </mc:Choice>
+        <mc:Fallback>
+          <p:sp>
+            <p:nvSpPr>
+              <p:cNvPr id="41" name="Oval 40">
+                <a:extLst>
+                  <a:ext uri="{FF2B5EF4-FFF2-40B4-BE49-F238E27FC236}">
+                    <a16:creationId xmlns:a16="http://schemas.microsoft.com/office/drawing/2014/main" id="{401A4F67-2B92-4677-8FF1-2A2BE82C59B8}"/>
+                  </a:ext>
+                </a:extLst>
+              </p:cNvPr>
+              <p:cNvSpPr>
+                <a:spLocks noRot="1" noChangeAspect="1" noMove="1" noResize="1" noEditPoints="1" noAdjustHandles="1" noChangeArrowheads="1" noChangeShapeType="1" noTextEdit="1"/>
+              </p:cNvSpPr>
+              <p:nvPr/>
+            </p:nvSpPr>
+            <p:spPr>
+              <a:xfrm>
+                <a:off x="817563" y="3668407"/>
+                <a:ext cx="587311" cy="545287"/>
+              </a:xfrm>
+              <a:prstGeom prst="ellipse">
+                <a:avLst/>
+              </a:prstGeom>
+              <a:blipFill>
+                <a:blip r:embed="rId11"/>
+                <a:stretch>
+                  <a:fillRect/>
+                </a:stretch>
+              </a:blipFill>
+              <a:ln w="28575">
+                <a:solidFill>
+                  <a:schemeClr val="tx1"/>
+                </a:solidFill>
+              </a:ln>
+            </p:spPr>
+            <p:txBody>
+              <a:bodyPr/>
+              <a:lstStyle/>
+              <a:p>
+                <a:r>
+                  <a:rPr lang="en-US">
+                    <a:noFill/>
+                  </a:rPr>
+                  <a:t> </a:t>
+                </a:r>
+              </a:p>
+            </p:txBody>
+          </p:sp>
+        </mc:Fallback>
+      </mc:AlternateContent>
+      <mc:AlternateContent xmlns:mc="http://schemas.openxmlformats.org/markup-compatibility/2006">
+        <mc:Choice xmlns:a14="http://schemas.microsoft.com/office/drawing/2010/main" Requires="a14">
+          <p:sp>
+            <p:nvSpPr>
+              <p:cNvPr id="42" name="Oval 41">
+                <a:extLst>
+                  <a:ext uri="{FF2B5EF4-FFF2-40B4-BE49-F238E27FC236}">
+                    <a16:creationId xmlns:a16="http://schemas.microsoft.com/office/drawing/2014/main" id="{0092727A-E0B9-42FF-BD4B-A9AD0A2A9119}"/>
+                  </a:ext>
+                </a:extLst>
+              </p:cNvPr>
+              <p:cNvSpPr/>
+              <p:nvPr/>
+            </p:nvSpPr>
+            <p:spPr>
+              <a:xfrm>
+                <a:off x="1985672" y="4669711"/>
+                <a:ext cx="587311" cy="545287"/>
+              </a:xfrm>
+              <a:prstGeom prst="ellipse">
+                <a:avLst/>
+              </a:prstGeom>
+              <a:solidFill>
+                <a:srgbClr val="0070C0">
+                  <a:alpha val="20000"/>
+                </a:srgbClr>
+              </a:solidFill>
+              <a:ln w="28575">
+                <a:solidFill>
+                  <a:schemeClr val="tx1"/>
+                </a:solidFill>
+              </a:ln>
+            </p:spPr>
+            <p:style>
+              <a:lnRef idx="2">
+                <a:schemeClr val="accent1">
+                  <a:shade val="50000"/>
+                </a:schemeClr>
+              </a:lnRef>
+              <a:fillRef idx="1">
+                <a:schemeClr val="accent1"/>
+              </a:fillRef>
+              <a:effectRef idx="0">
+                <a:schemeClr val="accent1"/>
+              </a:effectRef>
+              <a:fontRef idx="minor">
+                <a:schemeClr val="lt1"/>
+              </a:fontRef>
+            </p:style>
+            <p:txBody>
+              <a:bodyPr rot="0" spcFirstLastPara="0" vertOverflow="overflow" horzOverflow="overflow" vert="horz" wrap="square" lIns="137160" tIns="0" rIns="0" bIns="68580" numCol="1" spcCol="0" rtlCol="0" fromWordArt="0" anchor="ctr" anchorCtr="0" forceAA="0" compatLnSpc="1">
+                <a:prstTxWarp prst="textNoShape">
+                  <a:avLst/>
+                </a:prstTxWarp>
+                <a:noAutofit/>
+              </a:bodyPr>
+              <a:lstStyle/>
+              <a:p>
+                <a:pPr algn="ctr"/>
+                <a14:m>
+                  <m:oMathPara xmlns:m="http://schemas.openxmlformats.org/officeDocument/2006/math">
+                    <m:oMathParaPr>
+                      <m:jc m:val="centerGroup"/>
+                    </m:oMathParaPr>
+                    <m:oMath xmlns:m="http://schemas.openxmlformats.org/officeDocument/2006/math">
+                      <m:sSub>
+                        <m:sSubPr>
+                          <m:ctrlPr>
+                            <a:rPr lang="en-US" sz="2400" i="1">
+                              <a:ln>
+                                <a:solidFill>
+                                  <a:schemeClr val="tx1"/>
+                                </a:solidFill>
+                              </a:ln>
+                              <a:solidFill>
+                                <a:schemeClr val="tx1"/>
+                              </a:solidFill>
+                              <a:latin typeface="Cambria Math" panose="02040503050406030204" pitchFamily="18" charset="0"/>
+                            </a:rPr>
+                          </m:ctrlPr>
+                        </m:sSubPr>
+                        <m:e>
+                          <m:acc>
+                            <m:accPr>
+                              <m:chr m:val="̅"/>
+                              <m:ctrlPr>
+                                <a:rPr lang="en-US" sz="2400" i="1">
+                                  <a:ln>
+                                    <a:solidFill>
+                                      <a:schemeClr val="tx1"/>
+                                    </a:solidFill>
+                                  </a:ln>
+                                  <a:solidFill>
+                                    <a:schemeClr val="tx1"/>
+                                  </a:solidFill>
+                                  <a:latin typeface="Cambria Math" panose="02040503050406030204" pitchFamily="18" charset="0"/>
+                                </a:rPr>
+                              </m:ctrlPr>
+                            </m:accPr>
+                            <m:e>
+                              <m:r>
+                                <a:rPr lang="en-US" sz="2400" i="1">
+                                  <a:ln>
+                                    <a:solidFill>
+                                      <a:schemeClr val="tx1"/>
+                                    </a:solidFill>
+                                  </a:ln>
+                                  <a:solidFill>
+                                    <a:schemeClr val="tx1"/>
+                                  </a:solidFill>
+                                  <a:latin typeface="Cambria Math" panose="02040503050406030204" pitchFamily="18" charset="0"/>
+                                </a:rPr>
+                                <m:t>𝑠</m:t>
+                              </m:r>
+                            </m:e>
+                          </m:acc>
+                        </m:e>
+                        <m:sub>
+                          <m:r>
+                            <a:rPr lang="en-US" sz="2400" i="1">
+                              <a:ln>
+                                <a:solidFill>
+                                  <a:schemeClr val="tx1"/>
+                                </a:solidFill>
+                              </a:ln>
+                              <a:solidFill>
+                                <a:schemeClr val="tx1"/>
+                              </a:solidFill>
+                              <a:latin typeface="Cambria Math" panose="02040503050406030204" pitchFamily="18" charset="0"/>
+                            </a:rPr>
+                            <m:t>4</m:t>
+                          </m:r>
+                        </m:sub>
+                      </m:sSub>
+                    </m:oMath>
+                  </m:oMathPara>
+                </a14:m>
+                <a:endParaRPr lang="en-US" sz="2400" dirty="0">
+                  <a:ln>
+                    <a:solidFill>
+                      <a:schemeClr val="tx1"/>
+                    </a:solidFill>
+                  </a:ln>
+                  <a:solidFill>
+                    <a:schemeClr val="tx1"/>
+                  </a:solidFill>
+                </a:endParaRPr>
+              </a:p>
+            </p:txBody>
+          </p:sp>
+        </mc:Choice>
+        <mc:Fallback>
+          <p:sp>
+            <p:nvSpPr>
+              <p:cNvPr id="42" name="Oval 41">
+                <a:extLst>
+                  <a:ext uri="{FF2B5EF4-FFF2-40B4-BE49-F238E27FC236}">
+                    <a16:creationId xmlns:a16="http://schemas.microsoft.com/office/drawing/2014/main" id="{0092727A-E0B9-42FF-BD4B-A9AD0A2A9119}"/>
+                  </a:ext>
+                </a:extLst>
+              </p:cNvPr>
+              <p:cNvSpPr>
+                <a:spLocks noRot="1" noChangeAspect="1" noMove="1" noResize="1" noEditPoints="1" noAdjustHandles="1" noChangeArrowheads="1" noChangeShapeType="1" noTextEdit="1"/>
+              </p:cNvSpPr>
+              <p:nvPr/>
+            </p:nvSpPr>
+            <p:spPr>
+              <a:xfrm>
+                <a:off x="1985672" y="4669711"/>
+                <a:ext cx="587311" cy="545287"/>
+              </a:xfrm>
+              <a:prstGeom prst="ellipse">
+                <a:avLst/>
+              </a:prstGeom>
+              <a:blipFill>
+                <a:blip r:embed="rId12"/>
+                <a:stretch>
+                  <a:fillRect/>
+                </a:stretch>
+              </a:blipFill>
+              <a:ln w="28575">
+                <a:solidFill>
+                  <a:schemeClr val="tx1"/>
+                </a:solidFill>
+              </a:ln>
+            </p:spPr>
+            <p:txBody>
+              <a:bodyPr/>
+              <a:lstStyle/>
+              <a:p>
+                <a:r>
+                  <a:rPr lang="en-US">
+                    <a:noFill/>
+                  </a:rPr>
+                  <a:t> </a:t>
+                </a:r>
+              </a:p>
+            </p:txBody>
+          </p:sp>
+        </mc:Fallback>
+      </mc:AlternateContent>
+      <mc:AlternateContent xmlns:mc="http://schemas.openxmlformats.org/markup-compatibility/2006">
+        <mc:Choice xmlns:a14="http://schemas.microsoft.com/office/drawing/2010/main" Requires="a14">
+          <p:sp>
+            <p:nvSpPr>
+              <p:cNvPr id="43" name="Oval 42">
+                <a:extLst>
+                  <a:ext uri="{FF2B5EF4-FFF2-40B4-BE49-F238E27FC236}">
+                    <a16:creationId xmlns:a16="http://schemas.microsoft.com/office/drawing/2014/main" id="{11D51777-32A5-4BA3-B56B-1A504EE27A0B}"/>
+                  </a:ext>
+                </a:extLst>
+              </p:cNvPr>
+              <p:cNvSpPr/>
+              <p:nvPr/>
+            </p:nvSpPr>
+            <p:spPr>
+              <a:xfrm>
+                <a:off x="817564" y="4669712"/>
+                <a:ext cx="587311" cy="545287"/>
+              </a:xfrm>
+              <a:prstGeom prst="ellipse">
+                <a:avLst/>
+              </a:prstGeom>
+              <a:solidFill>
+                <a:srgbClr val="0070C0">
+                  <a:alpha val="20000"/>
+                </a:srgbClr>
+              </a:solidFill>
+              <a:ln w="28575">
+                <a:solidFill>
+                  <a:schemeClr val="tx1"/>
+                </a:solidFill>
+              </a:ln>
+            </p:spPr>
+            <p:style>
+              <a:lnRef idx="2">
+                <a:schemeClr val="accent1">
+                  <a:shade val="50000"/>
+                </a:schemeClr>
+              </a:lnRef>
+              <a:fillRef idx="1">
+                <a:schemeClr val="accent1"/>
+              </a:fillRef>
+              <a:effectRef idx="0">
+                <a:schemeClr val="accent1"/>
+              </a:effectRef>
+              <a:fontRef idx="minor">
+                <a:schemeClr val="lt1"/>
+              </a:fontRef>
+            </p:style>
+            <p:txBody>
+              <a:bodyPr rot="0" spcFirstLastPara="0" vertOverflow="overflow" horzOverflow="overflow" vert="horz" wrap="square" lIns="137160" tIns="0" rIns="0" bIns="68580" numCol="1" spcCol="0" rtlCol="0" fromWordArt="0" anchor="ctr" anchorCtr="0" forceAA="0" compatLnSpc="1">
+                <a:prstTxWarp prst="textNoShape">
+                  <a:avLst/>
+                </a:prstTxWarp>
+                <a:noAutofit/>
+              </a:bodyPr>
+              <a:lstStyle/>
+              <a:p>
+                <a:pPr algn="ctr"/>
+                <a14:m>
+                  <m:oMathPara xmlns:m="http://schemas.openxmlformats.org/officeDocument/2006/math">
+                    <m:oMathParaPr>
+                      <m:jc m:val="centerGroup"/>
+                    </m:oMathParaPr>
+                    <m:oMath xmlns:m="http://schemas.openxmlformats.org/officeDocument/2006/math">
+                      <m:sSub>
+                        <m:sSubPr>
+                          <m:ctrlPr>
+                            <a:rPr lang="en-US" sz="2400" i="1">
+                              <a:ln>
+                                <a:solidFill>
+                                  <a:schemeClr val="tx1"/>
+                                </a:solidFill>
+                              </a:ln>
+                              <a:solidFill>
+                                <a:schemeClr val="tx1"/>
+                              </a:solidFill>
+                              <a:latin typeface="Cambria Math" panose="02040503050406030204" pitchFamily="18" charset="0"/>
+                            </a:rPr>
+                          </m:ctrlPr>
+                        </m:sSubPr>
+                        <m:e>
+                          <m:acc>
+                            <m:accPr>
+                              <m:chr m:val="̅"/>
+                              <m:ctrlPr>
+                                <a:rPr lang="en-US" sz="2400" i="1">
+                                  <a:ln>
+                                    <a:solidFill>
+                                      <a:schemeClr val="tx1"/>
+                                    </a:solidFill>
+                                  </a:ln>
+                                  <a:solidFill>
+                                    <a:schemeClr val="tx1"/>
+                                  </a:solidFill>
+                                  <a:latin typeface="Cambria Math" panose="02040503050406030204" pitchFamily="18" charset="0"/>
+                                </a:rPr>
+                              </m:ctrlPr>
+                            </m:accPr>
+                            <m:e>
+                              <m:r>
+                                <a:rPr lang="en-US" sz="2400" i="1">
+                                  <a:ln>
+                                    <a:solidFill>
+                                      <a:schemeClr val="tx1"/>
+                                    </a:solidFill>
+                                  </a:ln>
+                                  <a:solidFill>
+                                    <a:schemeClr val="tx1"/>
+                                  </a:solidFill>
+                                  <a:latin typeface="Cambria Math" panose="02040503050406030204" pitchFamily="18" charset="0"/>
+                                </a:rPr>
+                                <m:t>𝑠</m:t>
+                              </m:r>
+                            </m:e>
+                          </m:acc>
+                        </m:e>
+                        <m:sub>
+                          <m:r>
+                            <a:rPr lang="en-US" sz="2400" i="1">
+                              <a:ln>
+                                <a:solidFill>
+                                  <a:schemeClr val="tx1"/>
+                                </a:solidFill>
+                              </a:ln>
+                              <a:solidFill>
+                                <a:schemeClr val="tx1"/>
+                              </a:solidFill>
+                              <a:latin typeface="Cambria Math" panose="02040503050406030204" pitchFamily="18" charset="0"/>
+                            </a:rPr>
+                            <m:t>3</m:t>
+                          </m:r>
+                        </m:sub>
+                      </m:sSub>
+                    </m:oMath>
+                  </m:oMathPara>
+                </a14:m>
+                <a:endParaRPr lang="en-US" sz="2400" dirty="0">
+                  <a:ln>
+                    <a:solidFill>
+                      <a:schemeClr val="tx1"/>
+                    </a:solidFill>
+                  </a:ln>
+                  <a:solidFill>
+                    <a:schemeClr val="tx1"/>
+                  </a:solidFill>
+                </a:endParaRPr>
+              </a:p>
+            </p:txBody>
+          </p:sp>
+        </mc:Choice>
+        <mc:Fallback>
+          <p:sp>
+            <p:nvSpPr>
+              <p:cNvPr id="43" name="Oval 42">
+                <a:extLst>
+                  <a:ext uri="{FF2B5EF4-FFF2-40B4-BE49-F238E27FC236}">
+                    <a16:creationId xmlns:a16="http://schemas.microsoft.com/office/drawing/2014/main" id="{11D51777-32A5-4BA3-B56B-1A504EE27A0B}"/>
+                  </a:ext>
+                </a:extLst>
+              </p:cNvPr>
+              <p:cNvSpPr>
+                <a:spLocks noRot="1" noChangeAspect="1" noMove="1" noResize="1" noEditPoints="1" noAdjustHandles="1" noChangeArrowheads="1" noChangeShapeType="1" noTextEdit="1"/>
+              </p:cNvSpPr>
+              <p:nvPr/>
+            </p:nvSpPr>
+            <p:spPr>
+              <a:xfrm>
+                <a:off x="817564" y="4669712"/>
+                <a:ext cx="587311" cy="545287"/>
+              </a:xfrm>
+              <a:prstGeom prst="ellipse">
+                <a:avLst/>
+              </a:prstGeom>
+              <a:blipFill>
+                <a:blip r:embed="rId13"/>
+                <a:stretch>
+                  <a:fillRect/>
+                </a:stretch>
+              </a:blipFill>
+              <a:ln w="28575">
+                <a:solidFill>
+                  <a:schemeClr val="tx1"/>
+                </a:solidFill>
+              </a:ln>
+            </p:spPr>
+            <p:txBody>
+              <a:bodyPr/>
+              <a:lstStyle/>
+              <a:p>
+                <a:r>
+                  <a:rPr lang="en-US">
+                    <a:noFill/>
+                  </a:rPr>
+                  <a:t> </a:t>
+                </a:r>
+              </a:p>
+            </p:txBody>
+          </p:sp>
+        </mc:Fallback>
+      </mc:AlternateContent>
+      <mc:AlternateContent xmlns:mc="http://schemas.openxmlformats.org/markup-compatibility/2006">
+        <mc:Choice xmlns:a14="http://schemas.microsoft.com/office/drawing/2010/main" Requires="a14">
+          <p:sp>
+            <p:nvSpPr>
+              <p:cNvPr id="44" name="Oval 43">
+                <a:extLst>
+                  <a:ext uri="{FF2B5EF4-FFF2-40B4-BE49-F238E27FC236}">
+                    <a16:creationId xmlns:a16="http://schemas.microsoft.com/office/drawing/2014/main" id="{E0F786E4-7CCF-460A-BE0E-C5A84777C130}"/>
+                  </a:ext>
+                </a:extLst>
+              </p:cNvPr>
+              <p:cNvSpPr/>
+              <p:nvPr/>
+            </p:nvSpPr>
+            <p:spPr>
+              <a:xfrm>
+                <a:off x="1982662" y="5668112"/>
+                <a:ext cx="587311" cy="545287"/>
+              </a:xfrm>
+              <a:prstGeom prst="ellipse">
+                <a:avLst/>
+              </a:prstGeom>
+              <a:solidFill>
+                <a:srgbClr val="0070C0">
+                  <a:alpha val="20000"/>
+                </a:srgbClr>
+              </a:solidFill>
+              <a:ln w="28575">
+                <a:solidFill>
+                  <a:schemeClr val="tx1"/>
+                </a:solidFill>
+              </a:ln>
+            </p:spPr>
+            <p:style>
+              <a:lnRef idx="2">
+                <a:schemeClr val="accent1">
+                  <a:shade val="50000"/>
+                </a:schemeClr>
+              </a:lnRef>
+              <a:fillRef idx="1">
+                <a:schemeClr val="accent1"/>
+              </a:fillRef>
+              <a:effectRef idx="0">
+                <a:schemeClr val="accent1"/>
+              </a:effectRef>
+              <a:fontRef idx="minor">
+                <a:schemeClr val="lt1"/>
+              </a:fontRef>
+            </p:style>
+            <p:txBody>
+              <a:bodyPr rot="0" spcFirstLastPara="0" vertOverflow="overflow" horzOverflow="overflow" vert="horz" wrap="square" lIns="137160" tIns="0" rIns="0" bIns="68580" numCol="1" spcCol="0" rtlCol="0" fromWordArt="0" anchor="ctr" anchorCtr="0" forceAA="0" compatLnSpc="1">
+                <a:prstTxWarp prst="textNoShape">
+                  <a:avLst/>
+                </a:prstTxWarp>
+                <a:noAutofit/>
+              </a:bodyPr>
+              <a:lstStyle/>
+              <a:p>
+                <a:pPr algn="ctr"/>
+                <a14:m>
+                  <m:oMathPara xmlns:m="http://schemas.openxmlformats.org/officeDocument/2006/math">
+                    <m:oMathParaPr>
+                      <m:jc m:val="centerGroup"/>
+                    </m:oMathParaPr>
+                    <m:oMath xmlns:m="http://schemas.openxmlformats.org/officeDocument/2006/math">
+                      <m:sSub>
+                        <m:sSubPr>
+                          <m:ctrlPr>
+                            <a:rPr lang="en-US" sz="2400" i="1">
+                              <a:ln>
+                                <a:solidFill>
+                                  <a:schemeClr val="tx1"/>
+                                </a:solidFill>
+                              </a:ln>
+                              <a:solidFill>
+                                <a:schemeClr val="tx1"/>
+                              </a:solidFill>
+                              <a:latin typeface="Cambria Math" panose="02040503050406030204" pitchFamily="18" charset="0"/>
+                            </a:rPr>
+                          </m:ctrlPr>
+                        </m:sSubPr>
+                        <m:e>
+                          <m:acc>
+                            <m:accPr>
+                              <m:chr m:val="̅"/>
+                              <m:ctrlPr>
+                                <a:rPr lang="en-US" sz="2400" i="1">
+                                  <a:ln>
+                                    <a:solidFill>
+                                      <a:schemeClr val="tx1"/>
+                                    </a:solidFill>
+                                  </a:ln>
+                                  <a:solidFill>
+                                    <a:schemeClr val="tx1"/>
+                                  </a:solidFill>
+                                  <a:latin typeface="Cambria Math" panose="02040503050406030204" pitchFamily="18" charset="0"/>
+                                </a:rPr>
+                              </m:ctrlPr>
+                            </m:accPr>
+                            <m:e>
+                              <m:r>
+                                <a:rPr lang="en-US" sz="2400" i="1">
+                                  <a:ln>
+                                    <a:solidFill>
+                                      <a:schemeClr val="tx1"/>
+                                    </a:solidFill>
+                                  </a:ln>
+                                  <a:solidFill>
+                                    <a:schemeClr val="tx1"/>
+                                  </a:solidFill>
+                                  <a:latin typeface="Cambria Math" panose="02040503050406030204" pitchFamily="18" charset="0"/>
+                                </a:rPr>
+                                <m:t>𝑠</m:t>
+                              </m:r>
+                            </m:e>
+                          </m:acc>
+                        </m:e>
+                        <m:sub>
+                          <m:r>
+                            <a:rPr lang="en-US" sz="2400" i="1">
+                              <a:ln>
+                                <a:solidFill>
+                                  <a:schemeClr val="tx1"/>
+                                </a:solidFill>
+                              </a:ln>
+                              <a:solidFill>
+                                <a:schemeClr val="tx1"/>
+                              </a:solidFill>
+                              <a:latin typeface="Cambria Math" panose="02040503050406030204" pitchFamily="18" charset="0"/>
+                            </a:rPr>
+                            <m:t>5</m:t>
+                          </m:r>
+                        </m:sub>
+                      </m:sSub>
+                    </m:oMath>
+                  </m:oMathPara>
+                </a14:m>
+                <a:endParaRPr lang="en-US" sz="2400" dirty="0">
+                  <a:ln>
+                    <a:solidFill>
+                      <a:schemeClr val="tx1"/>
+                    </a:solidFill>
+                  </a:ln>
+                  <a:solidFill>
+                    <a:schemeClr val="tx1"/>
+                  </a:solidFill>
+                </a:endParaRPr>
+              </a:p>
+            </p:txBody>
+          </p:sp>
+        </mc:Choice>
+        <mc:Fallback>
+          <p:sp>
+            <p:nvSpPr>
+              <p:cNvPr id="44" name="Oval 43">
+                <a:extLst>
+                  <a:ext uri="{FF2B5EF4-FFF2-40B4-BE49-F238E27FC236}">
+                    <a16:creationId xmlns:a16="http://schemas.microsoft.com/office/drawing/2014/main" id="{E0F786E4-7CCF-460A-BE0E-C5A84777C130}"/>
+                  </a:ext>
+                </a:extLst>
+              </p:cNvPr>
+              <p:cNvSpPr>
+                <a:spLocks noRot="1" noChangeAspect="1" noMove="1" noResize="1" noEditPoints="1" noAdjustHandles="1" noChangeArrowheads="1" noChangeShapeType="1" noTextEdit="1"/>
+              </p:cNvSpPr>
+              <p:nvPr/>
+            </p:nvSpPr>
+            <p:spPr>
+              <a:xfrm>
+                <a:off x="1982662" y="5668112"/>
+                <a:ext cx="587311" cy="545287"/>
+              </a:xfrm>
+              <a:prstGeom prst="ellipse">
+                <a:avLst/>
+              </a:prstGeom>
+              <a:blipFill>
+                <a:blip r:embed="rId14"/>
+                <a:stretch>
+                  <a:fillRect/>
+                </a:stretch>
+              </a:blipFill>
+              <a:ln w="28575">
+                <a:solidFill>
+                  <a:schemeClr val="tx1"/>
+                </a:solidFill>
+              </a:ln>
+            </p:spPr>
+            <p:txBody>
+              <a:bodyPr/>
+              <a:lstStyle/>
+              <a:p>
+                <a:r>
+                  <a:rPr lang="en-US">
+                    <a:noFill/>
+                  </a:rPr>
+                  <a:t> </a:t>
+                </a:r>
+              </a:p>
+            </p:txBody>
+          </p:sp>
+        </mc:Fallback>
+      </mc:AlternateContent>
+      <mc:AlternateContent xmlns:mc="http://schemas.openxmlformats.org/markup-compatibility/2006">
+        <mc:Choice xmlns:a14="http://schemas.microsoft.com/office/drawing/2010/main" Requires="a14">
+          <p:sp>
+            <p:nvSpPr>
+              <p:cNvPr id="45" name="Oval 44">
+                <a:extLst>
+                  <a:ext uri="{FF2B5EF4-FFF2-40B4-BE49-F238E27FC236}">
+                    <a16:creationId xmlns:a16="http://schemas.microsoft.com/office/drawing/2014/main" id="{5CD32FF5-3FBA-41B1-A103-D49A6FB95E9F}"/>
+                  </a:ext>
+                </a:extLst>
+              </p:cNvPr>
+              <p:cNvSpPr/>
+              <p:nvPr/>
+            </p:nvSpPr>
+            <p:spPr>
+              <a:xfrm>
+                <a:off x="1982662" y="6666513"/>
+                <a:ext cx="587311" cy="545287"/>
+              </a:xfrm>
+              <a:prstGeom prst="ellipse">
+                <a:avLst/>
+              </a:prstGeom>
+              <a:solidFill>
+                <a:srgbClr val="0070C0">
+                  <a:alpha val="20000"/>
+                </a:srgbClr>
+              </a:solidFill>
+              <a:ln w="28575">
+                <a:solidFill>
+                  <a:schemeClr val="tx1"/>
+                </a:solidFill>
+              </a:ln>
+            </p:spPr>
+            <p:style>
+              <a:lnRef idx="2">
+                <a:schemeClr val="accent1">
+                  <a:shade val="50000"/>
+                </a:schemeClr>
+              </a:lnRef>
+              <a:fillRef idx="1">
+                <a:schemeClr val="accent1"/>
+              </a:fillRef>
+              <a:effectRef idx="0">
+                <a:schemeClr val="accent1"/>
+              </a:effectRef>
+              <a:fontRef idx="minor">
+                <a:schemeClr val="lt1"/>
+              </a:fontRef>
+            </p:style>
+            <p:txBody>
+              <a:bodyPr rot="0" spcFirstLastPara="0" vertOverflow="overflow" horzOverflow="overflow" vert="horz" wrap="square" lIns="137160" tIns="0" rIns="0" bIns="68580" numCol="1" spcCol="0" rtlCol="0" fromWordArt="0" anchor="ctr" anchorCtr="0" forceAA="0" compatLnSpc="1">
+                <a:prstTxWarp prst="textNoShape">
+                  <a:avLst/>
+                </a:prstTxWarp>
+                <a:noAutofit/>
+              </a:bodyPr>
+              <a:lstStyle/>
+              <a:p>
+                <a:pPr algn="ctr"/>
+                <a14:m>
+                  <m:oMathPara xmlns:m="http://schemas.openxmlformats.org/officeDocument/2006/math">
+                    <m:oMathParaPr>
+                      <m:jc m:val="centerGroup"/>
+                    </m:oMathParaPr>
+                    <m:oMath xmlns:m="http://schemas.openxmlformats.org/officeDocument/2006/math">
+                      <m:sSub>
+                        <m:sSubPr>
+                          <m:ctrlPr>
+                            <a:rPr lang="en-US" sz="2400" i="1">
+                              <a:ln>
+                                <a:solidFill>
+                                  <a:schemeClr val="tx1"/>
+                                </a:solidFill>
+                              </a:ln>
+                              <a:solidFill>
+                                <a:schemeClr val="tx1"/>
+                              </a:solidFill>
+                              <a:latin typeface="Cambria Math" panose="02040503050406030204" pitchFamily="18" charset="0"/>
+                            </a:rPr>
+                          </m:ctrlPr>
+                        </m:sSubPr>
+                        <m:e>
+                          <m:acc>
+                            <m:accPr>
+                              <m:chr m:val="̅"/>
+                              <m:ctrlPr>
+                                <a:rPr lang="en-US" sz="2400" i="1">
+                                  <a:ln>
+                                    <a:solidFill>
+                                      <a:schemeClr val="tx1"/>
+                                    </a:solidFill>
+                                  </a:ln>
+                                  <a:solidFill>
+                                    <a:schemeClr val="tx1"/>
+                                  </a:solidFill>
+                                  <a:latin typeface="Cambria Math" panose="02040503050406030204" pitchFamily="18" charset="0"/>
+                                </a:rPr>
+                              </m:ctrlPr>
+                            </m:accPr>
+                            <m:e>
+                              <m:r>
+                                <a:rPr lang="en-US" sz="2400" i="1">
+                                  <a:ln>
+                                    <a:solidFill>
+                                      <a:schemeClr val="tx1"/>
+                                    </a:solidFill>
+                                  </a:ln>
+                                  <a:solidFill>
+                                    <a:schemeClr val="tx1"/>
+                                  </a:solidFill>
+                                  <a:latin typeface="Cambria Math" panose="02040503050406030204" pitchFamily="18" charset="0"/>
+                                </a:rPr>
+                                <m:t>𝑠</m:t>
+                              </m:r>
+                            </m:e>
+                          </m:acc>
+                        </m:e>
+                        <m:sub>
+                          <m:r>
+                            <a:rPr lang="en-US" sz="2400" i="1">
+                              <a:ln>
+                                <a:solidFill>
+                                  <a:schemeClr val="tx1"/>
+                                </a:solidFill>
+                              </a:ln>
+                              <a:solidFill>
+                                <a:schemeClr val="tx1"/>
+                              </a:solidFill>
+                              <a:latin typeface="Cambria Math" panose="02040503050406030204" pitchFamily="18" charset="0"/>
+                            </a:rPr>
+                            <m:t>6</m:t>
+                          </m:r>
+                        </m:sub>
+                      </m:sSub>
+                    </m:oMath>
+                  </m:oMathPara>
+                </a14:m>
+                <a:endParaRPr lang="en-US" sz="2400" dirty="0">
+                  <a:ln>
+                    <a:solidFill>
+                      <a:schemeClr val="tx1"/>
+                    </a:solidFill>
+                  </a:ln>
+                  <a:solidFill>
+                    <a:schemeClr val="tx1"/>
+                  </a:solidFill>
+                </a:endParaRPr>
+              </a:p>
+            </p:txBody>
+          </p:sp>
+        </mc:Choice>
+        <mc:Fallback>
+          <p:sp>
+            <p:nvSpPr>
+              <p:cNvPr id="45" name="Oval 44">
+                <a:extLst>
+                  <a:ext uri="{FF2B5EF4-FFF2-40B4-BE49-F238E27FC236}">
+                    <a16:creationId xmlns:a16="http://schemas.microsoft.com/office/drawing/2014/main" id="{5CD32FF5-3FBA-41B1-A103-D49A6FB95E9F}"/>
+                  </a:ext>
+                </a:extLst>
+              </p:cNvPr>
+              <p:cNvSpPr>
+                <a:spLocks noRot="1" noChangeAspect="1" noMove="1" noResize="1" noEditPoints="1" noAdjustHandles="1" noChangeArrowheads="1" noChangeShapeType="1" noTextEdit="1"/>
+              </p:cNvSpPr>
+              <p:nvPr/>
+            </p:nvSpPr>
+            <p:spPr>
+              <a:xfrm>
+                <a:off x="1982662" y="6666513"/>
+                <a:ext cx="587311" cy="545287"/>
+              </a:xfrm>
+              <a:prstGeom prst="ellipse">
+                <a:avLst/>
+              </a:prstGeom>
+              <a:blipFill>
+                <a:blip r:embed="rId15"/>
+                <a:stretch>
+                  <a:fillRect/>
+                </a:stretch>
+              </a:blipFill>
+              <a:ln w="28575">
+                <a:solidFill>
+                  <a:schemeClr val="tx1"/>
+                </a:solidFill>
+              </a:ln>
+            </p:spPr>
+            <p:txBody>
+              <a:bodyPr/>
+              <a:lstStyle/>
+              <a:p>
+                <a:r>
+                  <a:rPr lang="en-US">
+                    <a:noFill/>
+                  </a:rPr>
+                  <a:t> </a:t>
+                </a:r>
+              </a:p>
+            </p:txBody>
+          </p:sp>
+        </mc:Fallback>
+      </mc:AlternateContent>
+      <mc:AlternateContent xmlns:mc="http://schemas.openxmlformats.org/markup-compatibility/2006">
+        <mc:Choice xmlns:a14="http://schemas.microsoft.com/office/drawing/2010/main" Requires="a14">
+          <p:sp>
+            <p:nvSpPr>
+              <p:cNvPr id="46" name="Oval 45">
+                <a:extLst>
+                  <a:ext uri="{FF2B5EF4-FFF2-40B4-BE49-F238E27FC236}">
+                    <a16:creationId xmlns:a16="http://schemas.microsoft.com/office/drawing/2014/main" id="{5A9F88F2-A920-41E7-8A7A-66C01E8BCAB7}"/>
+                  </a:ext>
+                </a:extLst>
+              </p:cNvPr>
+              <p:cNvSpPr/>
+              <p:nvPr/>
+            </p:nvSpPr>
+            <p:spPr>
+              <a:xfrm>
+                <a:off x="1982662" y="7664912"/>
+                <a:ext cx="587311" cy="545287"/>
+              </a:xfrm>
+              <a:prstGeom prst="ellipse">
+                <a:avLst/>
+              </a:prstGeom>
+              <a:solidFill>
+                <a:srgbClr val="0070C0">
+                  <a:alpha val="20000"/>
+                </a:srgbClr>
+              </a:solidFill>
+              <a:ln w="28575">
+                <a:solidFill>
+                  <a:schemeClr val="tx1"/>
+                </a:solidFill>
+              </a:ln>
+            </p:spPr>
+            <p:style>
+              <a:lnRef idx="2">
+                <a:schemeClr val="accent1">
+                  <a:shade val="50000"/>
+                </a:schemeClr>
+              </a:lnRef>
+              <a:fillRef idx="1">
+                <a:schemeClr val="accent1"/>
+              </a:fillRef>
+              <a:effectRef idx="0">
+                <a:schemeClr val="accent1"/>
+              </a:effectRef>
+              <a:fontRef idx="minor">
+                <a:schemeClr val="lt1"/>
+              </a:fontRef>
+            </p:style>
+            <p:txBody>
+              <a:bodyPr rot="0" spcFirstLastPara="0" vertOverflow="overflow" horzOverflow="overflow" vert="horz" wrap="square" lIns="137160" tIns="0" rIns="0" bIns="68580" numCol="1" spcCol="0" rtlCol="0" fromWordArt="0" anchor="ctr" anchorCtr="0" forceAA="0" compatLnSpc="1">
+                <a:prstTxWarp prst="textNoShape">
+                  <a:avLst/>
+                </a:prstTxWarp>
+                <a:noAutofit/>
+              </a:bodyPr>
+              <a:lstStyle/>
+              <a:p>
+                <a:pPr algn="ctr"/>
+                <a14:m>
+                  <m:oMathPara xmlns:m="http://schemas.openxmlformats.org/officeDocument/2006/math">
+                    <m:oMathParaPr>
+                      <m:jc m:val="centerGroup"/>
+                    </m:oMathParaPr>
+                    <m:oMath xmlns:m="http://schemas.openxmlformats.org/officeDocument/2006/math">
+                      <m:sSub>
+                        <m:sSubPr>
+                          <m:ctrlPr>
+                            <a:rPr lang="en-US" sz="2400" i="1">
+                              <a:ln>
+                                <a:solidFill>
+                                  <a:schemeClr val="tx1"/>
+                                </a:solidFill>
+                              </a:ln>
+                              <a:solidFill>
+                                <a:schemeClr val="tx1"/>
+                              </a:solidFill>
+                              <a:latin typeface="Cambria Math" panose="02040503050406030204" pitchFamily="18" charset="0"/>
+                            </a:rPr>
+                          </m:ctrlPr>
+                        </m:sSubPr>
+                        <m:e>
+                          <m:acc>
+                            <m:accPr>
+                              <m:chr m:val="̅"/>
+                              <m:ctrlPr>
+                                <a:rPr lang="en-US" sz="2400" i="1">
+                                  <a:ln>
+                                    <a:solidFill>
+                                      <a:schemeClr val="tx1"/>
+                                    </a:solidFill>
+                                  </a:ln>
+                                  <a:solidFill>
+                                    <a:schemeClr val="tx1"/>
+                                  </a:solidFill>
+                                  <a:latin typeface="Cambria Math" panose="02040503050406030204" pitchFamily="18" charset="0"/>
+                                </a:rPr>
+                              </m:ctrlPr>
+                            </m:accPr>
+                            <m:e>
+                              <m:r>
+                                <a:rPr lang="en-US" sz="2400" i="1">
+                                  <a:ln>
+                                    <a:solidFill>
+                                      <a:schemeClr val="tx1"/>
+                                    </a:solidFill>
+                                  </a:ln>
+                                  <a:solidFill>
+                                    <a:schemeClr val="tx1"/>
+                                  </a:solidFill>
+                                  <a:latin typeface="Cambria Math" panose="02040503050406030204" pitchFamily="18" charset="0"/>
+                                </a:rPr>
+                                <m:t>𝑠</m:t>
+                              </m:r>
+                            </m:e>
+                          </m:acc>
+                        </m:e>
+                        <m:sub>
+                          <m:r>
+                            <a:rPr lang="en-US" sz="2400" i="1">
+                              <a:ln>
+                                <a:solidFill>
+                                  <a:schemeClr val="tx1"/>
+                                </a:solidFill>
+                              </a:ln>
+                              <a:solidFill>
+                                <a:schemeClr val="tx1"/>
+                              </a:solidFill>
+                              <a:latin typeface="Cambria Math" panose="02040503050406030204" pitchFamily="18" charset="0"/>
+                            </a:rPr>
+                            <m:t>7</m:t>
+                          </m:r>
+                        </m:sub>
+                      </m:sSub>
+                    </m:oMath>
+                  </m:oMathPara>
+                </a14:m>
+                <a:endParaRPr lang="en-US" sz="2400" dirty="0">
+                  <a:ln>
+                    <a:solidFill>
+                      <a:schemeClr val="tx1"/>
+                    </a:solidFill>
+                  </a:ln>
+                  <a:solidFill>
+                    <a:schemeClr val="tx1"/>
+                  </a:solidFill>
+                </a:endParaRPr>
+              </a:p>
+            </p:txBody>
+          </p:sp>
+        </mc:Choice>
+        <mc:Fallback>
+          <p:sp>
+            <p:nvSpPr>
+              <p:cNvPr id="46" name="Oval 45">
+                <a:extLst>
+                  <a:ext uri="{FF2B5EF4-FFF2-40B4-BE49-F238E27FC236}">
+                    <a16:creationId xmlns:a16="http://schemas.microsoft.com/office/drawing/2014/main" id="{5A9F88F2-A920-41E7-8A7A-66C01E8BCAB7}"/>
+                  </a:ext>
+                </a:extLst>
+              </p:cNvPr>
+              <p:cNvSpPr>
+                <a:spLocks noRot="1" noChangeAspect="1" noMove="1" noResize="1" noEditPoints="1" noAdjustHandles="1" noChangeArrowheads="1" noChangeShapeType="1" noTextEdit="1"/>
+              </p:cNvSpPr>
+              <p:nvPr/>
+            </p:nvSpPr>
+            <p:spPr>
+              <a:xfrm>
+                <a:off x="1982662" y="7664912"/>
+                <a:ext cx="587311" cy="545287"/>
+              </a:xfrm>
+              <a:prstGeom prst="ellipse">
+                <a:avLst/>
+              </a:prstGeom>
+              <a:blipFill>
+                <a:blip r:embed="rId16"/>
+                <a:stretch>
+                  <a:fillRect/>
+                </a:stretch>
+              </a:blipFill>
+              <a:ln w="28575">
+                <a:solidFill>
+                  <a:schemeClr val="tx1"/>
+                </a:solidFill>
+              </a:ln>
+            </p:spPr>
+            <p:txBody>
+              <a:bodyPr/>
+              <a:lstStyle/>
+              <a:p>
+                <a:r>
+                  <a:rPr lang="en-US">
+                    <a:noFill/>
+                  </a:rPr>
+                  <a:t> </a:t>
+                </a:r>
+              </a:p>
+            </p:txBody>
+          </p:sp>
+        </mc:Fallback>
+      </mc:AlternateContent>
+      <p:cxnSp>
+        <p:nvCxnSpPr>
+          <p:cNvPr id="47" name="Straight Arrow Connector 46">
+            <a:extLst>
+              <a:ext uri="{FF2B5EF4-FFF2-40B4-BE49-F238E27FC236}">
+                <a16:creationId xmlns:a16="http://schemas.microsoft.com/office/drawing/2014/main" id="{62F4CBA8-B200-4654-877D-CAED51D7C70D}"/>
+              </a:ext>
+            </a:extLst>
+          </p:cNvPr>
+          <p:cNvCxnSpPr>
+            <a:cxnSpLocks/>
+            <a:stCxn id="21" idx="4"/>
+            <a:endCxn id="24" idx="0"/>
+          </p:cNvCxnSpPr>
+          <p:nvPr/>
+        </p:nvCxnSpPr>
+        <p:spPr>
+          <a:xfrm>
+            <a:off x="4181564" y="3218200"/>
+            <a:ext cx="0" cy="453113"/>
+          </a:xfrm>
+          <a:prstGeom prst="straightConnector1">
+            <a:avLst/>
+          </a:prstGeom>
+          <a:ln w="28575">
+            <a:solidFill>
+              <a:schemeClr val="tx1"/>
+            </a:solidFill>
+            <a:tailEnd type="arrow" w="lg" len="lg"/>
+          </a:ln>
+        </p:spPr>
+        <p:style>
+          <a:lnRef idx="1">
+            <a:schemeClr val="accent1"/>
+          </a:lnRef>
+          <a:fillRef idx="0">
+            <a:schemeClr val="accent1"/>
+          </a:fillRef>
+          <a:effectRef idx="0">
+            <a:schemeClr val="accent1"/>
+          </a:effectRef>
+          <a:fontRef idx="minor">
+            <a:schemeClr val="tx1"/>
+          </a:fontRef>
+        </p:style>
+      </p:cxnSp>
+      <p:cxnSp>
+        <p:nvCxnSpPr>
+          <p:cNvPr id="48" name="Straight Arrow Connector 47">
+            <a:extLst>
+              <a:ext uri="{FF2B5EF4-FFF2-40B4-BE49-F238E27FC236}">
+                <a16:creationId xmlns:a16="http://schemas.microsoft.com/office/drawing/2014/main" id="{134CE515-A80B-47F2-A0D5-FD2452119C1A}"/>
+              </a:ext>
+            </a:extLst>
+          </p:cNvPr>
+          <p:cNvCxnSpPr>
+            <a:cxnSpLocks/>
+            <a:stCxn id="24" idx="4"/>
+            <a:endCxn id="25" idx="0"/>
+          </p:cNvCxnSpPr>
+          <p:nvPr/>
+        </p:nvCxnSpPr>
+        <p:spPr>
+          <a:xfrm>
+            <a:off x="4181564" y="4216600"/>
+            <a:ext cx="0" cy="453113"/>
+          </a:xfrm>
+          <a:prstGeom prst="straightConnector1">
+            <a:avLst/>
+          </a:prstGeom>
+          <a:ln w="28575">
+            <a:solidFill>
+              <a:schemeClr val="tx1"/>
+            </a:solidFill>
+            <a:tailEnd type="arrow" w="lg" len="lg"/>
+          </a:ln>
+        </p:spPr>
+        <p:style>
+          <a:lnRef idx="1">
+            <a:schemeClr val="accent1"/>
+          </a:lnRef>
+          <a:fillRef idx="0">
+            <a:schemeClr val="accent1"/>
+          </a:fillRef>
+          <a:effectRef idx="0">
+            <a:schemeClr val="accent1"/>
+          </a:effectRef>
+          <a:fontRef idx="minor">
+            <a:schemeClr val="tx1"/>
+          </a:fontRef>
+        </p:style>
+      </p:cxnSp>
+      <p:cxnSp>
+        <p:nvCxnSpPr>
+          <p:cNvPr id="51" name="Straight Arrow Connector 50">
+            <a:extLst>
+              <a:ext uri="{FF2B5EF4-FFF2-40B4-BE49-F238E27FC236}">
+                <a16:creationId xmlns:a16="http://schemas.microsoft.com/office/drawing/2014/main" id="{C9EF7C1B-7B1D-45CA-B9BA-CE14145A5DE6}"/>
+              </a:ext>
+            </a:extLst>
+          </p:cNvPr>
+          <p:cNvCxnSpPr>
+            <a:cxnSpLocks/>
+            <a:stCxn id="24" idx="4"/>
+            <a:endCxn id="37" idx="1"/>
+          </p:cNvCxnSpPr>
+          <p:nvPr/>
+        </p:nvCxnSpPr>
+        <p:spPr>
+          <a:xfrm>
+            <a:off x="4181569" y="4216596"/>
+            <a:ext cx="947931" cy="532968"/>
+          </a:xfrm>
+          <a:prstGeom prst="straightConnector1">
+            <a:avLst/>
+          </a:prstGeom>
+          <a:ln w="28575">
+            <a:solidFill>
+              <a:schemeClr val="tx1"/>
+            </a:solidFill>
+            <a:tailEnd type="arrow" w="lg" len="lg"/>
+          </a:ln>
+        </p:spPr>
+        <p:style>
+          <a:lnRef idx="1">
+            <a:schemeClr val="accent1"/>
+          </a:lnRef>
+          <a:fillRef idx="0">
+            <a:schemeClr val="accent1"/>
+          </a:fillRef>
+          <a:effectRef idx="0">
+            <a:schemeClr val="accent1"/>
+          </a:effectRef>
+          <a:fontRef idx="minor">
+            <a:schemeClr val="tx1"/>
+          </a:fontRef>
+        </p:style>
+      </p:cxnSp>
+      <p:cxnSp>
+        <p:nvCxnSpPr>
+          <p:cNvPr id="55" name="Straight Arrow Connector 54">
+            <a:extLst>
+              <a:ext uri="{FF2B5EF4-FFF2-40B4-BE49-F238E27FC236}">
+                <a16:creationId xmlns:a16="http://schemas.microsoft.com/office/drawing/2014/main" id="{3F43BB14-F121-4E17-968F-9B131D8CDF1D}"/>
+              </a:ext>
+            </a:extLst>
+          </p:cNvPr>
+          <p:cNvCxnSpPr>
+            <a:cxnSpLocks/>
+            <a:stCxn id="37" idx="4"/>
+            <a:endCxn id="28" idx="0"/>
+          </p:cNvCxnSpPr>
+          <p:nvPr/>
+        </p:nvCxnSpPr>
+        <p:spPr>
+          <a:xfrm>
+            <a:off x="5337141" y="5215000"/>
+            <a:ext cx="0" cy="453113"/>
+          </a:xfrm>
+          <a:prstGeom prst="straightConnector1">
+            <a:avLst/>
+          </a:prstGeom>
+          <a:ln w="28575">
+            <a:solidFill>
+              <a:schemeClr val="tx1"/>
+            </a:solidFill>
+            <a:tailEnd type="arrow" w="lg" len="lg"/>
+          </a:ln>
+        </p:spPr>
+        <p:style>
+          <a:lnRef idx="1">
+            <a:schemeClr val="accent1"/>
+          </a:lnRef>
+          <a:fillRef idx="0">
+            <a:schemeClr val="accent1"/>
+          </a:fillRef>
+          <a:effectRef idx="0">
+            <a:schemeClr val="accent1"/>
+          </a:effectRef>
+          <a:fontRef idx="minor">
+            <a:schemeClr val="tx1"/>
+          </a:fontRef>
+        </p:style>
+      </p:cxnSp>
+      <p:cxnSp>
+        <p:nvCxnSpPr>
+          <p:cNvPr id="58" name="Straight Arrow Connector 57">
+            <a:extLst>
+              <a:ext uri="{FF2B5EF4-FFF2-40B4-BE49-F238E27FC236}">
+                <a16:creationId xmlns:a16="http://schemas.microsoft.com/office/drawing/2014/main" id="{41A6AF1C-08AF-4070-BB89-9EFDE933C383}"/>
+              </a:ext>
+            </a:extLst>
+          </p:cNvPr>
+          <p:cNvCxnSpPr>
+            <a:cxnSpLocks/>
+            <a:stCxn id="28" idx="4"/>
+            <a:endCxn id="31" idx="0"/>
+          </p:cNvCxnSpPr>
+          <p:nvPr/>
+        </p:nvCxnSpPr>
+        <p:spPr>
+          <a:xfrm>
+            <a:off x="5337141" y="6213400"/>
+            <a:ext cx="0" cy="453113"/>
+          </a:xfrm>
+          <a:prstGeom prst="straightConnector1">
+            <a:avLst/>
+          </a:prstGeom>
+          <a:ln w="28575">
+            <a:solidFill>
+              <a:schemeClr val="tx1"/>
+            </a:solidFill>
+            <a:tailEnd type="arrow" w="lg" len="lg"/>
+          </a:ln>
+        </p:spPr>
+        <p:style>
+          <a:lnRef idx="1">
+            <a:schemeClr val="accent1"/>
+          </a:lnRef>
+          <a:fillRef idx="0">
+            <a:schemeClr val="accent1"/>
+          </a:fillRef>
+          <a:effectRef idx="0">
+            <a:schemeClr val="accent1"/>
+          </a:effectRef>
+          <a:fontRef idx="minor">
+            <a:schemeClr val="tx1"/>
+          </a:fontRef>
+        </p:style>
+      </p:cxnSp>
+      <p:cxnSp>
+        <p:nvCxnSpPr>
+          <p:cNvPr id="61" name="Straight Arrow Connector 60">
+            <a:extLst>
+              <a:ext uri="{FF2B5EF4-FFF2-40B4-BE49-F238E27FC236}">
+                <a16:creationId xmlns:a16="http://schemas.microsoft.com/office/drawing/2014/main" id="{5CAC75B2-BF4C-42E3-858D-F2043FCA831A}"/>
+              </a:ext>
+            </a:extLst>
+          </p:cNvPr>
+          <p:cNvCxnSpPr>
+            <a:cxnSpLocks/>
+            <a:stCxn id="31" idx="4"/>
+            <a:endCxn id="33" idx="0"/>
+          </p:cNvCxnSpPr>
+          <p:nvPr/>
+        </p:nvCxnSpPr>
+        <p:spPr>
+          <a:xfrm>
+            <a:off x="5337141" y="7211800"/>
+            <a:ext cx="0" cy="453113"/>
+          </a:xfrm>
+          <a:prstGeom prst="straightConnector1">
+            <a:avLst/>
+          </a:prstGeom>
+          <a:ln w="28575">
+            <a:solidFill>
+              <a:schemeClr val="tx1"/>
+            </a:solidFill>
+            <a:tailEnd type="arrow" w="lg" len="lg"/>
+          </a:ln>
+        </p:spPr>
+        <p:style>
+          <a:lnRef idx="1">
+            <a:schemeClr val="accent1"/>
+          </a:lnRef>
+          <a:fillRef idx="0">
+            <a:schemeClr val="accent1"/>
+          </a:fillRef>
+          <a:effectRef idx="0">
+            <a:schemeClr val="accent1"/>
+          </a:effectRef>
+          <a:fontRef idx="minor">
+            <a:schemeClr val="tx1"/>
+          </a:fontRef>
+        </p:style>
+      </p:cxnSp>
+      <p:cxnSp>
+        <p:nvCxnSpPr>
+          <p:cNvPr id="69" name="Straight Arrow Connector 68">
+            <a:extLst>
+              <a:ext uri="{FF2B5EF4-FFF2-40B4-BE49-F238E27FC236}">
+                <a16:creationId xmlns:a16="http://schemas.microsoft.com/office/drawing/2014/main" id="{50905898-C870-4D11-AA9F-F0FDBA4298D7}"/>
+              </a:ext>
+            </a:extLst>
+          </p:cNvPr>
+          <p:cNvCxnSpPr>
+            <a:cxnSpLocks/>
+            <a:stCxn id="24" idx="4"/>
+            <a:endCxn id="43" idx="7"/>
+          </p:cNvCxnSpPr>
+          <p:nvPr/>
+        </p:nvCxnSpPr>
+        <p:spPr>
+          <a:xfrm flipH="1">
+            <a:off x="1318866" y="4216600"/>
+            <a:ext cx="2862703" cy="532967"/>
+          </a:xfrm>
+          <a:prstGeom prst="straightConnector1">
+            <a:avLst/>
+          </a:prstGeom>
+          <a:ln w="28575">
+            <a:solidFill>
+              <a:schemeClr val="tx1"/>
+            </a:solidFill>
+            <a:prstDash val="lgDash"/>
+            <a:tailEnd type="arrow" w="lg" len="lg"/>
+          </a:ln>
+        </p:spPr>
+        <p:style>
+          <a:lnRef idx="1">
+            <a:schemeClr val="accent1"/>
+          </a:lnRef>
+          <a:fillRef idx="0">
+            <a:schemeClr val="accent1"/>
+          </a:fillRef>
+          <a:effectRef idx="0">
+            <a:schemeClr val="accent1"/>
+          </a:effectRef>
+          <a:fontRef idx="minor">
+            <a:schemeClr val="tx1"/>
+          </a:fontRef>
+        </p:style>
+      </p:cxnSp>
+      <p:cxnSp>
+        <p:nvCxnSpPr>
+          <p:cNvPr id="72" name="Straight Arrow Connector 71">
+            <a:extLst>
+              <a:ext uri="{FF2B5EF4-FFF2-40B4-BE49-F238E27FC236}">
+                <a16:creationId xmlns:a16="http://schemas.microsoft.com/office/drawing/2014/main" id="{AF515F62-C1C3-40FF-AC12-85577E6A1B09}"/>
+              </a:ext>
+            </a:extLst>
+          </p:cNvPr>
+          <p:cNvCxnSpPr>
+            <a:cxnSpLocks/>
+            <a:stCxn id="24" idx="4"/>
+            <a:endCxn id="42" idx="7"/>
+          </p:cNvCxnSpPr>
+          <p:nvPr/>
+        </p:nvCxnSpPr>
+        <p:spPr>
+          <a:xfrm flipH="1">
+            <a:off x="2486973" y="4216600"/>
+            <a:ext cx="1694595" cy="532966"/>
+          </a:xfrm>
+          <a:prstGeom prst="straightConnector1">
+            <a:avLst/>
+          </a:prstGeom>
+          <a:ln w="28575">
+            <a:solidFill>
+              <a:schemeClr val="tx1"/>
+            </a:solidFill>
+            <a:prstDash val="lgDash"/>
+            <a:tailEnd type="arrow" w="lg" len="lg"/>
+          </a:ln>
+        </p:spPr>
+        <p:style>
+          <a:lnRef idx="1">
+            <a:schemeClr val="accent1"/>
+          </a:lnRef>
+          <a:fillRef idx="0">
+            <a:schemeClr val="accent1"/>
+          </a:fillRef>
+          <a:effectRef idx="0">
+            <a:schemeClr val="accent1"/>
+          </a:effectRef>
+          <a:fontRef idx="minor">
+            <a:schemeClr val="tx1"/>
+          </a:fontRef>
+        </p:style>
+      </p:cxnSp>
+      <p:cxnSp>
+        <p:nvCxnSpPr>
+          <p:cNvPr id="75" name="Straight Arrow Connector 74">
+            <a:extLst>
+              <a:ext uri="{FF2B5EF4-FFF2-40B4-BE49-F238E27FC236}">
+                <a16:creationId xmlns:a16="http://schemas.microsoft.com/office/drawing/2014/main" id="{473D8C43-6F3A-4DD8-A0A3-9E8F6B47EB52}"/>
+              </a:ext>
+            </a:extLst>
+          </p:cNvPr>
+          <p:cNvCxnSpPr>
+            <a:cxnSpLocks/>
+            <a:stCxn id="4" idx="4"/>
+            <a:endCxn id="40" idx="7"/>
+          </p:cNvCxnSpPr>
+          <p:nvPr/>
+        </p:nvCxnSpPr>
+        <p:spPr>
+          <a:xfrm flipH="1">
+            <a:off x="1318862" y="2219797"/>
+            <a:ext cx="2862704" cy="532968"/>
+          </a:xfrm>
+          <a:prstGeom prst="straightConnector1">
+            <a:avLst/>
+          </a:prstGeom>
+          <a:ln w="28575">
+            <a:solidFill>
+              <a:schemeClr val="tx1"/>
+            </a:solidFill>
+            <a:prstDash val="lgDash"/>
+            <a:tailEnd type="arrow" w="lg" len="lg"/>
+          </a:ln>
+        </p:spPr>
+        <p:style>
+          <a:lnRef idx="1">
+            <a:schemeClr val="accent1"/>
+          </a:lnRef>
+          <a:fillRef idx="0">
+            <a:schemeClr val="accent1"/>
+          </a:fillRef>
+          <a:effectRef idx="0">
+            <a:schemeClr val="accent1"/>
+          </a:effectRef>
+          <a:fontRef idx="minor">
+            <a:schemeClr val="tx1"/>
+          </a:fontRef>
+        </p:style>
+      </p:cxnSp>
+      <p:cxnSp>
+        <p:nvCxnSpPr>
+          <p:cNvPr id="79" name="Straight Arrow Connector 78">
+            <a:extLst>
+              <a:ext uri="{FF2B5EF4-FFF2-40B4-BE49-F238E27FC236}">
+                <a16:creationId xmlns:a16="http://schemas.microsoft.com/office/drawing/2014/main" id="{2E23FAC1-D7EA-4017-917F-DA69396302B5}"/>
+              </a:ext>
+            </a:extLst>
+          </p:cNvPr>
+          <p:cNvCxnSpPr>
+            <a:cxnSpLocks/>
+            <a:stCxn id="21" idx="4"/>
+            <a:endCxn id="41" idx="7"/>
+          </p:cNvCxnSpPr>
+          <p:nvPr/>
+        </p:nvCxnSpPr>
+        <p:spPr>
+          <a:xfrm flipH="1">
+            <a:off x="1318864" y="3218200"/>
+            <a:ext cx="2862704" cy="530062"/>
+          </a:xfrm>
+          <a:prstGeom prst="straightConnector1">
+            <a:avLst/>
+          </a:prstGeom>
+          <a:ln w="28575">
+            <a:solidFill>
+              <a:schemeClr val="tx1"/>
+            </a:solidFill>
+            <a:prstDash val="lgDash"/>
+            <a:tailEnd type="arrow" w="lg" len="lg"/>
+          </a:ln>
+        </p:spPr>
+        <p:style>
+          <a:lnRef idx="1">
+            <a:schemeClr val="accent1"/>
+          </a:lnRef>
+          <a:fillRef idx="0">
+            <a:schemeClr val="accent1"/>
+          </a:fillRef>
+          <a:effectRef idx="0">
+            <a:schemeClr val="accent1"/>
+          </a:effectRef>
+          <a:fontRef idx="minor">
+            <a:schemeClr val="tx1"/>
+          </a:fontRef>
+        </p:style>
+      </p:cxnSp>
+      <p:cxnSp>
+        <p:nvCxnSpPr>
+          <p:cNvPr id="82" name="Straight Arrow Connector 81">
+            <a:extLst>
+              <a:ext uri="{FF2B5EF4-FFF2-40B4-BE49-F238E27FC236}">
+                <a16:creationId xmlns:a16="http://schemas.microsoft.com/office/drawing/2014/main" id="{D64ED8D1-E3EC-433E-BFD7-85E15CA464E7}"/>
+              </a:ext>
+            </a:extLst>
+          </p:cNvPr>
+          <p:cNvCxnSpPr>
+            <a:cxnSpLocks/>
+            <a:stCxn id="37" idx="4"/>
+            <a:endCxn id="44" idx="7"/>
+          </p:cNvCxnSpPr>
+          <p:nvPr/>
+        </p:nvCxnSpPr>
+        <p:spPr>
+          <a:xfrm flipH="1">
+            <a:off x="2483961" y="5215000"/>
+            <a:ext cx="2853182" cy="532967"/>
+          </a:xfrm>
+          <a:prstGeom prst="straightConnector1">
+            <a:avLst/>
+          </a:prstGeom>
+          <a:ln w="28575">
+            <a:solidFill>
+              <a:schemeClr val="tx1"/>
+            </a:solidFill>
+            <a:prstDash val="lgDash"/>
+            <a:tailEnd type="arrow" w="lg" len="lg"/>
+          </a:ln>
+        </p:spPr>
+        <p:style>
+          <a:lnRef idx="1">
+            <a:schemeClr val="accent1"/>
+          </a:lnRef>
+          <a:fillRef idx="0">
+            <a:schemeClr val="accent1"/>
+          </a:fillRef>
+          <a:effectRef idx="0">
+            <a:schemeClr val="accent1"/>
+          </a:effectRef>
+          <a:fontRef idx="minor">
+            <a:schemeClr val="tx1"/>
+          </a:fontRef>
+        </p:style>
+      </p:cxnSp>
+      <p:cxnSp>
+        <p:nvCxnSpPr>
+          <p:cNvPr id="86" name="Straight Arrow Connector 85">
+            <a:extLst>
+              <a:ext uri="{FF2B5EF4-FFF2-40B4-BE49-F238E27FC236}">
+                <a16:creationId xmlns:a16="http://schemas.microsoft.com/office/drawing/2014/main" id="{6A85547D-BA6D-465B-9B00-52ADE8219738}"/>
+              </a:ext>
+            </a:extLst>
+          </p:cNvPr>
+          <p:cNvCxnSpPr>
+            <a:cxnSpLocks/>
+            <a:stCxn id="28" idx="4"/>
+            <a:endCxn id="45" idx="7"/>
+          </p:cNvCxnSpPr>
+          <p:nvPr/>
+        </p:nvCxnSpPr>
+        <p:spPr>
+          <a:xfrm flipH="1">
+            <a:off x="2483963" y="6213397"/>
+            <a:ext cx="2853183" cy="532968"/>
+          </a:xfrm>
+          <a:prstGeom prst="straightConnector1">
+            <a:avLst/>
+          </a:prstGeom>
+          <a:ln w="28575">
+            <a:solidFill>
+              <a:schemeClr val="tx1"/>
+            </a:solidFill>
+            <a:prstDash val="lgDash"/>
+            <a:tailEnd type="arrow" w="lg" len="lg"/>
+          </a:ln>
+        </p:spPr>
+        <p:style>
+          <a:lnRef idx="1">
+            <a:schemeClr val="accent1"/>
+          </a:lnRef>
+          <a:fillRef idx="0">
+            <a:schemeClr val="accent1"/>
+          </a:fillRef>
+          <a:effectRef idx="0">
+            <a:schemeClr val="accent1"/>
+          </a:effectRef>
+          <a:fontRef idx="minor">
+            <a:schemeClr val="tx1"/>
+          </a:fontRef>
+        </p:style>
+      </p:cxnSp>
+      <p:cxnSp>
+        <p:nvCxnSpPr>
+          <p:cNvPr id="89" name="Straight Arrow Connector 88">
+            <a:extLst>
+              <a:ext uri="{FF2B5EF4-FFF2-40B4-BE49-F238E27FC236}">
+                <a16:creationId xmlns:a16="http://schemas.microsoft.com/office/drawing/2014/main" id="{CA8DF2C9-75FB-4DB2-8F24-2DE465D6EFF8}"/>
+              </a:ext>
+            </a:extLst>
+          </p:cNvPr>
+          <p:cNvCxnSpPr>
+            <a:cxnSpLocks/>
+            <a:stCxn id="31" idx="4"/>
+            <a:endCxn id="46" idx="7"/>
+          </p:cNvCxnSpPr>
+          <p:nvPr/>
+        </p:nvCxnSpPr>
+        <p:spPr>
+          <a:xfrm flipH="1">
+            <a:off x="2483963" y="7211800"/>
+            <a:ext cx="2853183" cy="532967"/>
+          </a:xfrm>
+          <a:prstGeom prst="straightConnector1">
+            <a:avLst/>
+          </a:prstGeom>
+          <a:ln w="28575">
+            <a:solidFill>
+              <a:schemeClr val="tx1"/>
+            </a:solidFill>
+            <a:prstDash val="lgDash"/>
+            <a:tailEnd type="arrow" w="lg" len="lg"/>
+          </a:ln>
+        </p:spPr>
+        <p:style>
+          <a:lnRef idx="1">
+            <a:schemeClr val="accent1"/>
+          </a:lnRef>
+          <a:fillRef idx="0">
+            <a:schemeClr val="accent1"/>
+          </a:fillRef>
+          <a:effectRef idx="0">
+            <a:schemeClr val="accent1"/>
+          </a:effectRef>
+          <a:fontRef idx="minor">
+            <a:schemeClr val="tx1"/>
+          </a:fontRef>
+        </p:style>
+      </p:cxnSp>
+      <p:sp>
+        <p:nvSpPr>
+          <p:cNvPr id="93" name="TextBox 92">
+            <a:extLst>
+              <a:ext uri="{FF2B5EF4-FFF2-40B4-BE49-F238E27FC236}">
+                <a16:creationId xmlns:a16="http://schemas.microsoft.com/office/drawing/2014/main" id="{5BE52BD8-F4BA-43B3-B1B0-A41129EA80EE}"/>
+              </a:ext>
+            </a:extLst>
+          </p:cNvPr>
+          <p:cNvSpPr txBox="1"/>
+          <p:nvPr/>
+        </p:nvSpPr>
+        <p:spPr>
+          <a:xfrm>
+            <a:off x="276226" y="249331"/>
+            <a:ext cx="2714617" cy="646331"/>
+          </a:xfrm>
+          <a:prstGeom prst="rect">
+            <a:avLst/>
+          </a:prstGeom>
+          <a:noFill/>
+        </p:spPr>
+        <p:txBody>
+          <a:bodyPr wrap="square" rtlCol="0">
+            <a:spAutoFit/>
+          </a:bodyPr>
+          <a:lstStyle/>
+          <a:p>
+            <a:pPr algn="ctr"/>
+            <a:r>
+              <a:rPr lang="en-US" sz="3600" dirty="0"/>
+              <a:t>mechanized</a:t>
+            </a:r>
+          </a:p>
+        </p:txBody>
+      </p:sp>
+      <p:sp>
+        <p:nvSpPr>
+          <p:cNvPr id="95" name="TextBox 94">
+            <a:extLst>
+              <a:ext uri="{FF2B5EF4-FFF2-40B4-BE49-F238E27FC236}">
+                <a16:creationId xmlns:a16="http://schemas.microsoft.com/office/drawing/2014/main" id="{EF4CF3A3-F0E5-4ACB-8853-D8D5811DF2F9}"/>
+              </a:ext>
+            </a:extLst>
+          </p:cNvPr>
+          <p:cNvSpPr txBox="1"/>
+          <p:nvPr/>
+        </p:nvSpPr>
+        <p:spPr>
+          <a:xfrm>
+            <a:off x="3367934" y="263253"/>
+            <a:ext cx="2714617" cy="646331"/>
+          </a:xfrm>
+          <a:prstGeom prst="rect">
+            <a:avLst/>
+          </a:prstGeom>
+          <a:noFill/>
+        </p:spPr>
+        <p:txBody>
+          <a:bodyPr wrap="square" rtlCol="0">
+            <a:spAutoFit/>
+          </a:bodyPr>
+          <a:lstStyle/>
+          <a:p>
+            <a:pPr algn="ctr"/>
+            <a:r>
+              <a:rPr lang="en-US" sz="3600" dirty="0"/>
+              <a:t>executable</a:t>
+            </a:r>
+          </a:p>
+        </p:txBody>
+      </p:sp>
+      <p:cxnSp>
+        <p:nvCxnSpPr>
+          <p:cNvPr id="97" name="Straight Connector 96">
+            <a:extLst>
+              <a:ext uri="{FF2B5EF4-FFF2-40B4-BE49-F238E27FC236}">
+                <a16:creationId xmlns:a16="http://schemas.microsoft.com/office/drawing/2014/main" id="{BFD5E95A-3316-4C33-9B1C-287EAC8A974E}"/>
+              </a:ext>
+            </a:extLst>
+          </p:cNvPr>
+          <p:cNvCxnSpPr>
+            <a:cxnSpLocks/>
+          </p:cNvCxnSpPr>
+          <p:nvPr/>
+        </p:nvCxnSpPr>
+        <p:spPr>
+          <a:xfrm>
+            <a:off x="3227259" y="249331"/>
+            <a:ext cx="0" cy="8460913"/>
+          </a:xfrm>
+          <a:prstGeom prst="line">
+            <a:avLst/>
+          </a:prstGeom>
+          <a:ln w="60325">
+            <a:solidFill>
+              <a:srgbClr val="C00000"/>
+            </a:solidFill>
+            <a:prstDash val="solid"/>
+          </a:ln>
+        </p:spPr>
+        <p:style>
+          <a:lnRef idx="1">
+            <a:schemeClr val="accent1"/>
+          </a:lnRef>
+          <a:fillRef idx="0">
+            <a:schemeClr val="accent1"/>
+          </a:fillRef>
+          <a:effectRef idx="0">
+            <a:schemeClr val="accent1"/>
+          </a:effectRef>
+          <a:fontRef idx="minor">
+            <a:schemeClr val="tx1"/>
+          </a:fontRef>
+        </p:style>
+      </p:cxnSp>
+    </p:spTree>
+    <p:extLst>
+      <p:ext uri="{BB962C8B-B14F-4D97-AF65-F5344CB8AC3E}">
+        <p14:creationId xmlns:p14="http://schemas.microsoft.com/office/powerpoint/2010/main" val="1703506588"/>
       </p:ext>
     </p:extLst>
   </p:cSld>

--- a/images/tree.pptx
+++ b/images/tree.pptx
@@ -2,13 +2,13 @@
 <file path=ppt/presentation.xml><?xml version="1.0" encoding="utf-8"?>
 <p:presentation xmlns:a="http://schemas.openxmlformats.org/drawingml/2006/main" xmlns:r="http://schemas.openxmlformats.org/officeDocument/2006/relationships" xmlns:p="http://schemas.openxmlformats.org/presentationml/2006/main" saveSubsetFonts="1">
   <p:sldMasterIdLst>
-    <p:sldMasterId id="2147483696" r:id="rId1"/>
+    <p:sldMasterId id="2147483708" r:id="rId1"/>
   </p:sldMasterIdLst>
   <p:sldIdLst>
     <p:sldId id="256" r:id="rId2"/>
     <p:sldId id="257" r:id="rId3"/>
   </p:sldIdLst>
-  <p:sldSz cx="6400800" cy="9144000"/>
+  <p:sldSz cx="6400800" cy="8229600"/>
   <p:notesSz cx="6858000" cy="9144000"/>
   <p:defaultTextStyle>
     <a:defPPr>
@@ -137,8 +137,8 @@
         </p:nvSpPr>
         <p:spPr>
           <a:xfrm>
-            <a:off x="480060" y="1496484"/>
-            <a:ext cx="5440680" cy="3183467"/>
+            <a:off x="480060" y="1346837"/>
+            <a:ext cx="5440680" cy="2865120"/>
           </a:xfrm>
         </p:spPr>
         <p:txBody>
@@ -169,8 +169,8 @@
         </p:nvSpPr>
         <p:spPr>
           <a:xfrm>
-            <a:off x="800100" y="4802720"/>
-            <a:ext cx="4800600" cy="2207683"/>
+            <a:off x="800100" y="4322446"/>
+            <a:ext cx="4800600" cy="1986914"/>
           </a:xfrm>
         </p:spPr>
         <p:txBody>
@@ -180,35 +180,35 @@
               <a:buNone/>
               <a:defRPr sz="1680"/>
             </a:lvl1pPr>
-            <a:lvl2pPr marL="320037" indent="0" algn="ctr">
+            <a:lvl2pPr marL="320040" indent="0" algn="ctr">
               <a:buNone/>
               <a:defRPr sz="1400"/>
             </a:lvl2pPr>
-            <a:lvl3pPr marL="640074" indent="0" algn="ctr">
+            <a:lvl3pPr marL="640080" indent="0" algn="ctr">
               <a:buNone/>
               <a:defRPr sz="1260"/>
             </a:lvl3pPr>
-            <a:lvl4pPr marL="960110" indent="0" algn="ctr">
+            <a:lvl4pPr marL="960120" indent="0" algn="ctr">
               <a:buNone/>
               <a:defRPr sz="1120"/>
             </a:lvl4pPr>
-            <a:lvl5pPr marL="1280147" indent="0" algn="ctr">
+            <a:lvl5pPr marL="1280160" indent="0" algn="ctr">
               <a:buNone/>
               <a:defRPr sz="1120"/>
             </a:lvl5pPr>
-            <a:lvl6pPr marL="1600184" indent="0" algn="ctr">
+            <a:lvl6pPr marL="1600200" indent="0" algn="ctr">
               <a:buNone/>
               <a:defRPr sz="1120"/>
             </a:lvl6pPr>
-            <a:lvl7pPr marL="1920221" indent="0" algn="ctr">
+            <a:lvl7pPr marL="1920240" indent="0" algn="ctr">
               <a:buNone/>
               <a:defRPr sz="1120"/>
             </a:lvl7pPr>
-            <a:lvl8pPr marL="2240258" indent="0" algn="ctr">
+            <a:lvl8pPr marL="2240280" indent="0" algn="ctr">
               <a:buNone/>
               <a:defRPr sz="1120"/>
             </a:lvl8pPr>
-            <a:lvl9pPr marL="2560294" indent="0" algn="ctr">
+            <a:lvl9pPr marL="2560320" indent="0" algn="ctr">
               <a:buNone/>
               <a:defRPr sz="1120"/>
             </a:lvl9pPr>
@@ -290,7 +290,7 @@
     </p:spTree>
     <p:extLst>
       <p:ext uri="{BB962C8B-B14F-4D97-AF65-F5344CB8AC3E}">
-        <p14:creationId xmlns:p14="http://schemas.microsoft.com/office/powerpoint/2010/main" val="3422241908"/>
+        <p14:creationId xmlns:p14="http://schemas.microsoft.com/office/powerpoint/2010/main" val="3328561715"/>
       </p:ext>
     </p:extLst>
   </p:cSld>
@@ -460,7 +460,7 @@
     </p:spTree>
     <p:extLst>
       <p:ext uri="{BB962C8B-B14F-4D97-AF65-F5344CB8AC3E}">
-        <p14:creationId xmlns:p14="http://schemas.microsoft.com/office/powerpoint/2010/main" val="725487058"/>
+        <p14:creationId xmlns:p14="http://schemas.microsoft.com/office/powerpoint/2010/main" val="1563304115"/>
       </p:ext>
     </p:extLst>
   </p:cSld>
@@ -499,8 +499,8 @@
         </p:nvSpPr>
         <p:spPr>
           <a:xfrm>
-            <a:off x="4580577" y="486836"/>
-            <a:ext cx="1380173" cy="7749117"/>
+            <a:off x="4580575" y="438150"/>
+            <a:ext cx="1380173" cy="6974206"/>
           </a:xfrm>
         </p:spPr>
         <p:txBody>
@@ -527,8 +527,8 @@
         </p:nvSpPr>
         <p:spPr>
           <a:xfrm>
-            <a:off x="440055" y="486836"/>
-            <a:ext cx="4060508" cy="7749117"/>
+            <a:off x="440055" y="438150"/>
+            <a:ext cx="4060508" cy="6974206"/>
           </a:xfrm>
         </p:spPr>
         <p:txBody>
@@ -640,7 +640,7 @@
     </p:spTree>
     <p:extLst>
       <p:ext uri="{BB962C8B-B14F-4D97-AF65-F5344CB8AC3E}">
-        <p14:creationId xmlns:p14="http://schemas.microsoft.com/office/powerpoint/2010/main" val="1616101789"/>
+        <p14:creationId xmlns:p14="http://schemas.microsoft.com/office/powerpoint/2010/main" val="1807887107"/>
       </p:ext>
     </p:extLst>
   </p:cSld>
@@ -810,7 +810,7 @@
     </p:spTree>
     <p:extLst>
       <p:ext uri="{BB962C8B-B14F-4D97-AF65-F5344CB8AC3E}">
-        <p14:creationId xmlns:p14="http://schemas.microsoft.com/office/powerpoint/2010/main" val="1845828994"/>
+        <p14:creationId xmlns:p14="http://schemas.microsoft.com/office/powerpoint/2010/main" val="3111993346"/>
       </p:ext>
     </p:extLst>
   </p:cSld>
@@ -849,8 +849,8 @@
         </p:nvSpPr>
         <p:spPr>
           <a:xfrm>
-            <a:off x="436722" y="2279653"/>
-            <a:ext cx="5520690" cy="3803649"/>
+            <a:off x="436722" y="2051689"/>
+            <a:ext cx="5520690" cy="3423284"/>
           </a:xfrm>
         </p:spPr>
         <p:txBody>
@@ -881,8 +881,8 @@
         </p:nvSpPr>
         <p:spPr>
           <a:xfrm>
-            <a:off x="436722" y="6119288"/>
-            <a:ext cx="5520690" cy="2000249"/>
+            <a:off x="436722" y="5507358"/>
+            <a:ext cx="5520690" cy="1800224"/>
           </a:xfrm>
         </p:spPr>
         <p:txBody>
@@ -896,7 +896,7 @@
                 </a:solidFill>
               </a:defRPr>
             </a:lvl1pPr>
-            <a:lvl2pPr marL="320037" indent="0">
+            <a:lvl2pPr marL="320040" indent="0">
               <a:buNone/>
               <a:defRPr sz="1400">
                 <a:solidFill>
@@ -906,7 +906,7 @@
                 </a:solidFill>
               </a:defRPr>
             </a:lvl2pPr>
-            <a:lvl3pPr marL="640074" indent="0">
+            <a:lvl3pPr marL="640080" indent="0">
               <a:buNone/>
               <a:defRPr sz="1260">
                 <a:solidFill>
@@ -916,7 +916,7 @@
                 </a:solidFill>
               </a:defRPr>
             </a:lvl3pPr>
-            <a:lvl4pPr marL="960110" indent="0">
+            <a:lvl4pPr marL="960120" indent="0">
               <a:buNone/>
               <a:defRPr sz="1120">
                 <a:solidFill>
@@ -926,7 +926,7 @@
                 </a:solidFill>
               </a:defRPr>
             </a:lvl4pPr>
-            <a:lvl5pPr marL="1280147" indent="0">
+            <a:lvl5pPr marL="1280160" indent="0">
               <a:buNone/>
               <a:defRPr sz="1120">
                 <a:solidFill>
@@ -936,7 +936,7 @@
                 </a:solidFill>
               </a:defRPr>
             </a:lvl5pPr>
-            <a:lvl6pPr marL="1600184" indent="0">
+            <a:lvl6pPr marL="1600200" indent="0">
               <a:buNone/>
               <a:defRPr sz="1120">
                 <a:solidFill>
@@ -946,7 +946,7 @@
                 </a:solidFill>
               </a:defRPr>
             </a:lvl6pPr>
-            <a:lvl7pPr marL="1920221" indent="0">
+            <a:lvl7pPr marL="1920240" indent="0">
               <a:buNone/>
               <a:defRPr sz="1120">
                 <a:solidFill>
@@ -956,7 +956,7 @@
                 </a:solidFill>
               </a:defRPr>
             </a:lvl7pPr>
-            <a:lvl8pPr marL="2240258" indent="0">
+            <a:lvl8pPr marL="2240280" indent="0">
               <a:buNone/>
               <a:defRPr sz="1120">
                 <a:solidFill>
@@ -966,7 +966,7 @@
                 </a:solidFill>
               </a:defRPr>
             </a:lvl8pPr>
-            <a:lvl9pPr marL="2560294" indent="0">
+            <a:lvl9pPr marL="2560320" indent="0">
               <a:buNone/>
               <a:defRPr sz="1120">
                 <a:solidFill>
@@ -1054,7 +1054,7 @@
     </p:spTree>
     <p:extLst>
       <p:ext uri="{BB962C8B-B14F-4D97-AF65-F5344CB8AC3E}">
-        <p14:creationId xmlns:p14="http://schemas.microsoft.com/office/powerpoint/2010/main" val="784796977"/>
+        <p14:creationId xmlns:p14="http://schemas.microsoft.com/office/powerpoint/2010/main" val="4006750407"/>
       </p:ext>
     </p:extLst>
   </p:cSld>
@@ -1116,8 +1116,8 @@
         </p:nvSpPr>
         <p:spPr>
           <a:xfrm>
-            <a:off x="440055" y="2434167"/>
-            <a:ext cx="2720340" cy="5801784"/>
+            <a:off x="440055" y="2190749"/>
+            <a:ext cx="2720340" cy="5221607"/>
           </a:xfrm>
         </p:spPr>
         <p:txBody>
@@ -1173,8 +1173,8 @@
         </p:nvSpPr>
         <p:spPr>
           <a:xfrm>
-            <a:off x="3240405" y="2434167"/>
-            <a:ext cx="2720340" cy="5801784"/>
+            <a:off x="3240405" y="2190749"/>
+            <a:ext cx="2720340" cy="5221607"/>
           </a:xfrm>
         </p:spPr>
         <p:txBody>
@@ -1286,7 +1286,7 @@
     </p:spTree>
     <p:extLst>
       <p:ext uri="{BB962C8B-B14F-4D97-AF65-F5344CB8AC3E}">
-        <p14:creationId xmlns:p14="http://schemas.microsoft.com/office/powerpoint/2010/main" val="3076790366"/>
+        <p14:creationId xmlns:p14="http://schemas.microsoft.com/office/powerpoint/2010/main" val="2715491763"/>
       </p:ext>
     </p:extLst>
   </p:cSld>
@@ -1325,8 +1325,8 @@
         </p:nvSpPr>
         <p:spPr>
           <a:xfrm>
-            <a:off x="440889" y="486838"/>
-            <a:ext cx="5520690" cy="1767417"/>
+            <a:off x="440889" y="438153"/>
+            <a:ext cx="5520690" cy="1590676"/>
           </a:xfrm>
         </p:spPr>
         <p:txBody>
@@ -1353,8 +1353,8 @@
         </p:nvSpPr>
         <p:spPr>
           <a:xfrm>
-            <a:off x="440889" y="2241551"/>
-            <a:ext cx="2707838" cy="1098549"/>
+            <a:off x="440889" y="2017397"/>
+            <a:ext cx="2707838" cy="988694"/>
           </a:xfrm>
         </p:spPr>
         <p:txBody>
@@ -1364,35 +1364,35 @@
               <a:buNone/>
               <a:defRPr sz="1680" b="1"/>
             </a:lvl1pPr>
-            <a:lvl2pPr marL="320037" indent="0">
+            <a:lvl2pPr marL="320040" indent="0">
               <a:buNone/>
               <a:defRPr sz="1400" b="1"/>
             </a:lvl2pPr>
-            <a:lvl3pPr marL="640074" indent="0">
+            <a:lvl3pPr marL="640080" indent="0">
               <a:buNone/>
               <a:defRPr sz="1260" b="1"/>
             </a:lvl3pPr>
-            <a:lvl4pPr marL="960110" indent="0">
+            <a:lvl4pPr marL="960120" indent="0">
               <a:buNone/>
               <a:defRPr sz="1120" b="1"/>
             </a:lvl4pPr>
-            <a:lvl5pPr marL="1280147" indent="0">
+            <a:lvl5pPr marL="1280160" indent="0">
               <a:buNone/>
               <a:defRPr sz="1120" b="1"/>
             </a:lvl5pPr>
-            <a:lvl6pPr marL="1600184" indent="0">
+            <a:lvl6pPr marL="1600200" indent="0">
               <a:buNone/>
               <a:defRPr sz="1120" b="1"/>
             </a:lvl6pPr>
-            <a:lvl7pPr marL="1920221" indent="0">
+            <a:lvl7pPr marL="1920240" indent="0">
               <a:buNone/>
               <a:defRPr sz="1120" b="1"/>
             </a:lvl7pPr>
-            <a:lvl8pPr marL="2240258" indent="0">
+            <a:lvl8pPr marL="2240280" indent="0">
               <a:buNone/>
               <a:defRPr sz="1120" b="1"/>
             </a:lvl8pPr>
-            <a:lvl9pPr marL="2560294" indent="0">
+            <a:lvl9pPr marL="2560320" indent="0">
               <a:buNone/>
               <a:defRPr sz="1120" b="1"/>
             </a:lvl9pPr>
@@ -1418,8 +1418,8 @@
         </p:nvSpPr>
         <p:spPr>
           <a:xfrm>
-            <a:off x="440889" y="3340100"/>
-            <a:ext cx="2707838" cy="4912784"/>
+            <a:off x="440889" y="3006090"/>
+            <a:ext cx="2707838" cy="4421507"/>
           </a:xfrm>
         </p:spPr>
         <p:txBody>
@@ -1475,8 +1475,8 @@
         </p:nvSpPr>
         <p:spPr>
           <a:xfrm>
-            <a:off x="3240405" y="2241551"/>
-            <a:ext cx="2721174" cy="1098549"/>
+            <a:off x="3240405" y="2017397"/>
+            <a:ext cx="2721174" cy="988694"/>
           </a:xfrm>
         </p:spPr>
         <p:txBody>
@@ -1486,35 +1486,35 @@
               <a:buNone/>
               <a:defRPr sz="1680" b="1"/>
             </a:lvl1pPr>
-            <a:lvl2pPr marL="320037" indent="0">
+            <a:lvl2pPr marL="320040" indent="0">
               <a:buNone/>
               <a:defRPr sz="1400" b="1"/>
             </a:lvl2pPr>
-            <a:lvl3pPr marL="640074" indent="0">
+            <a:lvl3pPr marL="640080" indent="0">
               <a:buNone/>
               <a:defRPr sz="1260" b="1"/>
             </a:lvl3pPr>
-            <a:lvl4pPr marL="960110" indent="0">
+            <a:lvl4pPr marL="960120" indent="0">
               <a:buNone/>
               <a:defRPr sz="1120" b="1"/>
             </a:lvl4pPr>
-            <a:lvl5pPr marL="1280147" indent="0">
+            <a:lvl5pPr marL="1280160" indent="0">
               <a:buNone/>
               <a:defRPr sz="1120" b="1"/>
             </a:lvl5pPr>
-            <a:lvl6pPr marL="1600184" indent="0">
+            <a:lvl6pPr marL="1600200" indent="0">
               <a:buNone/>
               <a:defRPr sz="1120" b="1"/>
             </a:lvl6pPr>
-            <a:lvl7pPr marL="1920221" indent="0">
+            <a:lvl7pPr marL="1920240" indent="0">
               <a:buNone/>
               <a:defRPr sz="1120" b="1"/>
             </a:lvl7pPr>
-            <a:lvl8pPr marL="2240258" indent="0">
+            <a:lvl8pPr marL="2240280" indent="0">
               <a:buNone/>
               <a:defRPr sz="1120" b="1"/>
             </a:lvl8pPr>
-            <a:lvl9pPr marL="2560294" indent="0">
+            <a:lvl9pPr marL="2560320" indent="0">
               <a:buNone/>
               <a:defRPr sz="1120" b="1"/>
             </a:lvl9pPr>
@@ -1540,8 +1540,8 @@
         </p:nvSpPr>
         <p:spPr>
           <a:xfrm>
-            <a:off x="3240405" y="3340100"/>
-            <a:ext cx="2721174" cy="4912784"/>
+            <a:off x="3240405" y="3006090"/>
+            <a:ext cx="2721174" cy="4421507"/>
           </a:xfrm>
         </p:spPr>
         <p:txBody>
@@ -1653,7 +1653,7 @@
     </p:spTree>
     <p:extLst>
       <p:ext uri="{BB962C8B-B14F-4D97-AF65-F5344CB8AC3E}">
-        <p14:creationId xmlns:p14="http://schemas.microsoft.com/office/powerpoint/2010/main" val="2121299007"/>
+        <p14:creationId xmlns:p14="http://schemas.microsoft.com/office/powerpoint/2010/main" val="2396355322"/>
       </p:ext>
     </p:extLst>
   </p:cSld>
@@ -1771,7 +1771,7 @@
     </p:spTree>
     <p:extLst>
       <p:ext uri="{BB962C8B-B14F-4D97-AF65-F5344CB8AC3E}">
-        <p14:creationId xmlns:p14="http://schemas.microsoft.com/office/powerpoint/2010/main" val="839233292"/>
+        <p14:creationId xmlns:p14="http://schemas.microsoft.com/office/powerpoint/2010/main" val="2889969097"/>
       </p:ext>
     </p:extLst>
   </p:cSld>
@@ -1866,7 +1866,7 @@
     </p:spTree>
     <p:extLst>
       <p:ext uri="{BB962C8B-B14F-4D97-AF65-F5344CB8AC3E}">
-        <p14:creationId xmlns:p14="http://schemas.microsoft.com/office/powerpoint/2010/main" val="1712057976"/>
+        <p14:creationId xmlns:p14="http://schemas.microsoft.com/office/powerpoint/2010/main" val="1490728523"/>
       </p:ext>
     </p:extLst>
   </p:cSld>
@@ -1905,8 +1905,8 @@
         </p:nvSpPr>
         <p:spPr>
           <a:xfrm>
-            <a:off x="440893" y="609600"/>
-            <a:ext cx="2064425" cy="2133600"/>
+            <a:off x="440891" y="548640"/>
+            <a:ext cx="2064425" cy="1920240"/>
           </a:xfrm>
         </p:spPr>
         <p:txBody>
@@ -1937,8 +1937,8 @@
         </p:nvSpPr>
         <p:spPr>
           <a:xfrm>
-            <a:off x="2721178" y="1316571"/>
-            <a:ext cx="3240405" cy="6498167"/>
+            <a:off x="2721176" y="1184912"/>
+            <a:ext cx="3240405" cy="5848350"/>
           </a:xfrm>
         </p:spPr>
         <p:txBody>
@@ -2022,8 +2022,8 @@
         </p:nvSpPr>
         <p:spPr>
           <a:xfrm>
-            <a:off x="440893" y="2743203"/>
-            <a:ext cx="2064425" cy="5082117"/>
+            <a:off x="440891" y="2468880"/>
+            <a:ext cx="2064425" cy="4573906"/>
           </a:xfrm>
         </p:spPr>
         <p:txBody>
@@ -2033,35 +2033,35 @@
               <a:buNone/>
               <a:defRPr sz="1120"/>
             </a:lvl1pPr>
-            <a:lvl2pPr marL="320037" indent="0">
+            <a:lvl2pPr marL="320040" indent="0">
               <a:buNone/>
               <a:defRPr sz="980"/>
             </a:lvl2pPr>
-            <a:lvl3pPr marL="640074" indent="0">
+            <a:lvl3pPr marL="640080" indent="0">
               <a:buNone/>
               <a:defRPr sz="840"/>
             </a:lvl3pPr>
-            <a:lvl4pPr marL="960110" indent="0">
+            <a:lvl4pPr marL="960120" indent="0">
               <a:buNone/>
               <a:defRPr sz="700"/>
             </a:lvl4pPr>
-            <a:lvl5pPr marL="1280147" indent="0">
+            <a:lvl5pPr marL="1280160" indent="0">
               <a:buNone/>
               <a:defRPr sz="700"/>
             </a:lvl5pPr>
-            <a:lvl6pPr marL="1600184" indent="0">
+            <a:lvl6pPr marL="1600200" indent="0">
               <a:buNone/>
               <a:defRPr sz="700"/>
             </a:lvl6pPr>
-            <a:lvl7pPr marL="1920221" indent="0">
+            <a:lvl7pPr marL="1920240" indent="0">
               <a:buNone/>
               <a:defRPr sz="700"/>
             </a:lvl7pPr>
-            <a:lvl8pPr marL="2240258" indent="0">
+            <a:lvl8pPr marL="2240280" indent="0">
               <a:buNone/>
               <a:defRPr sz="700"/>
             </a:lvl8pPr>
-            <a:lvl9pPr marL="2560294" indent="0">
+            <a:lvl9pPr marL="2560320" indent="0">
               <a:buNone/>
               <a:defRPr sz="700"/>
             </a:lvl9pPr>
@@ -2143,7 +2143,7 @@
     </p:spTree>
     <p:extLst>
       <p:ext uri="{BB962C8B-B14F-4D97-AF65-F5344CB8AC3E}">
-        <p14:creationId xmlns:p14="http://schemas.microsoft.com/office/powerpoint/2010/main" val="4234340585"/>
+        <p14:creationId xmlns:p14="http://schemas.microsoft.com/office/powerpoint/2010/main" val="3952684058"/>
       </p:ext>
     </p:extLst>
   </p:cSld>
@@ -2182,8 +2182,8 @@
         </p:nvSpPr>
         <p:spPr>
           <a:xfrm>
-            <a:off x="440893" y="609600"/>
-            <a:ext cx="2064425" cy="2133600"/>
+            <a:off x="440891" y="548640"/>
+            <a:ext cx="2064425" cy="1920240"/>
           </a:xfrm>
         </p:spPr>
         <p:txBody>
@@ -2214,8 +2214,8 @@
         </p:nvSpPr>
         <p:spPr>
           <a:xfrm>
-            <a:off x="2721178" y="1316571"/>
-            <a:ext cx="3240405" cy="6498167"/>
+            <a:off x="2721176" y="1184912"/>
+            <a:ext cx="3240405" cy="5848350"/>
           </a:xfrm>
         </p:spPr>
         <p:txBody>
@@ -2225,35 +2225,35 @@
               <a:buNone/>
               <a:defRPr sz="2240"/>
             </a:lvl1pPr>
-            <a:lvl2pPr marL="320037" indent="0">
+            <a:lvl2pPr marL="320040" indent="0">
               <a:buNone/>
               <a:defRPr sz="1960"/>
             </a:lvl2pPr>
-            <a:lvl3pPr marL="640074" indent="0">
+            <a:lvl3pPr marL="640080" indent="0">
               <a:buNone/>
               <a:defRPr sz="1680"/>
             </a:lvl3pPr>
-            <a:lvl4pPr marL="960110" indent="0">
+            <a:lvl4pPr marL="960120" indent="0">
               <a:buNone/>
               <a:defRPr sz="1400"/>
             </a:lvl4pPr>
-            <a:lvl5pPr marL="1280147" indent="0">
+            <a:lvl5pPr marL="1280160" indent="0">
               <a:buNone/>
               <a:defRPr sz="1400"/>
             </a:lvl5pPr>
-            <a:lvl6pPr marL="1600184" indent="0">
+            <a:lvl6pPr marL="1600200" indent="0">
               <a:buNone/>
               <a:defRPr sz="1400"/>
             </a:lvl6pPr>
-            <a:lvl7pPr marL="1920221" indent="0">
+            <a:lvl7pPr marL="1920240" indent="0">
               <a:buNone/>
               <a:defRPr sz="1400"/>
             </a:lvl7pPr>
-            <a:lvl8pPr marL="2240258" indent="0">
+            <a:lvl8pPr marL="2240280" indent="0">
               <a:buNone/>
               <a:defRPr sz="1400"/>
             </a:lvl8pPr>
-            <a:lvl9pPr marL="2560294" indent="0">
+            <a:lvl9pPr marL="2560320" indent="0">
               <a:buNone/>
               <a:defRPr sz="1400"/>
             </a:lvl9pPr>
@@ -2279,8 +2279,8 @@
         </p:nvSpPr>
         <p:spPr>
           <a:xfrm>
-            <a:off x="440893" y="2743203"/>
-            <a:ext cx="2064425" cy="5082117"/>
+            <a:off x="440891" y="2468880"/>
+            <a:ext cx="2064425" cy="4573906"/>
           </a:xfrm>
         </p:spPr>
         <p:txBody>
@@ -2290,35 +2290,35 @@
               <a:buNone/>
               <a:defRPr sz="1120"/>
             </a:lvl1pPr>
-            <a:lvl2pPr marL="320037" indent="0">
+            <a:lvl2pPr marL="320040" indent="0">
               <a:buNone/>
               <a:defRPr sz="980"/>
             </a:lvl2pPr>
-            <a:lvl3pPr marL="640074" indent="0">
+            <a:lvl3pPr marL="640080" indent="0">
               <a:buNone/>
               <a:defRPr sz="840"/>
             </a:lvl3pPr>
-            <a:lvl4pPr marL="960110" indent="0">
+            <a:lvl4pPr marL="960120" indent="0">
               <a:buNone/>
               <a:defRPr sz="700"/>
             </a:lvl4pPr>
-            <a:lvl5pPr marL="1280147" indent="0">
+            <a:lvl5pPr marL="1280160" indent="0">
               <a:buNone/>
               <a:defRPr sz="700"/>
             </a:lvl5pPr>
-            <a:lvl6pPr marL="1600184" indent="0">
+            <a:lvl6pPr marL="1600200" indent="0">
               <a:buNone/>
               <a:defRPr sz="700"/>
             </a:lvl6pPr>
-            <a:lvl7pPr marL="1920221" indent="0">
+            <a:lvl7pPr marL="1920240" indent="0">
               <a:buNone/>
               <a:defRPr sz="700"/>
             </a:lvl7pPr>
-            <a:lvl8pPr marL="2240258" indent="0">
+            <a:lvl8pPr marL="2240280" indent="0">
               <a:buNone/>
               <a:defRPr sz="700"/>
             </a:lvl8pPr>
-            <a:lvl9pPr marL="2560294" indent="0">
+            <a:lvl9pPr marL="2560320" indent="0">
               <a:buNone/>
               <a:defRPr sz="700"/>
             </a:lvl9pPr>
@@ -2400,7 +2400,7 @@
     </p:spTree>
     <p:extLst>
       <p:ext uri="{BB962C8B-B14F-4D97-AF65-F5344CB8AC3E}">
-        <p14:creationId xmlns:p14="http://schemas.microsoft.com/office/powerpoint/2010/main" val="1523969546"/>
+        <p14:creationId xmlns:p14="http://schemas.microsoft.com/office/powerpoint/2010/main" val="3321050533"/>
       </p:ext>
     </p:extLst>
   </p:cSld>
@@ -2444,8 +2444,8 @@
         </p:nvSpPr>
         <p:spPr>
           <a:xfrm>
-            <a:off x="440055" y="486838"/>
-            <a:ext cx="5520690" cy="1767417"/>
+            <a:off x="440055" y="438153"/>
+            <a:ext cx="5520690" cy="1590676"/>
           </a:xfrm>
           <a:prstGeom prst="rect">
             <a:avLst/>
@@ -2477,8 +2477,8 @@
         </p:nvSpPr>
         <p:spPr>
           <a:xfrm>
-            <a:off x="440055" y="2434167"/>
-            <a:ext cx="5520690" cy="5801784"/>
+            <a:off x="440055" y="2190749"/>
+            <a:ext cx="5520690" cy="5221607"/>
           </a:xfrm>
           <a:prstGeom prst="rect">
             <a:avLst/>
@@ -2539,8 +2539,8 @@
         </p:nvSpPr>
         <p:spPr>
           <a:xfrm>
-            <a:off x="440055" y="8475138"/>
-            <a:ext cx="1440180" cy="486833"/>
+            <a:off x="440055" y="7627622"/>
+            <a:ext cx="1440180" cy="438150"/>
           </a:xfrm>
           <a:prstGeom prst="rect">
             <a:avLst/>
@@ -2580,8 +2580,8 @@
         </p:nvSpPr>
         <p:spPr>
           <a:xfrm>
-            <a:off x="2120265" y="8475138"/>
-            <a:ext cx="2160270" cy="486833"/>
+            <a:off x="2120265" y="7627622"/>
+            <a:ext cx="2160270" cy="438150"/>
           </a:xfrm>
           <a:prstGeom prst="rect">
             <a:avLst/>
@@ -2617,8 +2617,8 @@
         </p:nvSpPr>
         <p:spPr>
           <a:xfrm>
-            <a:off x="4520565" y="8475138"/>
-            <a:ext cx="1440180" cy="486833"/>
+            <a:off x="4520565" y="7627622"/>
+            <a:ext cx="1440180" cy="438150"/>
           </a:xfrm>
           <a:prstGeom prst="rect">
             <a:avLst/>
@@ -2649,27 +2649,27 @@
     </p:spTree>
     <p:extLst>
       <p:ext uri="{BB962C8B-B14F-4D97-AF65-F5344CB8AC3E}">
-        <p14:creationId xmlns:p14="http://schemas.microsoft.com/office/powerpoint/2010/main" val="467740096"/>
+        <p14:creationId xmlns:p14="http://schemas.microsoft.com/office/powerpoint/2010/main" val="3742306113"/>
       </p:ext>
     </p:extLst>
   </p:cSld>
   <p:clrMap bg1="lt1" tx1="dk1" bg2="lt2" tx2="dk2" accent1="accent1" accent2="accent2" accent3="accent3" accent4="accent4" accent5="accent5" accent6="accent6" hlink="hlink" folHlink="folHlink"/>
   <p:sldLayoutIdLst>
-    <p:sldLayoutId id="2147483697" r:id="rId1"/>
-    <p:sldLayoutId id="2147483698" r:id="rId2"/>
-    <p:sldLayoutId id="2147483699" r:id="rId3"/>
-    <p:sldLayoutId id="2147483700" r:id="rId4"/>
-    <p:sldLayoutId id="2147483701" r:id="rId5"/>
-    <p:sldLayoutId id="2147483702" r:id="rId6"/>
-    <p:sldLayoutId id="2147483703" r:id="rId7"/>
-    <p:sldLayoutId id="2147483704" r:id="rId8"/>
-    <p:sldLayoutId id="2147483705" r:id="rId9"/>
-    <p:sldLayoutId id="2147483706" r:id="rId10"/>
-    <p:sldLayoutId id="2147483707" r:id="rId11"/>
+    <p:sldLayoutId id="2147483709" r:id="rId1"/>
+    <p:sldLayoutId id="2147483710" r:id="rId2"/>
+    <p:sldLayoutId id="2147483711" r:id="rId3"/>
+    <p:sldLayoutId id="2147483712" r:id="rId4"/>
+    <p:sldLayoutId id="2147483713" r:id="rId5"/>
+    <p:sldLayoutId id="2147483714" r:id="rId6"/>
+    <p:sldLayoutId id="2147483715" r:id="rId7"/>
+    <p:sldLayoutId id="2147483716" r:id="rId8"/>
+    <p:sldLayoutId id="2147483717" r:id="rId9"/>
+    <p:sldLayoutId id="2147483718" r:id="rId10"/>
+    <p:sldLayoutId id="2147483719" r:id="rId11"/>
   </p:sldLayoutIdLst>
   <p:txStyles>
     <p:titleStyle>
-      <a:lvl1pPr algn="l" defTabSz="640074" rtl="0" eaLnBrk="1" latinLnBrk="0" hangingPunct="1">
+      <a:lvl1pPr algn="l" defTabSz="640080" rtl="0" eaLnBrk="1" latinLnBrk="0" hangingPunct="1">
         <a:lnSpc>
           <a:spcPct val="90000"/>
         </a:lnSpc>
@@ -2688,7 +2688,7 @@
       </a:lvl1pPr>
     </p:titleStyle>
     <p:bodyStyle>
-      <a:lvl1pPr marL="160018" indent="-160018" algn="l" defTabSz="640074" rtl="0" eaLnBrk="1" latinLnBrk="0" hangingPunct="1">
+      <a:lvl1pPr marL="160020" indent="-160020" algn="l" defTabSz="640080" rtl="0" eaLnBrk="1" latinLnBrk="0" hangingPunct="1">
         <a:lnSpc>
           <a:spcPct val="90000"/>
         </a:lnSpc>
@@ -2706,7 +2706,7 @@
           <a:cs typeface="+mn-cs"/>
         </a:defRPr>
       </a:lvl1pPr>
-      <a:lvl2pPr marL="480055" indent="-160018" algn="l" defTabSz="640074" rtl="0" eaLnBrk="1" latinLnBrk="0" hangingPunct="1">
+      <a:lvl2pPr marL="480060" indent="-160020" algn="l" defTabSz="640080" rtl="0" eaLnBrk="1" latinLnBrk="0" hangingPunct="1">
         <a:lnSpc>
           <a:spcPct val="90000"/>
         </a:lnSpc>
@@ -2724,7 +2724,7 @@
           <a:cs typeface="+mn-cs"/>
         </a:defRPr>
       </a:lvl2pPr>
-      <a:lvl3pPr marL="800092" indent="-160018" algn="l" defTabSz="640074" rtl="0" eaLnBrk="1" latinLnBrk="0" hangingPunct="1">
+      <a:lvl3pPr marL="800100" indent="-160020" algn="l" defTabSz="640080" rtl="0" eaLnBrk="1" latinLnBrk="0" hangingPunct="1">
         <a:lnSpc>
           <a:spcPct val="90000"/>
         </a:lnSpc>
@@ -2742,7 +2742,7 @@
           <a:cs typeface="+mn-cs"/>
         </a:defRPr>
       </a:lvl3pPr>
-      <a:lvl4pPr marL="1120129" indent="-160018" algn="l" defTabSz="640074" rtl="0" eaLnBrk="1" latinLnBrk="0" hangingPunct="1">
+      <a:lvl4pPr marL="1120140" indent="-160020" algn="l" defTabSz="640080" rtl="0" eaLnBrk="1" latinLnBrk="0" hangingPunct="1">
         <a:lnSpc>
           <a:spcPct val="90000"/>
         </a:lnSpc>
@@ -2760,7 +2760,7 @@
           <a:cs typeface="+mn-cs"/>
         </a:defRPr>
       </a:lvl4pPr>
-      <a:lvl5pPr marL="1440166" indent="-160018" algn="l" defTabSz="640074" rtl="0" eaLnBrk="1" latinLnBrk="0" hangingPunct="1">
+      <a:lvl5pPr marL="1440180" indent="-160020" algn="l" defTabSz="640080" rtl="0" eaLnBrk="1" latinLnBrk="0" hangingPunct="1">
         <a:lnSpc>
           <a:spcPct val="90000"/>
         </a:lnSpc>
@@ -2778,7 +2778,7 @@
           <a:cs typeface="+mn-cs"/>
         </a:defRPr>
       </a:lvl5pPr>
-      <a:lvl6pPr marL="1760202" indent="-160018" algn="l" defTabSz="640074" rtl="0" eaLnBrk="1" latinLnBrk="0" hangingPunct="1">
+      <a:lvl6pPr marL="1760220" indent="-160020" algn="l" defTabSz="640080" rtl="0" eaLnBrk="1" latinLnBrk="0" hangingPunct="1">
         <a:lnSpc>
           <a:spcPct val="90000"/>
         </a:lnSpc>
@@ -2796,7 +2796,7 @@
           <a:cs typeface="+mn-cs"/>
         </a:defRPr>
       </a:lvl6pPr>
-      <a:lvl7pPr marL="2080239" indent="-160018" algn="l" defTabSz="640074" rtl="0" eaLnBrk="1" latinLnBrk="0" hangingPunct="1">
+      <a:lvl7pPr marL="2080260" indent="-160020" algn="l" defTabSz="640080" rtl="0" eaLnBrk="1" latinLnBrk="0" hangingPunct="1">
         <a:lnSpc>
           <a:spcPct val="90000"/>
         </a:lnSpc>
@@ -2814,7 +2814,7 @@
           <a:cs typeface="+mn-cs"/>
         </a:defRPr>
       </a:lvl7pPr>
-      <a:lvl8pPr marL="2400276" indent="-160018" algn="l" defTabSz="640074" rtl="0" eaLnBrk="1" latinLnBrk="0" hangingPunct="1">
+      <a:lvl8pPr marL="2400300" indent="-160020" algn="l" defTabSz="640080" rtl="0" eaLnBrk="1" latinLnBrk="0" hangingPunct="1">
         <a:lnSpc>
           <a:spcPct val="90000"/>
         </a:lnSpc>
@@ -2832,7 +2832,7 @@
           <a:cs typeface="+mn-cs"/>
         </a:defRPr>
       </a:lvl8pPr>
-      <a:lvl9pPr marL="2720313" indent="-160018" algn="l" defTabSz="640074" rtl="0" eaLnBrk="1" latinLnBrk="0" hangingPunct="1">
+      <a:lvl9pPr marL="2720340" indent="-160020" algn="l" defTabSz="640080" rtl="0" eaLnBrk="1" latinLnBrk="0" hangingPunct="1">
         <a:lnSpc>
           <a:spcPct val="90000"/>
         </a:lnSpc>
@@ -2855,7 +2855,7 @@
       <a:defPPr>
         <a:defRPr lang="en-US"/>
       </a:defPPr>
-      <a:lvl1pPr marL="0" algn="l" defTabSz="640074" rtl="0" eaLnBrk="1" latinLnBrk="0" hangingPunct="1">
+      <a:lvl1pPr marL="0" algn="l" defTabSz="640080" rtl="0" eaLnBrk="1" latinLnBrk="0" hangingPunct="1">
         <a:defRPr sz="1260" kern="1200">
           <a:solidFill>
             <a:schemeClr val="tx1"/>
@@ -2865,7 +2865,7 @@
           <a:cs typeface="+mn-cs"/>
         </a:defRPr>
       </a:lvl1pPr>
-      <a:lvl2pPr marL="320037" algn="l" defTabSz="640074" rtl="0" eaLnBrk="1" latinLnBrk="0" hangingPunct="1">
+      <a:lvl2pPr marL="320040" algn="l" defTabSz="640080" rtl="0" eaLnBrk="1" latinLnBrk="0" hangingPunct="1">
         <a:defRPr sz="1260" kern="1200">
           <a:solidFill>
             <a:schemeClr val="tx1"/>
@@ -2875,7 +2875,7 @@
           <a:cs typeface="+mn-cs"/>
         </a:defRPr>
       </a:lvl2pPr>
-      <a:lvl3pPr marL="640074" algn="l" defTabSz="640074" rtl="0" eaLnBrk="1" latinLnBrk="0" hangingPunct="1">
+      <a:lvl3pPr marL="640080" algn="l" defTabSz="640080" rtl="0" eaLnBrk="1" latinLnBrk="0" hangingPunct="1">
         <a:defRPr sz="1260" kern="1200">
           <a:solidFill>
             <a:schemeClr val="tx1"/>
@@ -2885,7 +2885,7 @@
           <a:cs typeface="+mn-cs"/>
         </a:defRPr>
       </a:lvl3pPr>
-      <a:lvl4pPr marL="960110" algn="l" defTabSz="640074" rtl="0" eaLnBrk="1" latinLnBrk="0" hangingPunct="1">
+      <a:lvl4pPr marL="960120" algn="l" defTabSz="640080" rtl="0" eaLnBrk="1" latinLnBrk="0" hangingPunct="1">
         <a:defRPr sz="1260" kern="1200">
           <a:solidFill>
             <a:schemeClr val="tx1"/>
@@ -2895,7 +2895,7 @@
           <a:cs typeface="+mn-cs"/>
         </a:defRPr>
       </a:lvl4pPr>
-      <a:lvl5pPr marL="1280147" algn="l" defTabSz="640074" rtl="0" eaLnBrk="1" latinLnBrk="0" hangingPunct="1">
+      <a:lvl5pPr marL="1280160" algn="l" defTabSz="640080" rtl="0" eaLnBrk="1" latinLnBrk="0" hangingPunct="1">
         <a:defRPr sz="1260" kern="1200">
           <a:solidFill>
             <a:schemeClr val="tx1"/>
@@ -2905,7 +2905,7 @@
           <a:cs typeface="+mn-cs"/>
         </a:defRPr>
       </a:lvl5pPr>
-      <a:lvl6pPr marL="1600184" algn="l" defTabSz="640074" rtl="0" eaLnBrk="1" latinLnBrk="0" hangingPunct="1">
+      <a:lvl6pPr marL="1600200" algn="l" defTabSz="640080" rtl="0" eaLnBrk="1" latinLnBrk="0" hangingPunct="1">
         <a:defRPr sz="1260" kern="1200">
           <a:solidFill>
             <a:schemeClr val="tx1"/>
@@ -2915,7 +2915,7 @@
           <a:cs typeface="+mn-cs"/>
         </a:defRPr>
       </a:lvl6pPr>
-      <a:lvl7pPr marL="1920221" algn="l" defTabSz="640074" rtl="0" eaLnBrk="1" latinLnBrk="0" hangingPunct="1">
+      <a:lvl7pPr marL="1920240" algn="l" defTabSz="640080" rtl="0" eaLnBrk="1" latinLnBrk="0" hangingPunct="1">
         <a:defRPr sz="1260" kern="1200">
           <a:solidFill>
             <a:schemeClr val="tx1"/>
@@ -2925,7 +2925,7 @@
           <a:cs typeface="+mn-cs"/>
         </a:defRPr>
       </a:lvl7pPr>
-      <a:lvl8pPr marL="2240258" algn="l" defTabSz="640074" rtl="0" eaLnBrk="1" latinLnBrk="0" hangingPunct="1">
+      <a:lvl8pPr marL="2240280" algn="l" defTabSz="640080" rtl="0" eaLnBrk="1" latinLnBrk="0" hangingPunct="1">
         <a:defRPr sz="1260" kern="1200">
           <a:solidFill>
             <a:schemeClr val="tx1"/>
@@ -2935,7 +2935,7 @@
           <a:cs typeface="+mn-cs"/>
         </a:defRPr>
       </a:lvl8pPr>
-      <a:lvl9pPr marL="2560294" algn="l" defTabSz="640074" rtl="0" eaLnBrk="1" latinLnBrk="0" hangingPunct="1">
+      <a:lvl9pPr marL="2560320" algn="l" defTabSz="640080" rtl="0" eaLnBrk="1" latinLnBrk="0" hangingPunct="1">
         <a:defRPr sz="1260" kern="1200">
           <a:solidFill>
             <a:schemeClr val="tx1"/>
@@ -2983,7 +2983,7 @@
             </p:nvSpPr>
             <p:spPr>
               <a:xfrm>
-                <a:off x="2853339" y="2386435"/>
+                <a:off x="2853339" y="1929238"/>
                 <a:ext cx="685800" cy="639191"/>
               </a:xfrm>
               <a:prstGeom prst="ellipse">
@@ -3115,7 +3115,7 @@
             </p:nvSpPr>
             <p:spPr>
               <a:xfrm>
-                <a:off x="2853339" y="2386435"/>
+                <a:off x="2853339" y="1929238"/>
                 <a:ext cx="685800" cy="639191"/>
               </a:xfrm>
               <a:prstGeom prst="ellipse">
@@ -3164,7 +3164,7 @@
             </p:nvSpPr>
             <p:spPr>
               <a:xfrm>
-                <a:off x="2853339" y="3625982"/>
+                <a:off x="2853339" y="3168785"/>
                 <a:ext cx="685800" cy="639191"/>
               </a:xfrm>
               <a:prstGeom prst="ellipse">
@@ -3296,7 +3296,7 @@
             </p:nvSpPr>
             <p:spPr>
               <a:xfrm>
-                <a:off x="2853339" y="3625982"/>
+                <a:off x="2853339" y="3168785"/>
                 <a:ext cx="685800" cy="639191"/>
               </a:xfrm>
               <a:prstGeom prst="ellipse">
@@ -3345,7 +3345,7 @@
             </p:nvSpPr>
             <p:spPr>
               <a:xfrm>
-                <a:off x="2853339" y="4918242"/>
+                <a:off x="2853339" y="4461045"/>
                 <a:ext cx="685800" cy="639191"/>
               </a:xfrm>
               <a:prstGeom prst="ellipse">
@@ -3477,7 +3477,7 @@
             </p:nvSpPr>
             <p:spPr>
               <a:xfrm>
-                <a:off x="2853339" y="4918242"/>
+                <a:off x="2853339" y="4461045"/>
                 <a:ext cx="685800" cy="639191"/>
               </a:xfrm>
               <a:prstGeom prst="ellipse">
@@ -3526,7 +3526,7 @@
             </p:nvSpPr>
             <p:spPr>
               <a:xfrm>
-                <a:off x="1596870" y="6077885"/>
+                <a:off x="1596870" y="5620688"/>
                 <a:ext cx="685800" cy="639191"/>
               </a:xfrm>
               <a:prstGeom prst="ellipse">
@@ -3658,7 +3658,7 @@
             </p:nvSpPr>
             <p:spPr>
               <a:xfrm>
-                <a:off x="1596870" y="6077885"/>
+                <a:off x="1596870" y="5620688"/>
                 <a:ext cx="685800" cy="639191"/>
               </a:xfrm>
               <a:prstGeom prst="ellipse">
@@ -3707,7 +3707,7 @@
             </p:nvSpPr>
             <p:spPr>
               <a:xfrm>
-                <a:off x="4118131" y="6077885"/>
+                <a:off x="4118131" y="5620688"/>
                 <a:ext cx="685800" cy="639191"/>
               </a:xfrm>
               <a:prstGeom prst="ellipse">
@@ -3840,7 +3840,7 @@
             </p:nvSpPr>
             <p:spPr>
               <a:xfrm>
-                <a:off x="4118131" y="6077885"/>
+                <a:off x="4118131" y="5620688"/>
                 <a:ext cx="685800" cy="639191"/>
               </a:xfrm>
               <a:prstGeom prst="ellipse">
@@ -3891,7 +3891,7 @@
         </p:nvCxnSpPr>
         <p:spPr>
           <a:xfrm>
-            <a:off x="3196239" y="3025624"/>
+            <a:off x="3196239" y="2568424"/>
             <a:ext cx="0" cy="600356"/>
           </a:xfrm>
           <a:prstGeom prst="straightConnector1">
@@ -3937,7 +3937,7 @@
         </p:nvCxnSpPr>
         <p:spPr>
           <a:xfrm>
-            <a:off x="3196239" y="4265173"/>
+            <a:off x="3196239" y="3807976"/>
             <a:ext cx="0" cy="653069"/>
           </a:xfrm>
           <a:prstGeom prst="straightConnector1">
@@ -3983,7 +3983,7 @@
         </p:nvCxnSpPr>
         <p:spPr>
           <a:xfrm flipH="1">
-            <a:off x="2182240" y="5463820"/>
+            <a:off x="2182240" y="5006620"/>
             <a:ext cx="771536" cy="707666"/>
           </a:xfrm>
           <a:prstGeom prst="straightConnector1">
@@ -4029,7 +4029,7 @@
         </p:nvCxnSpPr>
         <p:spPr>
           <a:xfrm>
-            <a:off x="3438714" y="5463820"/>
+            <a:off x="3438717" y="5006620"/>
             <a:ext cx="779859" cy="707666"/>
           </a:xfrm>
           <a:prstGeom prst="straightConnector1">
@@ -4074,7 +4074,7 @@
             </p:nvSpPr>
             <p:spPr>
               <a:xfrm>
-                <a:off x="484799" y="5428740"/>
+                <a:off x="484799" y="4971543"/>
                 <a:ext cx="2197510" cy="461665"/>
               </a:xfrm>
               <a:prstGeom prst="rect">
@@ -4137,7 +4137,7 @@
             </p:nvSpPr>
             <p:spPr>
               <a:xfrm>
-                <a:off x="484799" y="5428740"/>
+                <a:off x="484799" y="4971543"/>
                 <a:ext cx="2197510" cy="461665"/>
               </a:xfrm>
               <a:prstGeom prst="rect">
@@ -4181,7 +4181,7 @@
             </p:nvSpPr>
             <p:spPr>
               <a:xfrm>
-                <a:off x="3828640" y="5426102"/>
+                <a:off x="3828643" y="4968905"/>
                 <a:ext cx="2651237" cy="461665"/>
               </a:xfrm>
               <a:prstGeom prst="rect">
@@ -4250,7 +4250,7 @@
             </p:nvSpPr>
             <p:spPr>
               <a:xfrm>
-                <a:off x="3828640" y="5426102"/>
+                <a:off x="3828643" y="4968905"/>
                 <a:ext cx="2651237" cy="461665"/>
               </a:xfrm>
               <a:prstGeom prst="rect">
@@ -4324,7 +4324,7 @@
             </p:nvSpPr>
             <p:spPr>
               <a:xfrm>
-                <a:off x="3887912" y="1674513"/>
+                <a:off x="3887915" y="1217316"/>
                 <a:ext cx="587311" cy="545287"/>
               </a:xfrm>
               <a:prstGeom prst="ellipse">
@@ -4456,7 +4456,7 @@
             </p:nvSpPr>
             <p:spPr>
               <a:xfrm>
-                <a:off x="3887912" y="1674513"/>
+                <a:off x="3887915" y="1217316"/>
                 <a:ext cx="587311" cy="545287"/>
               </a:xfrm>
               <a:prstGeom prst="ellipse">
@@ -4507,7 +4507,7 @@
         </p:nvCxnSpPr>
         <p:spPr>
           <a:xfrm>
-            <a:off x="4181564" y="2219800"/>
+            <a:off x="4181564" y="1762603"/>
             <a:ext cx="0" cy="453113"/>
           </a:xfrm>
           <a:prstGeom prst="straightConnector1">
@@ -4551,7 +4551,7 @@
             </p:nvSpPr>
             <p:spPr>
               <a:xfrm>
-                <a:off x="3887912" y="2672913"/>
+                <a:off x="3887915" y="2215716"/>
                 <a:ext cx="587311" cy="545287"/>
               </a:xfrm>
               <a:prstGeom prst="ellipse">
@@ -4683,7 +4683,7 @@
             </p:nvSpPr>
             <p:spPr>
               <a:xfrm>
-                <a:off x="3887912" y="2672913"/>
+                <a:off x="3887915" y="2215716"/>
                 <a:ext cx="587311" cy="545287"/>
               </a:xfrm>
               <a:prstGeom prst="ellipse">
@@ -4732,7 +4732,7 @@
             </p:nvSpPr>
             <p:spPr>
               <a:xfrm>
-                <a:off x="3887912" y="3671313"/>
+                <a:off x="3887915" y="3214116"/>
                 <a:ext cx="587311" cy="545287"/>
               </a:xfrm>
               <a:prstGeom prst="ellipse">
@@ -4864,7 +4864,7 @@
             </p:nvSpPr>
             <p:spPr>
               <a:xfrm>
-                <a:off x="3887912" y="3671313"/>
+                <a:off x="3887915" y="3214116"/>
                 <a:ext cx="587311" cy="545287"/>
               </a:xfrm>
               <a:prstGeom prst="ellipse">
@@ -4913,7 +4913,7 @@
             </p:nvSpPr>
             <p:spPr>
               <a:xfrm>
-                <a:off x="3887912" y="4669713"/>
+                <a:off x="3887915" y="4212516"/>
                 <a:ext cx="587311" cy="545287"/>
               </a:xfrm>
               <a:prstGeom prst="ellipse">
@@ -5045,7 +5045,7 @@
             </p:nvSpPr>
             <p:spPr>
               <a:xfrm>
-                <a:off x="3887912" y="4669713"/>
+                <a:off x="3887915" y="4212516"/>
                 <a:ext cx="587311" cy="545287"/>
               </a:xfrm>
               <a:prstGeom prst="ellipse">
@@ -5094,7 +5094,7 @@
             </p:nvSpPr>
             <p:spPr>
               <a:xfrm>
-                <a:off x="5043490" y="5668113"/>
+                <a:off x="5043493" y="5210916"/>
                 <a:ext cx="587311" cy="545287"/>
               </a:xfrm>
               <a:prstGeom prst="ellipse">
@@ -5226,7 +5226,7 @@
             </p:nvSpPr>
             <p:spPr>
               <a:xfrm>
-                <a:off x="5043490" y="5668113"/>
+                <a:off x="5043493" y="5210916"/>
                 <a:ext cx="587311" cy="545287"/>
               </a:xfrm>
               <a:prstGeom prst="ellipse">
@@ -5275,7 +5275,7 @@
             </p:nvSpPr>
             <p:spPr>
               <a:xfrm>
-                <a:off x="5043490" y="6666513"/>
+                <a:off x="5043493" y="6209316"/>
                 <a:ext cx="587311" cy="545287"/>
               </a:xfrm>
               <a:prstGeom prst="ellipse">
@@ -5407,7 +5407,7 @@
             </p:nvSpPr>
             <p:spPr>
               <a:xfrm>
-                <a:off x="5043490" y="6666513"/>
+                <a:off x="5043493" y="6209316"/>
                 <a:ext cx="587311" cy="545287"/>
               </a:xfrm>
               <a:prstGeom prst="ellipse">
@@ -5456,7 +5456,7 @@
             </p:nvSpPr>
             <p:spPr>
               <a:xfrm>
-                <a:off x="5043490" y="7664913"/>
+                <a:off x="5043493" y="7207716"/>
                 <a:ext cx="587311" cy="545287"/>
               </a:xfrm>
               <a:prstGeom prst="ellipse">
@@ -5588,7 +5588,7 @@
             </p:nvSpPr>
             <p:spPr>
               <a:xfrm>
-                <a:off x="5043490" y="7664913"/>
+                <a:off x="5043493" y="7207716"/>
                 <a:ext cx="587311" cy="545287"/>
               </a:xfrm>
               <a:prstGeom prst="ellipse">
@@ -5637,7 +5637,7 @@
             </p:nvSpPr>
             <p:spPr>
               <a:xfrm>
-                <a:off x="5043490" y="4669713"/>
+                <a:off x="5043493" y="4212516"/>
                 <a:ext cx="587311" cy="545287"/>
               </a:xfrm>
               <a:prstGeom prst="ellipse">
@@ -5769,7 +5769,7 @@
             </p:nvSpPr>
             <p:spPr>
               <a:xfrm>
-                <a:off x="5043490" y="4669713"/>
+                <a:off x="5043493" y="4212516"/>
                 <a:ext cx="587311" cy="545287"/>
               </a:xfrm>
               <a:prstGeom prst="ellipse">
@@ -5818,7 +5818,7 @@
             </p:nvSpPr>
             <p:spPr>
               <a:xfrm>
-                <a:off x="817563" y="2672913"/>
+                <a:off x="817566" y="2215716"/>
                 <a:ext cx="587311" cy="545287"/>
               </a:xfrm>
               <a:prstGeom prst="ellipse">
@@ -5870,7 +5870,7 @@
                       <m:sSub>
                         <m:sSubPr>
                           <m:ctrlPr>
-                            <a:rPr lang="en-US" sz="2400" i="1" smtClean="0">
+                            <a:rPr lang="en-US" sz="2400" i="1">
                               <a:ln>
                                 <a:solidFill>
                                   <a:schemeClr val="tx1"/>
@@ -5970,7 +5970,7 @@
             </p:nvSpPr>
             <p:spPr>
               <a:xfrm>
-                <a:off x="817563" y="2672913"/>
+                <a:off x="817566" y="2215716"/>
                 <a:ext cx="587311" cy="545287"/>
               </a:xfrm>
               <a:prstGeom prst="ellipse">
@@ -6019,7 +6019,7 @@
             </p:nvSpPr>
             <p:spPr>
               <a:xfrm>
-                <a:off x="817563" y="3668407"/>
+                <a:off x="817566" y="3211210"/>
                 <a:ext cx="587311" cy="545287"/>
               </a:xfrm>
               <a:prstGeom prst="ellipse">
@@ -6171,7 +6171,7 @@
             </p:nvSpPr>
             <p:spPr>
               <a:xfrm>
-                <a:off x="817563" y="3668407"/>
+                <a:off x="817566" y="3211210"/>
                 <a:ext cx="587311" cy="545287"/>
               </a:xfrm>
               <a:prstGeom prst="ellipse">
@@ -6220,7 +6220,7 @@
             </p:nvSpPr>
             <p:spPr>
               <a:xfrm>
-                <a:off x="1985672" y="4669711"/>
+                <a:off x="1985675" y="4212514"/>
                 <a:ext cx="587311" cy="545287"/>
               </a:xfrm>
               <a:prstGeom prst="ellipse">
@@ -6372,7 +6372,7 @@
             </p:nvSpPr>
             <p:spPr>
               <a:xfrm>
-                <a:off x="1985672" y="4669711"/>
+                <a:off x="1985675" y="4212514"/>
                 <a:ext cx="587311" cy="545287"/>
               </a:xfrm>
               <a:prstGeom prst="ellipse">
@@ -6421,7 +6421,7 @@
             </p:nvSpPr>
             <p:spPr>
               <a:xfrm>
-                <a:off x="817564" y="4669712"/>
+                <a:off x="817567" y="4212515"/>
                 <a:ext cx="587311" cy="545287"/>
               </a:xfrm>
               <a:prstGeom prst="ellipse">
@@ -6573,7 +6573,7 @@
             </p:nvSpPr>
             <p:spPr>
               <a:xfrm>
-                <a:off x="817564" y="4669712"/>
+                <a:off x="817567" y="4212515"/>
                 <a:ext cx="587311" cy="545287"/>
               </a:xfrm>
               <a:prstGeom prst="ellipse">
@@ -6622,7 +6622,7 @@
             </p:nvSpPr>
             <p:spPr>
               <a:xfrm>
-                <a:off x="1982662" y="5668112"/>
+                <a:off x="1982665" y="5210915"/>
                 <a:ext cx="587311" cy="545287"/>
               </a:xfrm>
               <a:prstGeom prst="ellipse">
@@ -6774,7 +6774,7 @@
             </p:nvSpPr>
             <p:spPr>
               <a:xfrm>
-                <a:off x="1982662" y="5668112"/>
+                <a:off x="1982665" y="5210915"/>
                 <a:ext cx="587311" cy="545287"/>
               </a:xfrm>
               <a:prstGeom prst="ellipse">
@@ -6823,7 +6823,7 @@
             </p:nvSpPr>
             <p:spPr>
               <a:xfrm>
-                <a:off x="1982662" y="6666513"/>
+                <a:off x="1982665" y="6209316"/>
                 <a:ext cx="587311" cy="545287"/>
               </a:xfrm>
               <a:prstGeom prst="ellipse">
@@ -6975,7 +6975,7 @@
             </p:nvSpPr>
             <p:spPr>
               <a:xfrm>
-                <a:off x="1982662" y="6666513"/>
+                <a:off x="1982665" y="6209316"/>
                 <a:ext cx="587311" cy="545287"/>
               </a:xfrm>
               <a:prstGeom prst="ellipse">
@@ -7024,7 +7024,7 @@
             </p:nvSpPr>
             <p:spPr>
               <a:xfrm>
-                <a:off x="1982662" y="7664912"/>
+                <a:off x="1982665" y="7207715"/>
                 <a:ext cx="587311" cy="545287"/>
               </a:xfrm>
               <a:prstGeom prst="ellipse">
@@ -7176,7 +7176,7 @@
             </p:nvSpPr>
             <p:spPr>
               <a:xfrm>
-                <a:off x="1982662" y="7664912"/>
+                <a:off x="1982665" y="7207715"/>
                 <a:ext cx="587311" cy="545287"/>
               </a:xfrm>
               <a:prstGeom prst="ellipse">
@@ -7227,7 +7227,7 @@
         </p:nvCxnSpPr>
         <p:spPr>
           <a:xfrm>
-            <a:off x="4181564" y="3218200"/>
+            <a:off x="4181564" y="2761003"/>
             <a:ext cx="0" cy="453113"/>
           </a:xfrm>
           <a:prstGeom prst="straightConnector1">
@@ -7273,7 +7273,7 @@
         </p:nvCxnSpPr>
         <p:spPr>
           <a:xfrm>
-            <a:off x="4181564" y="4216600"/>
+            <a:off x="4181564" y="3759403"/>
             <a:ext cx="0" cy="453113"/>
           </a:xfrm>
           <a:prstGeom prst="straightConnector1">
@@ -7319,7 +7319,7 @@
         </p:nvCxnSpPr>
         <p:spPr>
           <a:xfrm>
-            <a:off x="4181569" y="4216596"/>
+            <a:off x="4181572" y="3759396"/>
             <a:ext cx="947931" cy="532968"/>
           </a:xfrm>
           <a:prstGeom prst="straightConnector1">
@@ -7365,7 +7365,7 @@
         </p:nvCxnSpPr>
         <p:spPr>
           <a:xfrm>
-            <a:off x="5337141" y="5215000"/>
+            <a:off x="5337141" y="4757803"/>
             <a:ext cx="0" cy="453113"/>
           </a:xfrm>
           <a:prstGeom prst="straightConnector1">
@@ -7411,7 +7411,7 @@
         </p:nvCxnSpPr>
         <p:spPr>
           <a:xfrm>
-            <a:off x="5337141" y="6213400"/>
+            <a:off x="5337141" y="5756203"/>
             <a:ext cx="0" cy="453113"/>
           </a:xfrm>
           <a:prstGeom prst="straightConnector1">
@@ -7457,7 +7457,7 @@
         </p:nvCxnSpPr>
         <p:spPr>
           <a:xfrm>
-            <a:off x="5337141" y="7211800"/>
+            <a:off x="5337141" y="6754603"/>
             <a:ext cx="0" cy="453113"/>
           </a:xfrm>
           <a:prstGeom prst="straightConnector1">
@@ -7503,7 +7503,7 @@
         </p:nvCxnSpPr>
         <p:spPr>
           <a:xfrm flipH="1">
-            <a:off x="1318866" y="4216600"/>
+            <a:off x="1318869" y="3759403"/>
             <a:ext cx="2862703" cy="532967"/>
           </a:xfrm>
           <a:prstGeom prst="straightConnector1">
@@ -7550,7 +7550,7 @@
         </p:nvCxnSpPr>
         <p:spPr>
           <a:xfrm flipH="1">
-            <a:off x="2486973" y="4216600"/>
+            <a:off x="2486976" y="3759400"/>
             <a:ext cx="1694595" cy="532966"/>
           </a:xfrm>
           <a:prstGeom prst="straightConnector1">
@@ -7597,7 +7597,7 @@
         </p:nvCxnSpPr>
         <p:spPr>
           <a:xfrm flipH="1">
-            <a:off x="1318862" y="2219797"/>
+            <a:off x="1318862" y="1762597"/>
             <a:ext cx="2862704" cy="532968"/>
           </a:xfrm>
           <a:prstGeom prst="straightConnector1">
@@ -7644,7 +7644,7 @@
         </p:nvCxnSpPr>
         <p:spPr>
           <a:xfrm flipH="1">
-            <a:off x="1318864" y="3218200"/>
+            <a:off x="1318864" y="2761000"/>
             <a:ext cx="2862704" cy="530062"/>
           </a:xfrm>
           <a:prstGeom prst="straightConnector1">
@@ -7691,7 +7691,7 @@
         </p:nvCxnSpPr>
         <p:spPr>
           <a:xfrm flipH="1">
-            <a:off x="2483961" y="5215000"/>
+            <a:off x="2483961" y="4757803"/>
             <a:ext cx="2853182" cy="532967"/>
           </a:xfrm>
           <a:prstGeom prst="straightConnector1">
@@ -7738,7 +7738,7 @@
         </p:nvCxnSpPr>
         <p:spPr>
           <a:xfrm flipH="1">
-            <a:off x="2483963" y="6213397"/>
+            <a:off x="2483966" y="5756197"/>
             <a:ext cx="2853183" cy="532968"/>
           </a:xfrm>
           <a:prstGeom prst="straightConnector1">
@@ -7785,7 +7785,7 @@
         </p:nvCxnSpPr>
         <p:spPr>
           <a:xfrm flipH="1">
-            <a:off x="2483963" y="7211800"/>
+            <a:off x="2483966" y="6754603"/>
             <a:ext cx="2853183" cy="532967"/>
           </a:xfrm>
           <a:prstGeom prst="straightConnector1">
@@ -7828,8 +7828,8 @@
         </p:nvSpPr>
         <p:spPr>
           <a:xfrm>
-            <a:off x="276226" y="249331"/>
-            <a:ext cx="2714617" cy="646331"/>
+            <a:off x="276227" y="149475"/>
+            <a:ext cx="2714617" cy="523220"/>
           </a:xfrm>
           <a:prstGeom prst="rect">
             <a:avLst/>
@@ -7844,7 +7844,7 @@
           <a:p>
             <a:pPr algn="ctr"/>
             <a:r>
-              <a:rPr lang="en-US" sz="3600" dirty="0"/>
+              <a:rPr lang="en-US" sz="2800" i="1" dirty="0"/>
               <a:t>mechanized</a:t>
             </a:r>
           </a:p>
@@ -7864,8 +7864,8 @@
         </p:nvSpPr>
         <p:spPr>
           <a:xfrm>
-            <a:off x="3367934" y="263253"/>
-            <a:ext cx="2714617" cy="646331"/>
+            <a:off x="3367935" y="163397"/>
+            <a:ext cx="2714617" cy="523220"/>
           </a:xfrm>
           <a:prstGeom prst="rect">
             <a:avLst/>
@@ -7880,7 +7880,7 @@
           <a:p>
             <a:pPr algn="ctr"/>
             <a:r>
-              <a:rPr lang="en-US" sz="3600" dirty="0"/>
+              <a:rPr lang="en-US" sz="2800" i="1" dirty="0"/>
               <a:t>executable</a:t>
             </a:r>
           </a:p>
@@ -7902,7 +7902,7 @@
         </p:nvCxnSpPr>
         <p:spPr>
           <a:xfrm>
-            <a:off x="3227259" y="249331"/>
+            <a:off x="3227259" y="-207869"/>
             <a:ext cx="0" cy="8460913"/>
           </a:xfrm>
           <a:prstGeom prst="line">

--- a/images/tree.pptx
+++ b/images/tree.pptx
@@ -4324,7 +4324,7 @@
             </p:nvSpPr>
             <p:spPr>
               <a:xfrm>
-                <a:off x="3887915" y="1217316"/>
+                <a:off x="3887915" y="1206797"/>
                 <a:ext cx="587311" cy="545287"/>
               </a:xfrm>
               <a:prstGeom prst="ellipse">
@@ -4456,7 +4456,7 @@
             </p:nvSpPr>
             <p:spPr>
               <a:xfrm>
-                <a:off x="3887915" y="1217316"/>
+                <a:off x="3887915" y="1206797"/>
                 <a:ext cx="587311" cy="545287"/>
               </a:xfrm>
               <a:prstGeom prst="ellipse">
@@ -4507,7 +4507,7 @@
         </p:nvCxnSpPr>
         <p:spPr>
           <a:xfrm>
-            <a:off x="4181564" y="1762603"/>
+            <a:off x="4181564" y="1752084"/>
             <a:ext cx="0" cy="453113"/>
           </a:xfrm>
           <a:prstGeom prst="straightConnector1">
@@ -4551,7 +4551,7 @@
             </p:nvSpPr>
             <p:spPr>
               <a:xfrm>
-                <a:off x="3887915" y="2215716"/>
+                <a:off x="3887915" y="2205197"/>
                 <a:ext cx="587311" cy="545287"/>
               </a:xfrm>
               <a:prstGeom prst="ellipse">
@@ -4683,7 +4683,7 @@
             </p:nvSpPr>
             <p:spPr>
               <a:xfrm>
-                <a:off x="3887915" y="2215716"/>
+                <a:off x="3887915" y="2205197"/>
                 <a:ext cx="587311" cy="545287"/>
               </a:xfrm>
               <a:prstGeom prst="ellipse">
@@ -4732,7 +4732,7 @@
             </p:nvSpPr>
             <p:spPr>
               <a:xfrm>
-                <a:off x="3887915" y="3214116"/>
+                <a:off x="3887915" y="3203597"/>
                 <a:ext cx="587311" cy="545287"/>
               </a:xfrm>
               <a:prstGeom prst="ellipse">
@@ -4864,7 +4864,7 @@
             </p:nvSpPr>
             <p:spPr>
               <a:xfrm>
-                <a:off x="3887915" y="3214116"/>
+                <a:off x="3887915" y="3203597"/>
                 <a:ext cx="587311" cy="545287"/>
               </a:xfrm>
               <a:prstGeom prst="ellipse">
@@ -4913,7 +4913,7 @@
             </p:nvSpPr>
             <p:spPr>
               <a:xfrm>
-                <a:off x="3887915" y="4212516"/>
+                <a:off x="3887915" y="4201997"/>
                 <a:ext cx="587311" cy="545287"/>
               </a:xfrm>
               <a:prstGeom prst="ellipse">
@@ -5045,7 +5045,7 @@
             </p:nvSpPr>
             <p:spPr>
               <a:xfrm>
-                <a:off x="3887915" y="4212516"/>
+                <a:off x="3887915" y="4201997"/>
                 <a:ext cx="587311" cy="545287"/>
               </a:xfrm>
               <a:prstGeom prst="ellipse">
@@ -5094,7 +5094,7 @@
             </p:nvSpPr>
             <p:spPr>
               <a:xfrm>
-                <a:off x="5043493" y="5210916"/>
+                <a:off x="5043493" y="5200397"/>
                 <a:ext cx="587311" cy="545287"/>
               </a:xfrm>
               <a:prstGeom prst="ellipse">
@@ -5226,7 +5226,7 @@
             </p:nvSpPr>
             <p:spPr>
               <a:xfrm>
-                <a:off x="5043493" y="5210916"/>
+                <a:off x="5043493" y="5200397"/>
                 <a:ext cx="587311" cy="545287"/>
               </a:xfrm>
               <a:prstGeom prst="ellipse">
@@ -5275,7 +5275,7 @@
             </p:nvSpPr>
             <p:spPr>
               <a:xfrm>
-                <a:off x="5043493" y="6209316"/>
+                <a:off x="5043493" y="6198797"/>
                 <a:ext cx="587311" cy="545287"/>
               </a:xfrm>
               <a:prstGeom prst="ellipse">
@@ -5407,7 +5407,7 @@
             </p:nvSpPr>
             <p:spPr>
               <a:xfrm>
-                <a:off x="5043493" y="6209316"/>
+                <a:off x="5043493" y="6198797"/>
                 <a:ext cx="587311" cy="545287"/>
               </a:xfrm>
               <a:prstGeom prst="ellipse">
@@ -5456,7 +5456,7 @@
             </p:nvSpPr>
             <p:spPr>
               <a:xfrm>
-                <a:off x="5043493" y="7207716"/>
+                <a:off x="5043493" y="7197197"/>
                 <a:ext cx="587311" cy="545287"/>
               </a:xfrm>
               <a:prstGeom prst="ellipse">
@@ -5588,7 +5588,7 @@
             </p:nvSpPr>
             <p:spPr>
               <a:xfrm>
-                <a:off x="5043493" y="7207716"/>
+                <a:off x="5043493" y="7197197"/>
                 <a:ext cx="587311" cy="545287"/>
               </a:xfrm>
               <a:prstGeom prst="ellipse">
@@ -5637,7 +5637,7 @@
             </p:nvSpPr>
             <p:spPr>
               <a:xfrm>
-                <a:off x="5043493" y="4212516"/>
+                <a:off x="5043493" y="4201997"/>
                 <a:ext cx="587311" cy="545287"/>
               </a:xfrm>
               <a:prstGeom prst="ellipse">
@@ -5769,7 +5769,7 @@
             </p:nvSpPr>
             <p:spPr>
               <a:xfrm>
-                <a:off x="5043493" y="4212516"/>
+                <a:off x="5043493" y="4201997"/>
                 <a:ext cx="587311" cy="545287"/>
               </a:xfrm>
               <a:prstGeom prst="ellipse">
@@ -5818,7 +5818,7 @@
             </p:nvSpPr>
             <p:spPr>
               <a:xfrm>
-                <a:off x="817566" y="2215716"/>
+                <a:off x="817566" y="2205197"/>
                 <a:ext cx="587311" cy="545287"/>
               </a:xfrm>
               <a:prstGeom prst="ellipse">
@@ -5970,7 +5970,7 @@
             </p:nvSpPr>
             <p:spPr>
               <a:xfrm>
-                <a:off x="817566" y="2215716"/>
+                <a:off x="817566" y="2205197"/>
                 <a:ext cx="587311" cy="545287"/>
               </a:xfrm>
               <a:prstGeom prst="ellipse">
@@ -6019,7 +6019,7 @@
             </p:nvSpPr>
             <p:spPr>
               <a:xfrm>
-                <a:off x="817566" y="3211210"/>
+                <a:off x="817566" y="3200691"/>
                 <a:ext cx="587311" cy="545287"/>
               </a:xfrm>
               <a:prstGeom prst="ellipse">
@@ -6171,7 +6171,7 @@
             </p:nvSpPr>
             <p:spPr>
               <a:xfrm>
-                <a:off x="817566" y="3211210"/>
+                <a:off x="817566" y="3200691"/>
                 <a:ext cx="587311" cy="545287"/>
               </a:xfrm>
               <a:prstGeom prst="ellipse">
@@ -6220,7 +6220,7 @@
             </p:nvSpPr>
             <p:spPr>
               <a:xfrm>
-                <a:off x="1985675" y="4212514"/>
+                <a:off x="1985675" y="4201995"/>
                 <a:ext cx="587311" cy="545287"/>
               </a:xfrm>
               <a:prstGeom prst="ellipse">
@@ -6372,7 +6372,7 @@
             </p:nvSpPr>
             <p:spPr>
               <a:xfrm>
-                <a:off x="1985675" y="4212514"/>
+                <a:off x="1985675" y="4201995"/>
                 <a:ext cx="587311" cy="545287"/>
               </a:xfrm>
               <a:prstGeom prst="ellipse">
@@ -6421,7 +6421,7 @@
             </p:nvSpPr>
             <p:spPr>
               <a:xfrm>
-                <a:off x="817567" y="4212515"/>
+                <a:off x="817567" y="4201996"/>
                 <a:ext cx="587311" cy="545287"/>
               </a:xfrm>
               <a:prstGeom prst="ellipse">
@@ -6573,7 +6573,7 @@
             </p:nvSpPr>
             <p:spPr>
               <a:xfrm>
-                <a:off x="817567" y="4212515"/>
+                <a:off x="817567" y="4201996"/>
                 <a:ext cx="587311" cy="545287"/>
               </a:xfrm>
               <a:prstGeom prst="ellipse">
@@ -6622,7 +6622,7 @@
             </p:nvSpPr>
             <p:spPr>
               <a:xfrm>
-                <a:off x="1982665" y="5210915"/>
+                <a:off x="1982665" y="5200396"/>
                 <a:ext cx="587311" cy="545287"/>
               </a:xfrm>
               <a:prstGeom prst="ellipse">
@@ -6774,7 +6774,7 @@
             </p:nvSpPr>
             <p:spPr>
               <a:xfrm>
-                <a:off x="1982665" y="5210915"/>
+                <a:off x="1982665" y="5200396"/>
                 <a:ext cx="587311" cy="545287"/>
               </a:xfrm>
               <a:prstGeom prst="ellipse">
@@ -6823,7 +6823,7 @@
             </p:nvSpPr>
             <p:spPr>
               <a:xfrm>
-                <a:off x="1982665" y="6209316"/>
+                <a:off x="1982665" y="6198797"/>
                 <a:ext cx="587311" cy="545287"/>
               </a:xfrm>
               <a:prstGeom prst="ellipse">
@@ -6975,7 +6975,7 @@
             </p:nvSpPr>
             <p:spPr>
               <a:xfrm>
-                <a:off x="1982665" y="6209316"/>
+                <a:off x="1982665" y="6198797"/>
                 <a:ext cx="587311" cy="545287"/>
               </a:xfrm>
               <a:prstGeom prst="ellipse">
@@ -7024,7 +7024,7 @@
             </p:nvSpPr>
             <p:spPr>
               <a:xfrm>
-                <a:off x="1982665" y="7207715"/>
+                <a:off x="1982665" y="7197196"/>
                 <a:ext cx="587311" cy="545287"/>
               </a:xfrm>
               <a:prstGeom prst="ellipse">
@@ -7176,7 +7176,7 @@
             </p:nvSpPr>
             <p:spPr>
               <a:xfrm>
-                <a:off x="1982665" y="7207715"/>
+                <a:off x="1982665" y="7197196"/>
                 <a:ext cx="587311" cy="545287"/>
               </a:xfrm>
               <a:prstGeom prst="ellipse">
@@ -7227,7 +7227,7 @@
         </p:nvCxnSpPr>
         <p:spPr>
           <a:xfrm>
-            <a:off x="4181564" y="2761003"/>
+            <a:off x="4181564" y="2750484"/>
             <a:ext cx="0" cy="453113"/>
           </a:xfrm>
           <a:prstGeom prst="straightConnector1">
@@ -7273,7 +7273,7 @@
         </p:nvCxnSpPr>
         <p:spPr>
           <a:xfrm>
-            <a:off x="4181564" y="3759403"/>
+            <a:off x="4181564" y="3748884"/>
             <a:ext cx="0" cy="453113"/>
           </a:xfrm>
           <a:prstGeom prst="straightConnector1">
@@ -7319,7 +7319,7 @@
         </p:nvCxnSpPr>
         <p:spPr>
           <a:xfrm>
-            <a:off x="4181572" y="3759396"/>
+            <a:off x="4181572" y="3748877"/>
             <a:ext cx="947931" cy="532968"/>
           </a:xfrm>
           <a:prstGeom prst="straightConnector1">
@@ -7365,7 +7365,7 @@
         </p:nvCxnSpPr>
         <p:spPr>
           <a:xfrm>
-            <a:off x="5337141" y="4757803"/>
+            <a:off x="5337141" y="4747284"/>
             <a:ext cx="0" cy="453113"/>
           </a:xfrm>
           <a:prstGeom prst="straightConnector1">
@@ -7411,7 +7411,7 @@
         </p:nvCxnSpPr>
         <p:spPr>
           <a:xfrm>
-            <a:off x="5337141" y="5756203"/>
+            <a:off x="5337141" y="5745684"/>
             <a:ext cx="0" cy="453113"/>
           </a:xfrm>
           <a:prstGeom prst="straightConnector1">
@@ -7457,7 +7457,7 @@
         </p:nvCxnSpPr>
         <p:spPr>
           <a:xfrm>
-            <a:off x="5337141" y="6754603"/>
+            <a:off x="5337141" y="6744084"/>
             <a:ext cx="0" cy="453113"/>
           </a:xfrm>
           <a:prstGeom prst="straightConnector1">
@@ -7503,7 +7503,7 @@
         </p:nvCxnSpPr>
         <p:spPr>
           <a:xfrm flipH="1">
-            <a:off x="1318869" y="3759403"/>
+            <a:off x="1318869" y="3748884"/>
             <a:ext cx="2862703" cy="532967"/>
           </a:xfrm>
           <a:prstGeom prst="straightConnector1">
@@ -7513,7 +7513,7 @@
             <a:solidFill>
               <a:schemeClr val="tx1"/>
             </a:solidFill>
-            <a:prstDash val="lgDash"/>
+            <a:prstDash val="dash"/>
             <a:tailEnd type="arrow" w="lg" len="lg"/>
           </a:ln>
         </p:spPr>
@@ -7550,7 +7550,7 @@
         </p:nvCxnSpPr>
         <p:spPr>
           <a:xfrm flipH="1">
-            <a:off x="2486976" y="3759400"/>
+            <a:off x="2486976" y="3748881"/>
             <a:ext cx="1694595" cy="532966"/>
           </a:xfrm>
           <a:prstGeom prst="straightConnector1">
@@ -7560,7 +7560,7 @@
             <a:solidFill>
               <a:schemeClr val="tx1"/>
             </a:solidFill>
-            <a:prstDash val="lgDash"/>
+            <a:prstDash val="dash"/>
             <a:tailEnd type="arrow" w="lg" len="lg"/>
           </a:ln>
         </p:spPr>
@@ -7597,7 +7597,7 @@
         </p:nvCxnSpPr>
         <p:spPr>
           <a:xfrm flipH="1">
-            <a:off x="1318862" y="1762597"/>
+            <a:off x="1318862" y="1752078"/>
             <a:ext cx="2862704" cy="532968"/>
           </a:xfrm>
           <a:prstGeom prst="straightConnector1">
@@ -7607,7 +7607,7 @@
             <a:solidFill>
               <a:schemeClr val="tx1"/>
             </a:solidFill>
-            <a:prstDash val="lgDash"/>
+            <a:prstDash val="dash"/>
             <a:tailEnd type="arrow" w="lg" len="lg"/>
           </a:ln>
         </p:spPr>
@@ -7644,7 +7644,7 @@
         </p:nvCxnSpPr>
         <p:spPr>
           <a:xfrm flipH="1">
-            <a:off x="1318864" y="2761000"/>
+            <a:off x="1318864" y="2750481"/>
             <a:ext cx="2862704" cy="530062"/>
           </a:xfrm>
           <a:prstGeom prst="straightConnector1">
@@ -7654,7 +7654,7 @@
             <a:solidFill>
               <a:schemeClr val="tx1"/>
             </a:solidFill>
-            <a:prstDash val="lgDash"/>
+            <a:prstDash val="dash"/>
             <a:tailEnd type="arrow" w="lg" len="lg"/>
           </a:ln>
         </p:spPr>
@@ -7691,7 +7691,7 @@
         </p:nvCxnSpPr>
         <p:spPr>
           <a:xfrm flipH="1">
-            <a:off x="2483961" y="4757803"/>
+            <a:off x="2483961" y="4747284"/>
             <a:ext cx="2853182" cy="532967"/>
           </a:xfrm>
           <a:prstGeom prst="straightConnector1">
@@ -7701,7 +7701,7 @@
             <a:solidFill>
               <a:schemeClr val="tx1"/>
             </a:solidFill>
-            <a:prstDash val="lgDash"/>
+            <a:prstDash val="dash"/>
             <a:tailEnd type="arrow" w="lg" len="lg"/>
           </a:ln>
         </p:spPr>
@@ -7738,7 +7738,7 @@
         </p:nvCxnSpPr>
         <p:spPr>
           <a:xfrm flipH="1">
-            <a:off x="2483966" y="5756197"/>
+            <a:off x="2483966" y="5745678"/>
             <a:ext cx="2853183" cy="532968"/>
           </a:xfrm>
           <a:prstGeom prst="straightConnector1">
@@ -7748,7 +7748,7 @@
             <a:solidFill>
               <a:schemeClr val="tx1"/>
             </a:solidFill>
-            <a:prstDash val="lgDash"/>
+            <a:prstDash val="dash"/>
             <a:tailEnd type="arrow" w="lg" len="lg"/>
           </a:ln>
         </p:spPr>
@@ -7785,7 +7785,7 @@
         </p:nvCxnSpPr>
         <p:spPr>
           <a:xfrm flipH="1">
-            <a:off x="2483966" y="6754603"/>
+            <a:off x="2483966" y="6744084"/>
             <a:ext cx="2853183" cy="532967"/>
           </a:xfrm>
           <a:prstGeom prst="straightConnector1">
@@ -7795,7 +7795,7 @@
             <a:solidFill>
               <a:schemeClr val="tx1"/>
             </a:solidFill>
-            <a:prstDash val="lgDash"/>
+            <a:prstDash val="dash"/>
             <a:tailEnd type="arrow" w="lg" len="lg"/>
           </a:ln>
         </p:spPr>
@@ -7828,8 +7828,8 @@
         </p:nvSpPr>
         <p:spPr>
           <a:xfrm>
-            <a:off x="276227" y="149475"/>
-            <a:ext cx="2714617" cy="523220"/>
+            <a:off x="4141084" y="279370"/>
+            <a:ext cx="2392113" cy="400110"/>
           </a:xfrm>
           <a:prstGeom prst="rect">
             <a:avLst/>
@@ -7842,10 +7842,11 @@
           </a:bodyPr>
           <a:lstStyle/>
           <a:p>
-            <a:pPr algn="ctr"/>
             <a:r>
-              <a:rPr lang="en-US" sz="2800" i="1" dirty="0"/>
-              <a:t>mechanized</a:t>
+              <a:rPr lang="en-US" sz="2000" b="1" i="1" dirty="0">
+                <a:latin typeface="+mj-lt"/>
+              </a:rPr>
+              <a:t>executable semantics</a:t>
             </a:r>
           </a:p>
         </p:txBody>
@@ -7864,8 +7865,8 @@
         </p:nvSpPr>
         <p:spPr>
           <a:xfrm>
-            <a:off x="3367935" y="163397"/>
-            <a:ext cx="2714617" cy="523220"/>
+            <a:off x="689145" y="279370"/>
+            <a:ext cx="2587039" cy="400110"/>
           </a:xfrm>
           <a:prstGeom prst="rect">
             <a:avLst/>
@@ -7878,10 +7879,11 @@
           </a:bodyPr>
           <a:lstStyle/>
           <a:p>
-            <a:pPr algn="ctr"/>
             <a:r>
-              <a:rPr lang="en-US" sz="2800" i="1" dirty="0"/>
-              <a:t>executable</a:t>
+              <a:rPr lang="en-US" sz="2000" b="1" i="1" dirty="0">
+                <a:latin typeface="+mj-lt"/>
+              </a:rPr>
+              <a:t>mechanized semantics</a:t>
             </a:r>
           </a:p>
         </p:txBody>
@@ -7901,18 +7903,107 @@
           <p:nvPr/>
         </p:nvCxnSpPr>
         <p:spPr>
-          <a:xfrm>
-            <a:off x="3227259" y="-207869"/>
-            <a:ext cx="0" cy="8460913"/>
+          <a:xfrm flipH="1">
+            <a:off x="3200400" y="895704"/>
+            <a:ext cx="26859" cy="7319329"/>
           </a:xfrm>
           <a:prstGeom prst="line">
             <a:avLst/>
           </a:prstGeom>
-          <a:ln w="60325">
+          <a:ln w="76200">
             <a:solidFill>
               <a:srgbClr val="C00000"/>
             </a:solidFill>
             <a:prstDash val="solid"/>
+          </a:ln>
+        </p:spPr>
+        <p:style>
+          <a:lnRef idx="1">
+            <a:schemeClr val="accent1"/>
+          </a:lnRef>
+          <a:fillRef idx="0">
+            <a:schemeClr val="accent1"/>
+          </a:fillRef>
+          <a:effectRef idx="0">
+            <a:schemeClr val="accent1"/>
+          </a:effectRef>
+          <a:fontRef idx="minor">
+            <a:schemeClr val="tx1"/>
+          </a:fontRef>
+        </p:style>
+      </p:cxnSp>
+      <p:cxnSp>
+        <p:nvCxnSpPr>
+          <p:cNvPr id="109" name="Straight Arrow Connector 108">
+            <a:extLst>
+              <a:ext uri="{FF2B5EF4-FFF2-40B4-BE49-F238E27FC236}">
+                <a16:creationId xmlns:a16="http://schemas.microsoft.com/office/drawing/2014/main" id="{3CD4AC1F-EE79-4A70-9DA9-9F9C61341975}"/>
+              </a:ext>
+            </a:extLst>
+          </p:cNvPr>
+          <p:cNvCxnSpPr>
+            <a:cxnSpLocks/>
+          </p:cNvCxnSpPr>
+          <p:nvPr/>
+        </p:nvCxnSpPr>
+        <p:spPr>
+          <a:xfrm>
+            <a:off x="3512638" y="496664"/>
+            <a:ext cx="628446" cy="0"/>
+          </a:xfrm>
+          <a:prstGeom prst="straightConnector1">
+            <a:avLst/>
+          </a:prstGeom>
+          <a:ln w="28575">
+            <a:solidFill>
+              <a:schemeClr val="tx1"/>
+            </a:solidFill>
+            <a:tailEnd type="arrow" w="lg" len="lg"/>
+          </a:ln>
+        </p:spPr>
+        <p:style>
+          <a:lnRef idx="1">
+            <a:schemeClr val="accent1"/>
+          </a:lnRef>
+          <a:fillRef idx="0">
+            <a:schemeClr val="accent1"/>
+          </a:fillRef>
+          <a:effectRef idx="0">
+            <a:schemeClr val="accent1"/>
+          </a:effectRef>
+          <a:fontRef idx="minor">
+            <a:schemeClr val="tx1"/>
+          </a:fontRef>
+        </p:style>
+      </p:cxnSp>
+      <p:cxnSp>
+        <p:nvCxnSpPr>
+          <p:cNvPr id="118" name="Straight Arrow Connector 117">
+            <a:extLst>
+              <a:ext uri="{FF2B5EF4-FFF2-40B4-BE49-F238E27FC236}">
+                <a16:creationId xmlns:a16="http://schemas.microsoft.com/office/drawing/2014/main" id="{9D271DAC-0502-486A-869F-B2733E7542E5}"/>
+              </a:ext>
+            </a:extLst>
+          </p:cNvPr>
+          <p:cNvCxnSpPr>
+            <a:cxnSpLocks/>
+          </p:cNvCxnSpPr>
+          <p:nvPr/>
+        </p:nvCxnSpPr>
+        <p:spPr>
+          <a:xfrm>
+            <a:off x="71209" y="496664"/>
+            <a:ext cx="628446" cy="0"/>
+          </a:xfrm>
+          <a:prstGeom prst="straightConnector1">
+            <a:avLst/>
+          </a:prstGeom>
+          <a:ln w="28575">
+            <a:solidFill>
+              <a:schemeClr val="tx1"/>
+            </a:solidFill>
+            <a:prstDash val="dash"/>
+            <a:tailEnd type="arrow" w="lg" len="lg"/>
           </a:ln>
         </p:spPr>
         <p:style>

--- a/images/tree.pptx
+++ b/images/tree.pptx
@@ -105,6 +105,11 @@
       </a:defRPr>
     </a:lvl9pPr>
   </p:defaultTextStyle>
+  <p:extLst>
+    <p:ext uri="{EFAFB233-063F-42B5-8137-9DF3F51BA10A}">
+      <p15:sldGuideLst xmlns:p15="http://schemas.microsoft.com/office/powerpoint/2012/main"/>
+    </p:ext>
+  </p:extLst>
 </p:presentation>
 </file>
 
@@ -239,7 +244,7 @@
           <a:p>
             <a:fld id="{38A16130-5E25-47D4-A299-838FA4625973}" type="datetimeFigureOut">
               <a:rPr lang="en-US" smtClean="0"/>
-              <a:t>5/28/2026</a:t>
+              <a:t>6/6/2026</a:t>
             </a:fld>
             <a:endParaRPr lang="en-US"/>
           </a:p>
@@ -409,7 +414,7 @@
           <a:p>
             <a:fld id="{38A16130-5E25-47D4-A299-838FA4625973}" type="datetimeFigureOut">
               <a:rPr lang="en-US" smtClean="0"/>
-              <a:t>5/28/2026</a:t>
+              <a:t>6/6/2026</a:t>
             </a:fld>
             <a:endParaRPr lang="en-US"/>
           </a:p>
@@ -589,7 +594,7 @@
           <a:p>
             <a:fld id="{38A16130-5E25-47D4-A299-838FA4625973}" type="datetimeFigureOut">
               <a:rPr lang="en-US" smtClean="0"/>
-              <a:t>5/28/2026</a:t>
+              <a:t>6/6/2026</a:t>
             </a:fld>
             <a:endParaRPr lang="en-US"/>
           </a:p>
@@ -759,7 +764,7 @@
           <a:p>
             <a:fld id="{38A16130-5E25-47D4-A299-838FA4625973}" type="datetimeFigureOut">
               <a:rPr lang="en-US" smtClean="0"/>
-              <a:t>5/28/2026</a:t>
+              <a:t>6/6/2026</a:t>
             </a:fld>
             <a:endParaRPr lang="en-US"/>
           </a:p>
@@ -1003,7 +1008,7 @@
           <a:p>
             <a:fld id="{38A16130-5E25-47D4-A299-838FA4625973}" type="datetimeFigureOut">
               <a:rPr lang="en-US" smtClean="0"/>
-              <a:t>5/28/2026</a:t>
+              <a:t>6/6/2026</a:t>
             </a:fld>
             <a:endParaRPr lang="en-US"/>
           </a:p>
@@ -1235,7 +1240,7 @@
           <a:p>
             <a:fld id="{38A16130-5E25-47D4-A299-838FA4625973}" type="datetimeFigureOut">
               <a:rPr lang="en-US" smtClean="0"/>
-              <a:t>5/28/2026</a:t>
+              <a:t>6/6/2026</a:t>
             </a:fld>
             <a:endParaRPr lang="en-US"/>
           </a:p>
@@ -1602,7 +1607,7 @@
           <a:p>
             <a:fld id="{38A16130-5E25-47D4-A299-838FA4625973}" type="datetimeFigureOut">
               <a:rPr lang="en-US" smtClean="0"/>
-              <a:t>5/28/2026</a:t>
+              <a:t>6/6/2026</a:t>
             </a:fld>
             <a:endParaRPr lang="en-US"/>
           </a:p>
@@ -1720,7 +1725,7 @@
           <a:p>
             <a:fld id="{38A16130-5E25-47D4-A299-838FA4625973}" type="datetimeFigureOut">
               <a:rPr lang="en-US" smtClean="0"/>
-              <a:t>5/28/2026</a:t>
+              <a:t>6/6/2026</a:t>
             </a:fld>
             <a:endParaRPr lang="en-US"/>
           </a:p>
@@ -1815,7 +1820,7 @@
           <a:p>
             <a:fld id="{38A16130-5E25-47D4-A299-838FA4625973}" type="datetimeFigureOut">
               <a:rPr lang="en-US" smtClean="0"/>
-              <a:t>5/28/2026</a:t>
+              <a:t>6/6/2026</a:t>
             </a:fld>
             <a:endParaRPr lang="en-US"/>
           </a:p>
@@ -2092,7 +2097,7 @@
           <a:p>
             <a:fld id="{38A16130-5E25-47D4-A299-838FA4625973}" type="datetimeFigureOut">
               <a:rPr lang="en-US" smtClean="0"/>
-              <a:t>5/28/2026</a:t>
+              <a:t>6/6/2026</a:t>
             </a:fld>
             <a:endParaRPr lang="en-US"/>
           </a:p>
@@ -2349,7 +2354,7 @@
           <a:p>
             <a:fld id="{38A16130-5E25-47D4-A299-838FA4625973}" type="datetimeFigureOut">
               <a:rPr lang="en-US" smtClean="0"/>
-              <a:t>5/28/2026</a:t>
+              <a:t>6/6/2026</a:t>
             </a:fld>
             <a:endParaRPr lang="en-US"/>
           </a:p>
@@ -2562,7 +2567,7 @@
           <a:p>
             <a:fld id="{38A16130-5E25-47D4-A299-838FA4625973}" type="datetimeFigureOut">
               <a:rPr lang="en-US" smtClean="0"/>
-              <a:t>5/28/2026</a:t>
+              <a:t>6/6/2026</a:t>
             </a:fld>
             <a:endParaRPr lang="en-US"/>
           </a:p>
@@ -2967,8 +2972,8 @@
           <a:chExt cx="0" cy="0"/>
         </a:xfrm>
       </p:grpSpPr>
-      <mc:AlternateContent xmlns:mc="http://schemas.openxmlformats.org/markup-compatibility/2006">
-        <mc:Choice xmlns:a14="http://schemas.microsoft.com/office/drawing/2010/main" Requires="a14">
+      <mc:AlternateContent xmlns:mc="http://schemas.openxmlformats.org/markup-compatibility/2006" xmlns:a14="http://schemas.microsoft.com/office/drawing/2010/main">
+        <mc:Choice Requires="a14">
           <p:sp>
             <p:nvSpPr>
               <p:cNvPr id="4" name="Oval 3">
@@ -3098,7 +3103,7 @@
             </p:txBody>
           </p:sp>
         </mc:Choice>
-        <mc:Fallback>
+        <mc:Fallback xmlns="">
           <p:sp>
             <p:nvSpPr>
               <p:cNvPr id="4" name="Oval 3">
@@ -3148,8 +3153,8 @@
           </p:sp>
         </mc:Fallback>
       </mc:AlternateContent>
-      <mc:AlternateContent xmlns:mc="http://schemas.openxmlformats.org/markup-compatibility/2006">
-        <mc:Choice xmlns:a14="http://schemas.microsoft.com/office/drawing/2010/main" Requires="a14">
+      <mc:AlternateContent xmlns:mc="http://schemas.openxmlformats.org/markup-compatibility/2006" xmlns:a14="http://schemas.microsoft.com/office/drawing/2010/main">
+        <mc:Choice Requires="a14">
           <p:sp>
             <p:nvSpPr>
               <p:cNvPr id="9" name="Oval 8">
@@ -3279,7 +3284,7 @@
             </p:txBody>
           </p:sp>
         </mc:Choice>
-        <mc:Fallback>
+        <mc:Fallback xmlns="">
           <p:sp>
             <p:nvSpPr>
               <p:cNvPr id="9" name="Oval 8">
@@ -3329,8 +3334,8 @@
           </p:sp>
         </mc:Fallback>
       </mc:AlternateContent>
-      <mc:AlternateContent xmlns:mc="http://schemas.openxmlformats.org/markup-compatibility/2006">
-        <mc:Choice xmlns:a14="http://schemas.microsoft.com/office/drawing/2010/main" Requires="a14">
+      <mc:AlternateContent xmlns:mc="http://schemas.openxmlformats.org/markup-compatibility/2006" xmlns:a14="http://schemas.microsoft.com/office/drawing/2010/main">
+        <mc:Choice Requires="a14">
           <p:sp>
             <p:nvSpPr>
               <p:cNvPr id="10" name="Oval 9">
@@ -3460,7 +3465,7 @@
             </p:txBody>
           </p:sp>
         </mc:Choice>
-        <mc:Fallback>
+        <mc:Fallback xmlns="">
           <p:sp>
             <p:nvSpPr>
               <p:cNvPr id="10" name="Oval 9">
@@ -3510,8 +3515,8 @@
           </p:sp>
         </mc:Fallback>
       </mc:AlternateContent>
-      <mc:AlternateContent xmlns:mc="http://schemas.openxmlformats.org/markup-compatibility/2006">
-        <mc:Choice xmlns:a14="http://schemas.microsoft.com/office/drawing/2010/main" Requires="a14">
+      <mc:AlternateContent xmlns:mc="http://schemas.openxmlformats.org/markup-compatibility/2006" xmlns:a14="http://schemas.microsoft.com/office/drawing/2010/main">
+        <mc:Choice Requires="a14">
           <p:sp>
             <p:nvSpPr>
               <p:cNvPr id="11" name="Oval 10">
@@ -3641,7 +3646,7 @@
             </p:txBody>
           </p:sp>
         </mc:Choice>
-        <mc:Fallback>
+        <mc:Fallback xmlns="">
           <p:sp>
             <p:nvSpPr>
               <p:cNvPr id="11" name="Oval 10">
@@ -3691,8 +3696,8 @@
           </p:sp>
         </mc:Fallback>
       </mc:AlternateContent>
-      <mc:AlternateContent xmlns:mc="http://schemas.openxmlformats.org/markup-compatibility/2006">
-        <mc:Choice xmlns:a14="http://schemas.microsoft.com/office/drawing/2010/main" Requires="a14">
+      <mc:AlternateContent xmlns:mc="http://schemas.openxmlformats.org/markup-compatibility/2006" xmlns:a14="http://schemas.microsoft.com/office/drawing/2010/main">
+        <mc:Choice Requires="a14">
           <p:sp>
             <p:nvSpPr>
               <p:cNvPr id="12" name="Oval 11">
@@ -3823,7 +3828,7 @@
             </p:txBody>
           </p:sp>
         </mc:Choice>
-        <mc:Fallback>
+        <mc:Fallback xmlns="">
           <p:sp>
             <p:nvSpPr>
               <p:cNvPr id="12" name="Oval 11">
@@ -4058,8 +4063,8 @@
           </a:fontRef>
         </p:style>
       </p:cxnSp>
-      <mc:AlternateContent xmlns:mc="http://schemas.openxmlformats.org/markup-compatibility/2006">
-        <mc:Choice xmlns:a14="http://schemas.microsoft.com/office/drawing/2010/main" Requires="a14">
+      <mc:AlternateContent xmlns:mc="http://schemas.openxmlformats.org/markup-compatibility/2006" xmlns:a14="http://schemas.microsoft.com/office/drawing/2010/main">
+        <mc:Choice Requires="a14">
           <p:sp>
             <p:nvSpPr>
               <p:cNvPr id="29" name="TextBox 28">
@@ -4088,6 +4093,7 @@
               </a:bodyPr>
               <a:lstStyle/>
               <a:p>
+                <a:pPr/>
                 <a14:m>
                   <m:oMathPara xmlns:m="http://schemas.openxmlformats.org/officeDocument/2006/math">
                     <m:oMathParaPr>
@@ -4120,7 +4126,7 @@
             </p:txBody>
           </p:sp>
         </mc:Choice>
-        <mc:Fallback>
+        <mc:Fallback xmlns="">
           <p:sp>
             <p:nvSpPr>
               <p:cNvPr id="29" name="TextBox 28">
@@ -4165,8 +4171,8 @@
           </p:sp>
         </mc:Fallback>
       </mc:AlternateContent>
-      <mc:AlternateContent xmlns:mc="http://schemas.openxmlformats.org/markup-compatibility/2006">
-        <mc:Choice xmlns:a14="http://schemas.microsoft.com/office/drawing/2010/main" Requires="a14">
+      <mc:AlternateContent xmlns:mc="http://schemas.openxmlformats.org/markup-compatibility/2006" xmlns:a14="http://schemas.microsoft.com/office/drawing/2010/main">
+        <mc:Choice Requires="a14">
           <p:sp>
             <p:nvSpPr>
               <p:cNvPr id="30" name="TextBox 29">
@@ -4195,6 +4201,7 @@
               </a:bodyPr>
               <a:lstStyle/>
               <a:p>
+                <a:pPr/>
                 <a14:m>
                   <m:oMathPara xmlns:m="http://schemas.openxmlformats.org/officeDocument/2006/math">
                     <m:oMathParaPr>
@@ -4233,7 +4240,7 @@
             </p:txBody>
           </p:sp>
         </mc:Choice>
-        <mc:Fallback>
+        <mc:Fallback xmlns="">
           <p:sp>
             <p:nvSpPr>
               <p:cNvPr id="30" name="TextBox 29">
@@ -4308,8 +4315,8 @@
           <a:chExt cx="0" cy="0"/>
         </a:xfrm>
       </p:grpSpPr>
-      <mc:AlternateContent xmlns:mc="http://schemas.openxmlformats.org/markup-compatibility/2006">
-        <mc:Choice xmlns:a14="http://schemas.microsoft.com/office/drawing/2010/main" Requires="a14">
+      <mc:AlternateContent xmlns:mc="http://schemas.openxmlformats.org/markup-compatibility/2006" xmlns:a14="http://schemas.microsoft.com/office/drawing/2010/main">
+        <mc:Choice Requires="a14">
           <p:sp>
             <p:nvSpPr>
               <p:cNvPr id="4" name="Oval 3">
@@ -4439,7 +4446,7 @@
             </p:txBody>
           </p:sp>
         </mc:Choice>
-        <mc:Fallback>
+        <mc:Fallback xmlns="">
           <p:sp>
             <p:nvSpPr>
               <p:cNvPr id="4" name="Oval 3">
@@ -4535,8 +4542,8 @@
           </a:fontRef>
         </p:style>
       </p:cxnSp>
-      <mc:AlternateContent xmlns:mc="http://schemas.openxmlformats.org/markup-compatibility/2006">
-        <mc:Choice xmlns:a14="http://schemas.microsoft.com/office/drawing/2010/main" Requires="a14">
+      <mc:AlternateContent xmlns:mc="http://schemas.openxmlformats.org/markup-compatibility/2006" xmlns:a14="http://schemas.microsoft.com/office/drawing/2010/main">
+        <mc:Choice Requires="a14">
           <p:sp>
             <p:nvSpPr>
               <p:cNvPr id="21" name="Oval 20">
@@ -4666,7 +4673,7 @@
             </p:txBody>
           </p:sp>
         </mc:Choice>
-        <mc:Fallback>
+        <mc:Fallback xmlns="">
           <p:sp>
             <p:nvSpPr>
               <p:cNvPr id="21" name="Oval 20">
@@ -4716,8 +4723,8 @@
           </p:sp>
         </mc:Fallback>
       </mc:AlternateContent>
-      <mc:AlternateContent xmlns:mc="http://schemas.openxmlformats.org/markup-compatibility/2006">
-        <mc:Choice xmlns:a14="http://schemas.microsoft.com/office/drawing/2010/main" Requires="a14">
+      <mc:AlternateContent xmlns:mc="http://schemas.openxmlformats.org/markup-compatibility/2006" xmlns:a14="http://schemas.microsoft.com/office/drawing/2010/main">
+        <mc:Choice Requires="a14">
           <p:sp>
             <p:nvSpPr>
               <p:cNvPr id="24" name="Oval 23">
@@ -4847,7 +4854,7 @@
             </p:txBody>
           </p:sp>
         </mc:Choice>
-        <mc:Fallback>
+        <mc:Fallback xmlns="">
           <p:sp>
             <p:nvSpPr>
               <p:cNvPr id="24" name="Oval 23">
@@ -4897,8 +4904,8 @@
           </p:sp>
         </mc:Fallback>
       </mc:AlternateContent>
-      <mc:AlternateContent xmlns:mc="http://schemas.openxmlformats.org/markup-compatibility/2006">
-        <mc:Choice xmlns:a14="http://schemas.microsoft.com/office/drawing/2010/main" Requires="a14">
+      <mc:AlternateContent xmlns:mc="http://schemas.openxmlformats.org/markup-compatibility/2006" xmlns:a14="http://schemas.microsoft.com/office/drawing/2010/main">
+        <mc:Choice Requires="a14">
           <p:sp>
             <p:nvSpPr>
               <p:cNvPr id="25" name="Oval 24">
@@ -5028,7 +5035,7 @@
             </p:txBody>
           </p:sp>
         </mc:Choice>
-        <mc:Fallback>
+        <mc:Fallback xmlns="">
           <p:sp>
             <p:nvSpPr>
               <p:cNvPr id="25" name="Oval 24">
@@ -5078,8 +5085,8 @@
           </p:sp>
         </mc:Fallback>
       </mc:AlternateContent>
-      <mc:AlternateContent xmlns:mc="http://schemas.openxmlformats.org/markup-compatibility/2006">
-        <mc:Choice xmlns:a14="http://schemas.microsoft.com/office/drawing/2010/main" Requires="a14">
+      <mc:AlternateContent xmlns:mc="http://schemas.openxmlformats.org/markup-compatibility/2006" xmlns:a14="http://schemas.microsoft.com/office/drawing/2010/main">
+        <mc:Choice Requires="a14">
           <p:sp>
             <p:nvSpPr>
               <p:cNvPr id="28" name="Oval 27">
@@ -5209,7 +5216,7 @@
             </p:txBody>
           </p:sp>
         </mc:Choice>
-        <mc:Fallback>
+        <mc:Fallback xmlns="">
           <p:sp>
             <p:nvSpPr>
               <p:cNvPr id="28" name="Oval 27">
@@ -5259,8 +5266,8 @@
           </p:sp>
         </mc:Fallback>
       </mc:AlternateContent>
-      <mc:AlternateContent xmlns:mc="http://schemas.openxmlformats.org/markup-compatibility/2006">
-        <mc:Choice xmlns:a14="http://schemas.microsoft.com/office/drawing/2010/main" Requires="a14">
+      <mc:AlternateContent xmlns:mc="http://schemas.openxmlformats.org/markup-compatibility/2006" xmlns:a14="http://schemas.microsoft.com/office/drawing/2010/main">
+        <mc:Choice Requires="a14">
           <p:sp>
             <p:nvSpPr>
               <p:cNvPr id="31" name="Oval 30">
@@ -5390,7 +5397,7 @@
             </p:txBody>
           </p:sp>
         </mc:Choice>
-        <mc:Fallback>
+        <mc:Fallback xmlns="">
           <p:sp>
             <p:nvSpPr>
               <p:cNvPr id="31" name="Oval 30">
@@ -5440,8 +5447,8 @@
           </p:sp>
         </mc:Fallback>
       </mc:AlternateContent>
-      <mc:AlternateContent xmlns:mc="http://schemas.openxmlformats.org/markup-compatibility/2006">
-        <mc:Choice xmlns:a14="http://schemas.microsoft.com/office/drawing/2010/main" Requires="a14">
+      <mc:AlternateContent xmlns:mc="http://schemas.openxmlformats.org/markup-compatibility/2006" xmlns:a14="http://schemas.microsoft.com/office/drawing/2010/main">
+        <mc:Choice Requires="a14">
           <p:sp>
             <p:nvSpPr>
               <p:cNvPr id="33" name="Oval 32">
@@ -5571,7 +5578,7 @@
             </p:txBody>
           </p:sp>
         </mc:Choice>
-        <mc:Fallback>
+        <mc:Fallback xmlns="">
           <p:sp>
             <p:nvSpPr>
               <p:cNvPr id="33" name="Oval 32">
@@ -5621,8 +5628,8 @@
           </p:sp>
         </mc:Fallback>
       </mc:AlternateContent>
-      <mc:AlternateContent xmlns:mc="http://schemas.openxmlformats.org/markup-compatibility/2006">
-        <mc:Choice xmlns:a14="http://schemas.microsoft.com/office/drawing/2010/main" Requires="a14">
+      <mc:AlternateContent xmlns:mc="http://schemas.openxmlformats.org/markup-compatibility/2006" xmlns:a14="http://schemas.microsoft.com/office/drawing/2010/main">
+        <mc:Choice Requires="a14">
           <p:sp>
             <p:nvSpPr>
               <p:cNvPr id="37" name="Oval 36">
@@ -5752,7 +5759,7 @@
             </p:txBody>
           </p:sp>
         </mc:Choice>
-        <mc:Fallback>
+        <mc:Fallback xmlns="">
           <p:sp>
             <p:nvSpPr>
               <p:cNvPr id="37" name="Oval 36">
@@ -5870,7 +5877,7 @@
                       <m:sSub>
                         <m:sSubPr>
                           <m:ctrlPr>
-                            <a:rPr lang="en-US" sz="2400" i="1">
+                            <a:rPr lang="en-US" sz="2400" b="0" i="1" smtClean="0">
                               <a:ln>
                                 <a:solidFill>
                                   <a:schemeClr val="tx1"/>
@@ -5886,9 +5893,9 @@
                         <m:e>
                           <m:acc>
                             <m:accPr>
-                              <m:chr m:val="̅"/>
+                              <m:chr m:val="̂"/>
                               <m:ctrlPr>
-                                <a:rPr lang="en-US" sz="2400" i="1">
+                                <a:rPr lang="en-US" sz="2400" i="1" smtClean="0">
                                   <a:ln>
                                     <a:solidFill>
                                       <a:schemeClr val="tx1"/>
@@ -5903,7 +5910,7 @@
                             </m:accPr>
                             <m:e>
                               <m:r>
-                                <a:rPr lang="en-US" sz="2400" i="1">
+                                <a:rPr lang="en-US" sz="2400" b="0" i="1" smtClean="0">
                                   <a:ln>
                                     <a:solidFill>
                                       <a:schemeClr val="tx1"/>
@@ -5921,7 +5928,7 @@
                         </m:e>
                         <m:sub>
                           <m:r>
-                            <a:rPr lang="en-US" sz="2400" i="1">
+                            <a:rPr lang="en-US" sz="2400" b="0" i="1" smtClean="0">
                               <a:ln>
                                 <a:solidFill>
                                   <a:schemeClr val="tx1"/>
@@ -5939,7 +5946,7 @@
                     </m:oMath>
                   </m:oMathPara>
                 </a14:m>
-                <a:endParaRPr lang="en-US" sz="2400" i="1" dirty="0">
+                <a:endParaRPr lang="en-US" sz="2400" dirty="0">
                   <a:ln>
                     <a:solidFill>
                       <a:schemeClr val="tx1"/>
@@ -6071,7 +6078,7 @@
                       <m:sSub>
                         <m:sSubPr>
                           <m:ctrlPr>
-                            <a:rPr lang="en-US" sz="2400" i="1">
+                            <a:rPr lang="en-US" sz="2400" i="1" smtClean="0">
                               <a:ln>
                                 <a:solidFill>
                                   <a:schemeClr val="tx1"/>
@@ -6087,7 +6094,7 @@
                         <m:e>
                           <m:acc>
                             <m:accPr>
-                              <m:chr m:val="̅"/>
+                              <m:chr m:val="̂"/>
                               <m:ctrlPr>
                                 <a:rPr lang="en-US" sz="2400" i="1">
                                   <a:ln>
@@ -6122,7 +6129,7 @@
                         </m:e>
                         <m:sub>
                           <m:r>
-                            <a:rPr lang="en-US" sz="2400" i="1">
+                            <a:rPr lang="en-US" sz="2400" b="0" i="1" smtClean="0">
                               <a:ln>
                                 <a:solidFill>
                                   <a:schemeClr val="tx1"/>
@@ -6272,7 +6279,7 @@
                       <m:sSub>
                         <m:sSubPr>
                           <m:ctrlPr>
-                            <a:rPr lang="en-US" sz="2400" i="1">
+                            <a:rPr lang="en-US" sz="2400" i="1" smtClean="0">
                               <a:ln>
                                 <a:solidFill>
                                   <a:schemeClr val="tx1"/>
@@ -6288,7 +6295,7 @@
                         <m:e>
                           <m:acc>
                             <m:accPr>
-                              <m:chr m:val="̅"/>
+                              <m:chr m:val="̂"/>
                               <m:ctrlPr>
                                 <a:rPr lang="en-US" sz="2400" i="1">
                                   <a:ln>
@@ -6323,7 +6330,7 @@
                         </m:e>
                         <m:sub>
                           <m:r>
-                            <a:rPr lang="en-US" sz="2400" i="1">
+                            <a:rPr lang="en-US" sz="2400" b="0" i="1" smtClean="0">
                               <a:ln>
                                 <a:solidFill>
                                   <a:schemeClr val="tx1"/>
@@ -6473,7 +6480,7 @@
                       <m:sSub>
                         <m:sSubPr>
                           <m:ctrlPr>
-                            <a:rPr lang="en-US" sz="2400" i="1">
+                            <a:rPr lang="en-US" sz="2400" i="1" smtClean="0">
                               <a:ln>
                                 <a:solidFill>
                                   <a:schemeClr val="tx1"/>
@@ -6489,7 +6496,7 @@
                         <m:e>
                           <m:acc>
                             <m:accPr>
-                              <m:chr m:val="̅"/>
+                              <m:chr m:val="̂"/>
                               <m:ctrlPr>
                                 <a:rPr lang="en-US" sz="2400" i="1">
                                   <a:ln>
@@ -6524,7 +6531,7 @@
                         </m:e>
                         <m:sub>
                           <m:r>
-                            <a:rPr lang="en-US" sz="2400" i="1">
+                            <a:rPr lang="en-US" sz="2400" b="0" i="1" smtClean="0">
                               <a:ln>
                                 <a:solidFill>
                                   <a:schemeClr val="tx1"/>
@@ -6674,7 +6681,7 @@
                       <m:sSub>
                         <m:sSubPr>
                           <m:ctrlPr>
-                            <a:rPr lang="en-US" sz="2400" i="1">
+                            <a:rPr lang="en-US" sz="2400" i="1" smtClean="0">
                               <a:ln>
                                 <a:solidFill>
                                   <a:schemeClr val="tx1"/>
@@ -6690,7 +6697,7 @@
                         <m:e>
                           <m:acc>
                             <m:accPr>
-                              <m:chr m:val="̅"/>
+                              <m:chr m:val="̂"/>
                               <m:ctrlPr>
                                 <a:rPr lang="en-US" sz="2400" i="1">
                                   <a:ln>
@@ -6725,7 +6732,7 @@
                         </m:e>
                         <m:sub>
                           <m:r>
-                            <a:rPr lang="en-US" sz="2400" i="1">
+                            <a:rPr lang="en-US" sz="2400" b="0" i="1" smtClean="0">
                               <a:ln>
                                 <a:solidFill>
                                   <a:schemeClr val="tx1"/>
@@ -6875,7 +6882,7 @@
                       <m:sSub>
                         <m:sSubPr>
                           <m:ctrlPr>
-                            <a:rPr lang="en-US" sz="2400" i="1">
+                            <a:rPr lang="en-US" sz="2400" i="1" smtClean="0">
                               <a:ln>
                                 <a:solidFill>
                                   <a:schemeClr val="tx1"/>
@@ -6891,7 +6898,7 @@
                         <m:e>
                           <m:acc>
                             <m:accPr>
-                              <m:chr m:val="̅"/>
+                              <m:chr m:val="̂"/>
                               <m:ctrlPr>
                                 <a:rPr lang="en-US" sz="2400" i="1">
                                   <a:ln>
@@ -6926,7 +6933,7 @@
                         </m:e>
                         <m:sub>
                           <m:r>
-                            <a:rPr lang="en-US" sz="2400" i="1">
+                            <a:rPr lang="en-US" sz="2400" b="0" i="1" smtClean="0">
                               <a:ln>
                                 <a:solidFill>
                                   <a:schemeClr val="tx1"/>
@@ -7076,7 +7083,7 @@
                       <m:sSub>
                         <m:sSubPr>
                           <m:ctrlPr>
-                            <a:rPr lang="en-US" sz="2400" i="1">
+                            <a:rPr lang="en-US" sz="2400" i="1" smtClean="0">
                               <a:ln>
                                 <a:solidFill>
                                   <a:schemeClr val="tx1"/>
@@ -7092,7 +7099,7 @@
                         <m:e>
                           <m:acc>
                             <m:accPr>
-                              <m:chr m:val="̅"/>
+                              <m:chr m:val="̂"/>
                               <m:ctrlPr>
                                 <a:rPr lang="en-US" sz="2400" i="1">
                                   <a:ln>
@@ -7127,7 +7134,7 @@
                         </m:e>
                         <m:sub>
                           <m:r>
-                            <a:rPr lang="en-US" sz="2400" i="1">
+                            <a:rPr lang="en-US" sz="2400" b="0" i="1" smtClean="0">
                               <a:ln>
                                 <a:solidFill>
                                   <a:schemeClr val="tx1"/>
@@ -7910,9 +7917,11 @@
           <a:prstGeom prst="line">
             <a:avLst/>
           </a:prstGeom>
-          <a:ln w="76200">
+          <a:ln w="95250">
             <a:solidFill>
-              <a:srgbClr val="C00000"/>
+              <a:srgbClr val="C00000">
+                <a:alpha val="50000"/>
+              </a:srgbClr>
             </a:solidFill>
             <a:prstDash val="solid"/>
           </a:ln>
